--- a/FELCOM_Presentation.pptx
+++ b/FELCOM_Presentation.pptx
@@ -18,9 +18,11 @@
     <p:sldId id="266" r:id="rId12"/>
     <p:sldId id="267" r:id="rId13"/>
     <p:sldId id="268" r:id="rId14"/>
+    <p:sldId id="269" r:id="rId15"/>
+    <p:sldId id="270" r:id="rId16"/>
   </p:sldIdLst>
   <p:notesMasterIdLst>
-    <p:notesMasterId r:id="rId15"/>
+    <p:notesMasterId r:id="rId17"/>
   </p:notesMasterIdLst>
   <p:sldSz cx="12191695" cy="6858000"/>
   <p:notesSz cx="6858000" cy="12191695"/>
@@ -908,6 +910,182 @@
 </p:notes>
 </file>
 
+<file path=ppt/notesSlides/notesSlide14.xml><?xml version="1.0" encoding="utf-8"?>
+<p:notes xmlns:a="http://schemas.openxmlformats.org/drawingml/2006/main" xmlns:r="http://schemas.openxmlformats.org/officeDocument/2006/relationships" xmlns:p="http://schemas.openxmlformats.org/presentationml/2006/main">
+  <p:cSld>
+    <p:spTree>
+      <p:nvGrpSpPr>
+        <p:cNvPr id="1" name=""/>
+        <p:cNvGrpSpPr/>
+        <p:nvPr/>
+      </p:nvGrpSpPr>
+      <p:grpSpPr>
+        <a:xfrm>
+          <a:off x="0" y="0"/>
+          <a:ext cx="0" cy="0"/>
+          <a:chOff x="0" y="0"/>
+          <a:chExt cx="0" cy="0"/>
+        </a:xfrm>
+      </p:grpSpPr>
+      <p:sp>
+        <p:nvSpPr>
+          <p:cNvPr id="2" name="Slide Image Placeholder 1"/>
+          <p:cNvSpPr>
+            <a:spLocks noGrp="1" noRot="1" noChangeAspect="1"/>
+          </p:cNvSpPr>
+          <p:nvPr>
+            <p:ph type="sldImg"/>
+          </p:nvPr>
+        </p:nvSpPr>
+        <p:spPr/>
+      </p:sp>
+      <p:sp>
+        <p:nvSpPr>
+          <p:cNvPr id="3" name="Notes Placeholder 2"/>
+          <p:cNvSpPr>
+            <a:spLocks noGrp="1"/>
+          </p:cNvSpPr>
+          <p:nvPr>
+            <p:ph type="body" idx="1"/>
+          </p:nvPr>
+        </p:nvSpPr>
+        <p:spPr/>
+        <p:txBody>
+          <a:bodyPr/>
+          <a:lstStyle/>
+          <a:p>
+            <a:r>
+              <a:rPr lang="en-US" dirty="0"/>
+              <a:t/>
+            </a:r>
+            <a:endParaRPr lang="en-US" dirty="0"/>
+          </a:p>
+        </p:txBody>
+      </p:sp>
+      <p:sp>
+        <p:nvSpPr>
+          <p:cNvPr id="4" name="Slide Number Placeholder 3"/>
+          <p:cNvSpPr>
+            <a:spLocks noGrp="1"/>
+          </p:cNvSpPr>
+          <p:nvPr>
+            <p:ph type="sldNum" sz="quarter" idx="10"/>
+          </p:nvPr>
+        </p:nvSpPr>
+        <p:spPr/>
+        <p:txBody>
+          <a:bodyPr/>
+          <a:lstStyle/>
+          <a:p>
+            <a:fld id="{F7021451-1387-4CA6-816F-3879F97B5CBC}" type="slidenum">
+              <a:rPr lang="en-US"/>
+              <a:t>14</a:t>
+            </a:fld>
+            <a:endParaRPr lang="en-US"/>
+          </a:p>
+        </p:txBody>
+      </p:sp>
+    </p:spTree>
+    <p:extLst>
+      <p:ext uri="{BB962C8B-B14F-4D97-AF65-F5344CB8AC3E}">
+        <p14:creationId xmlns:p14="http://schemas.microsoft.com/office/powerpoint/2010/main" val="1024086991"/>
+      </p:ext>
+    </p:extLst>
+  </p:cSld>
+  <p:clrMapOvr>
+    <a:masterClrMapping/>
+  </p:clrMapOvr>
+</p:notes>
+</file>
+
+<file path=ppt/notesSlides/notesSlide15.xml><?xml version="1.0" encoding="utf-8"?>
+<p:notes xmlns:a="http://schemas.openxmlformats.org/drawingml/2006/main" xmlns:r="http://schemas.openxmlformats.org/officeDocument/2006/relationships" xmlns:p="http://schemas.openxmlformats.org/presentationml/2006/main">
+  <p:cSld>
+    <p:spTree>
+      <p:nvGrpSpPr>
+        <p:cNvPr id="1" name=""/>
+        <p:cNvGrpSpPr/>
+        <p:nvPr/>
+      </p:nvGrpSpPr>
+      <p:grpSpPr>
+        <a:xfrm>
+          <a:off x="0" y="0"/>
+          <a:ext cx="0" cy="0"/>
+          <a:chOff x="0" y="0"/>
+          <a:chExt cx="0" cy="0"/>
+        </a:xfrm>
+      </p:grpSpPr>
+      <p:sp>
+        <p:nvSpPr>
+          <p:cNvPr id="2" name="Slide Image Placeholder 1"/>
+          <p:cNvSpPr>
+            <a:spLocks noGrp="1" noRot="1" noChangeAspect="1"/>
+          </p:cNvSpPr>
+          <p:nvPr>
+            <p:ph type="sldImg"/>
+          </p:nvPr>
+        </p:nvSpPr>
+        <p:spPr/>
+      </p:sp>
+      <p:sp>
+        <p:nvSpPr>
+          <p:cNvPr id="3" name="Notes Placeholder 2"/>
+          <p:cNvSpPr>
+            <a:spLocks noGrp="1"/>
+          </p:cNvSpPr>
+          <p:nvPr>
+            <p:ph type="body" idx="1"/>
+          </p:nvPr>
+        </p:nvSpPr>
+        <p:spPr/>
+        <p:txBody>
+          <a:bodyPr/>
+          <a:lstStyle/>
+          <a:p>
+            <a:r>
+              <a:rPr lang="en-US" dirty="0"/>
+              <a:t/>
+            </a:r>
+            <a:endParaRPr lang="en-US" dirty="0"/>
+          </a:p>
+        </p:txBody>
+      </p:sp>
+      <p:sp>
+        <p:nvSpPr>
+          <p:cNvPr id="4" name="Slide Number Placeholder 3"/>
+          <p:cNvSpPr>
+            <a:spLocks noGrp="1"/>
+          </p:cNvSpPr>
+          <p:nvPr>
+            <p:ph type="sldNum" sz="quarter" idx="10"/>
+          </p:nvPr>
+        </p:nvSpPr>
+        <p:spPr/>
+        <p:txBody>
+          <a:bodyPr/>
+          <a:lstStyle/>
+          <a:p>
+            <a:fld id="{F7021451-1387-4CA6-816F-3879F97B5CBC}" type="slidenum">
+              <a:rPr lang="en-US"/>
+              <a:t>15</a:t>
+            </a:fld>
+            <a:endParaRPr lang="en-US"/>
+          </a:p>
+        </p:txBody>
+      </p:sp>
+    </p:spTree>
+    <p:extLst>
+      <p:ext uri="{BB962C8B-B14F-4D97-AF65-F5344CB8AC3E}">
+        <p14:creationId xmlns:p14="http://schemas.microsoft.com/office/powerpoint/2010/main" val="1024086991"/>
+      </p:ext>
+    </p:extLst>
+  </p:cSld>
+  <p:clrMapOvr>
+    <a:masterClrMapping/>
+  </p:clrMapOvr>
+</p:notes>
+</file>
+
 <file path=ppt/notesSlides/notesSlide2.xml><?xml version="1.0" encoding="utf-8"?>
 <p:notes xmlns:a="http://schemas.openxmlformats.org/drawingml/2006/main" xmlns:r="http://schemas.openxmlformats.org/officeDocument/2006/relationships" xmlns:p="http://schemas.openxmlformats.org/presentationml/2006/main">
   <p:cSld>
@@ -2055,7 +2233,7 @@
         </p:nvSpPr>
         <p:spPr>
           <a:xfrm>
-            <a:off x="777240" y="1600200"/>
+            <a:off x="777240" y="1463040"/>
             <a:ext cx="7498080" cy="1188720"/>
           </a:xfrm>
           <a:prstGeom prst="rect">
@@ -2094,7 +2272,7 @@
         </p:nvSpPr>
         <p:spPr>
           <a:xfrm>
-            <a:off x="822960" y="2852928"/>
+            <a:off x="822960" y="2697480"/>
             <a:ext cx="7498080" cy="640080"/>
           </a:xfrm>
           <a:prstGeom prst="rect">
@@ -2111,7 +2289,7 @@
               <a:buNone/>
             </a:pPr>
             <a:r>
-              <a:rPr lang="en-US" sz="2200" dirty="0">
+              <a:rPr lang="en-US" sz="2400" dirty="0">
                 <a:solidFill>
                   <a:srgbClr val="06B6D4"/>
                 </a:solidFill>
@@ -2121,7 +2299,7 @@
               </a:rPr>
               <a:t>A Secure Handheld Communication Device</a:t>
             </a:r>
-            <a:endParaRPr lang="en-US" sz="2200" dirty="0"/>
+            <a:endParaRPr lang="en-US" sz="2400" dirty="0"/>
           </a:p>
         </p:txBody>
       </p:sp>
@@ -2133,7 +2311,7 @@
         </p:nvSpPr>
         <p:spPr>
           <a:xfrm>
-            <a:off x="841248" y="3584448"/>
+            <a:off x="841248" y="3474720"/>
             <a:ext cx="2103120" cy="64008"/>
           </a:xfrm>
           <a:prstGeom prst="rect">
@@ -2153,7 +2331,7 @@
         </p:nvSpPr>
         <p:spPr>
           <a:xfrm>
-            <a:off x="2944368" y="3584448"/>
+            <a:off x="2944368" y="3474720"/>
             <a:ext cx="914400" cy="64008"/>
           </a:xfrm>
           <a:prstGeom prst="rect">
@@ -2173,8 +2351,8 @@
         </p:nvSpPr>
         <p:spPr>
           <a:xfrm>
-            <a:off x="822960" y="3886200"/>
-            <a:ext cx="7589520" cy="2011680"/>
+            <a:off x="822960" y="3749040"/>
+            <a:ext cx="7589520" cy="2103120"/>
           </a:xfrm>
           <a:prstGeom prst="rect">
             <a:avLst/>
@@ -2193,7 +2371,7 @@
               <a:buNone/>
             </a:pPr>
             <a:r>
-              <a:rPr lang="en-US" sz="1700" dirty="0">
+              <a:rPr lang="en-US" sz="1900" dirty="0">
                 <a:solidFill>
                   <a:srgbClr val="FFFFFF"/>
                 </a:solidFill>
@@ -2203,17 +2381,17 @@
               </a:rPr>
               <a:t>Marc Gedeon   ·   Yorgo Hassabou   ·   Charbel Assaad</a:t>
             </a:r>
-            <a:endParaRPr lang="en-US" sz="1700" dirty="0"/>
+            <a:endParaRPr lang="en-US" sz="1900" dirty="0"/>
           </a:p>
           <a:p>
             <a:pPr indent="0" marL="0">
               <a:spcAft>
-                <a:spcPts val="600"/>
+                <a:spcPts val="700"/>
               </a:spcAft>
               <a:buNone/>
             </a:pPr>
             <a:r>
-              <a:rPr lang="en-US" sz="1500" dirty="0">
+              <a:rPr lang="en-US" sz="1700" dirty="0">
                 <a:solidFill>
                   <a:srgbClr val="C9C6E6"/>
                 </a:solidFill>
@@ -2223,17 +2401,17 @@
               </a:rPr>
               <a:t>Mini-Project   ·   2025 / 2026</a:t>
             </a:r>
-            <a:endParaRPr lang="en-US" sz="1700" dirty="0"/>
+            <a:endParaRPr lang="en-US" sz="1900" dirty="0"/>
           </a:p>
           <a:p>
             <a:pPr indent="0" marL="0">
               <a:spcAft>
-                <a:spcPts val="600"/>
+                <a:spcPts val="700"/>
               </a:spcAft>
               <a:buNone/>
             </a:pPr>
             <a:r>
-              <a:rPr lang="en-US" sz="1500" dirty="0">
+              <a:rPr lang="en-US" sz="1700" dirty="0">
                 <a:solidFill>
                   <a:srgbClr val="C9C6E6"/>
                 </a:solidFill>
@@ -2241,19 +2419,19 @@
                 <a:ea typeface="Segoe UI" pitchFamily="34" charset="-122"/>
                 <a:cs typeface="Segoe UI" pitchFamily="34" charset="-120"/>
               </a:rPr>
-              <a:t>Supervisor: Dr. Hadi Jerdek</a:t>
-            </a:r>
-            <a:endParaRPr lang="en-US" sz="1700" dirty="0"/>
+              <a:t>Presented to: Dr. Hadi Jerdek</a:t>
+            </a:r>
+            <a:endParaRPr lang="en-US" sz="1900" dirty="0"/>
           </a:p>
           <a:p>
             <a:pPr indent="0" marL="0">
               <a:spcAft>
-                <a:spcPts val="900"/>
+                <a:spcPts val="1200"/>
               </a:spcAft>
               <a:buNone/>
             </a:pPr>
             <a:r>
-              <a:rPr lang="en-US" sz="1500" dirty="0">
+              <a:rPr lang="en-US" sz="1700" dirty="0">
                 <a:solidFill>
                   <a:srgbClr val="C9C6E6"/>
                 </a:solidFill>
@@ -2263,7 +2441,7 @@
               </a:rPr>
               <a:t>Lebanese University   ·   Faculty of Engineering</a:t>
             </a:r>
-            <a:endParaRPr lang="en-US" sz="1700" dirty="0"/>
+            <a:endParaRPr lang="en-US" sz="1900" dirty="0"/>
           </a:p>
         </p:txBody>
       </p:sp>
@@ -2429,7 +2607,7 @@
               <a:buNone/>
             </a:pPr>
             <a:r>
-              <a:rPr lang="en-US" sz="2400" b="1" dirty="0">
+              <a:rPr lang="en-US" sz="2600" b="1" dirty="0">
                 <a:solidFill>
                   <a:srgbClr val="FFFFFF"/>
                 </a:solidFill>
@@ -2439,7 +2617,7 @@
               </a:rPr>
               <a:t>Security &amp; Applications</a:t>
             </a:r>
-            <a:endParaRPr lang="en-US" sz="2400" dirty="0"/>
+            <a:endParaRPr lang="en-US" sz="2600" dirty="0"/>
           </a:p>
         </p:txBody>
       </p:sp>
@@ -2479,7 +2657,7 @@
         <p:spPr>
           <a:xfrm>
             <a:off x="822960" y="1600200"/>
-            <a:ext cx="4937760" cy="365760"/>
+            <a:ext cx="4937760" cy="411480"/>
           </a:xfrm>
           <a:prstGeom prst="rect">
             <a:avLst/>
@@ -2495,7 +2673,7 @@
               <a:buNone/>
             </a:pPr>
             <a:r>
-              <a:rPr lang="en-US" sz="1800" b="1" dirty="0">
+              <a:rPr lang="en-US" sz="2200" b="1" dirty="0">
                 <a:solidFill>
                   <a:srgbClr val="EC4899"/>
                 </a:solidFill>
@@ -2505,7 +2683,7 @@
               </a:rPr>
               <a:t>Security</a:t>
             </a:r>
-            <a:endParaRPr lang="en-US" sz="1800" dirty="0"/>
+            <a:endParaRPr lang="en-US" sz="2200" dirty="0"/>
           </a:p>
         </p:txBody>
       </p:sp>
@@ -2517,8 +2695,8 @@
         </p:nvSpPr>
         <p:spPr>
           <a:xfrm>
-            <a:off x="822960" y="2103120"/>
-            <a:ext cx="4983480" cy="3657600"/>
+            <a:off x="822960" y="2148840"/>
+            <a:ext cx="4983480" cy="3611880"/>
           </a:xfrm>
           <a:prstGeom prst="rect">
             <a:avLst/>
@@ -2530,15 +2708,15 @@
           <a:bodyPr wrap="square" rtlCol="0" anchor="t"/>
           <a:lstStyle/>
           <a:p>
-            <a:pPr marL="203200" indent="-203200">
+            <a:pPr marL="254000" indent="-254000">
               <a:spcAft>
-                <a:spcPts val="900"/>
+                <a:spcPts val="1200"/>
               </a:spcAft>
               <a:buSzPct val="100000"/>
               <a:buChar char="•"/>
             </a:pPr>
             <a:r>
-              <a:rPr lang="en-US" sz="1650" dirty="0">
+              <a:rPr lang="en-US" sz="2200" dirty="0">
                 <a:solidFill>
                   <a:srgbClr val="2A2A33"/>
                 </a:solidFill>
@@ -2546,20 +2724,20 @@
                 <a:ea typeface="Segoe UI" pitchFamily="34" charset="-122"/>
                 <a:cs typeface="Segoe UI" pitchFamily="34" charset="-120"/>
               </a:rPr>
-              <a:t>Chat text is XOR-ciphered with a shared key before it is transmitted.</a:t>
-            </a:r>
-            <a:endParaRPr lang="en-US" sz="1550" dirty="0"/>
-          </a:p>
-          <a:p>
-            <a:pPr marL="203200" indent="-203200">
+              <a:t>XOR cipher on chat text.</a:t>
+            </a:r>
+            <a:endParaRPr lang="en-US" sz="2200" dirty="0"/>
+          </a:p>
+          <a:p>
+            <a:pPr marL="254000" indent="-254000">
               <a:spcAft>
-                <a:spcPts val="900"/>
+                <a:spcPts val="1200"/>
               </a:spcAft>
               <a:buSzPct val="100000"/>
               <a:buChar char="•"/>
             </a:pPr>
             <a:r>
-              <a:rPr lang="en-US" sz="1650" dirty="0">
+              <a:rPr lang="en-US" sz="2200" dirty="0">
                 <a:solidFill>
                   <a:srgbClr val="2A2A33"/>
                 </a:solidFill>
@@ -2567,20 +2745,20 @@
                 <a:ea typeface="Segoe UI" pitchFamily="34" charset="-122"/>
                 <a:cs typeface="Segoe UI" pitchFamily="34" charset="-120"/>
               </a:rPr>
-              <a:t>This is lightweight obfuscation, not strong cryptography.</a:t>
-            </a:r>
-            <a:endParaRPr lang="en-US" sz="1550" dirty="0"/>
-          </a:p>
-          <a:p>
-            <a:pPr marL="203200" indent="-203200">
+              <a:t>Obfuscation, not strong crypto.</a:t>
+            </a:r>
+            <a:endParaRPr lang="en-US" sz="2200" dirty="0"/>
+          </a:p>
+          <a:p>
+            <a:pPr marL="254000" indent="-254000">
               <a:spcAft>
-                <a:spcPts val="900"/>
+                <a:spcPts val="1200"/>
               </a:spcAft>
               <a:buSzPct val="100000"/>
               <a:buChar char="•"/>
             </a:pPr>
             <a:r>
-              <a:rPr lang="en-US" sz="1650" dirty="0">
+              <a:rPr lang="en-US" sz="2200" dirty="0">
                 <a:solidFill>
                   <a:srgbClr val="2A2A33"/>
                 </a:solidFill>
@@ -2588,9 +2766,9 @@
                 <a:ea typeface="Segoe UI" pitchFamily="34" charset="-122"/>
                 <a:cs typeface="Segoe UI" pitchFamily="34" charset="-120"/>
               </a:rPr>
-              <a:t>Combined with the unknown hopping sequence, the traffic is hard to follow or capture.</a:t>
-            </a:r>
-            <a:endParaRPr lang="en-US" sz="1550" dirty="0"/>
+              <a:t>Hopping makes capture hard.</a:t>
+            </a:r>
+            <a:endParaRPr lang="en-US" sz="2200" dirty="0"/>
           </a:p>
         </p:txBody>
       </p:sp>
@@ -2630,7 +2808,7 @@
         <p:spPr>
           <a:xfrm>
             <a:off x="6537960" y="1600200"/>
-            <a:ext cx="4937760" cy="365760"/>
+            <a:ext cx="4937760" cy="411480"/>
           </a:xfrm>
           <a:prstGeom prst="rect">
             <a:avLst/>
@@ -2646,7 +2824,7 @@
               <a:buNone/>
             </a:pPr>
             <a:r>
-              <a:rPr lang="en-US" sz="1800" b="1" dirty="0">
+              <a:rPr lang="en-US" sz="2200" b="1" dirty="0">
                 <a:solidFill>
                   <a:srgbClr val="06B6D4"/>
                 </a:solidFill>
@@ -2656,7 +2834,7 @@
               </a:rPr>
               <a:t>Application Modes</a:t>
             </a:r>
-            <a:endParaRPr lang="en-US" sz="1800" dirty="0"/>
+            <a:endParaRPr lang="en-US" sz="2200" dirty="0"/>
           </a:p>
         </p:txBody>
       </p:sp>
@@ -2668,8 +2846,8 @@
         </p:nvSpPr>
         <p:spPr>
           <a:xfrm>
-            <a:off x="6537960" y="2103120"/>
-            <a:ext cx="4983480" cy="3657600"/>
+            <a:off x="6537960" y="2148840"/>
+            <a:ext cx="4983480" cy="3611880"/>
           </a:xfrm>
           <a:prstGeom prst="rect">
             <a:avLst/>
@@ -2681,15 +2859,15 @@
           <a:bodyPr wrap="square" rtlCol="0" anchor="t"/>
           <a:lstStyle/>
           <a:p>
-            <a:pPr marL="203200" indent="-203200">
+            <a:pPr marL="254000" indent="-254000">
               <a:spcAft>
-                <a:spcPts val="900"/>
+                <a:spcPts val="1200"/>
               </a:spcAft>
               <a:buSzPct val="100000"/>
               <a:buChar char="•"/>
             </a:pPr>
             <a:r>
-              <a:rPr lang="en-US" sz="1650" dirty="0">
+              <a:rPr lang="en-US" sz="2200" dirty="0">
                 <a:solidFill>
                   <a:srgbClr val="2A2A33"/>
                 </a:solidFill>
@@ -2697,20 +2875,20 @@
                 <a:ea typeface="Segoe UI" pitchFamily="34" charset="-122"/>
                 <a:cs typeface="Segoe UI" pitchFamily="34" charset="-120"/>
               </a:rPr>
-              <a:t>Sync: manually aligns the two hop counters before a session.</a:t>
-            </a:r>
-            <a:endParaRPr lang="en-US" sz="1550" dirty="0"/>
-          </a:p>
-          <a:p>
-            <a:pPr marL="203200" indent="-203200">
+              <a:t>Sync: align the hop counters.</a:t>
+            </a:r>
+            <a:endParaRPr lang="en-US" sz="2200" dirty="0"/>
+          </a:p>
+          <a:p>
+            <a:pPr marL="254000" indent="-254000">
               <a:spcAft>
-                <a:spcPts val="900"/>
+                <a:spcPts val="1200"/>
               </a:spcAft>
               <a:buSzPct val="100000"/>
               <a:buChar char="•"/>
             </a:pPr>
             <a:r>
-              <a:rPr lang="en-US" sz="1650" dirty="0">
+              <a:rPr lang="en-US" sz="2200" dirty="0">
                 <a:solidFill>
                   <a:srgbClr val="2A2A33"/>
                 </a:solidFill>
@@ -2718,20 +2896,20 @@
                 <a:ea typeface="Segoe UI" pitchFamily="34" charset="-122"/>
                 <a:cs typeface="Segoe UI" pitchFamily="34" charset="-120"/>
               </a:rPr>
-              <a:t>Chat: encrypted text, point-to-point (ARQ + CRC) or broadcast (CRC).</a:t>
-            </a:r>
-            <a:endParaRPr lang="en-US" sz="1550" dirty="0"/>
-          </a:p>
-          <a:p>
-            <a:pPr marL="203200" indent="-203200">
+              <a:t>Chat: reliable encrypted text.</a:t>
+            </a:r>
+            <a:endParaRPr lang="en-US" sz="2200" dirty="0"/>
+          </a:p>
+          <a:p>
+            <a:pPr marL="254000" indent="-254000">
               <a:spcAft>
-                <a:spcPts val="900"/>
+                <a:spcPts val="1200"/>
               </a:spcAft>
               <a:buSzPct val="100000"/>
               <a:buChar char="•"/>
             </a:pPr>
             <a:r>
-              <a:rPr lang="en-US" sz="1650" dirty="0">
+              <a:rPr lang="en-US" sz="2200" dirty="0">
                 <a:solidFill>
                   <a:srgbClr val="2A2A33"/>
                 </a:solidFill>
@@ -2739,20 +2917,20 @@
                 <a:ea typeface="Segoe UI" pitchFamily="34" charset="-122"/>
                 <a:cs typeface="Segoe UI" pitchFamily="34" charset="-120"/>
               </a:rPr>
-              <a:t>Audio: half-duplex voice walkie-talkie.</a:t>
-            </a:r>
-            <a:endParaRPr lang="en-US" sz="1550" dirty="0"/>
-          </a:p>
-          <a:p>
-            <a:pPr marL="203200" indent="-203200">
+              <a:t>Audio: voice walkie-talkie.</a:t>
+            </a:r>
+            <a:endParaRPr lang="en-US" sz="2200" dirty="0"/>
+          </a:p>
+          <a:p>
+            <a:pPr marL="254000" indent="-254000">
               <a:spcAft>
-                <a:spcPts val="900"/>
+                <a:spcPts val="1200"/>
               </a:spcAft>
               <a:buSzPct val="100000"/>
               <a:buChar char="•"/>
             </a:pPr>
             <a:r>
-              <a:rPr lang="en-US" sz="1650" dirty="0">
+              <a:rPr lang="en-US" sz="2200" dirty="0">
                 <a:solidFill>
                   <a:srgbClr val="2A2A33"/>
                 </a:solidFill>
@@ -2760,20 +2938,20 @@
                 <a:ea typeface="Segoe UI" pitchFamily="34" charset="-122"/>
                 <a:cs typeface="Segoe UI" pitchFamily="34" charset="-120"/>
               </a:rPr>
-              <a:t>Pong: real-time two-player game (low-latency bidirectional traffic).</a:t>
-            </a:r>
-            <a:endParaRPr lang="en-US" sz="1550" dirty="0"/>
-          </a:p>
-          <a:p>
-            <a:pPr marL="203200" indent="-203200">
+              <a:t>Pong: real-time game.</a:t>
+            </a:r>
+            <a:endParaRPr lang="en-US" sz="2200" dirty="0"/>
+          </a:p>
+          <a:p>
+            <a:pPr marL="254000" indent="-254000">
               <a:spcAft>
-                <a:spcPts val="900"/>
+                <a:spcPts val="1200"/>
               </a:spcAft>
               <a:buSzPct val="100000"/>
               <a:buChar char="•"/>
             </a:pPr>
             <a:r>
-              <a:rPr lang="en-US" sz="1650" dirty="0">
+              <a:rPr lang="en-US" sz="2200" dirty="0">
                 <a:solidFill>
                   <a:srgbClr val="2A2A33"/>
                 </a:solidFill>
@@ -2781,9 +2959,9 @@
                 <a:ea typeface="Segoe UI" pitchFamily="34" charset="-122"/>
                 <a:cs typeface="Segoe UI" pitchFamily="34" charset="-120"/>
               </a:rPr>
-              <a:t>RF/BER Test: built-in link-quality diagnostics.</a:t>
-            </a:r>
-            <a:endParaRPr lang="en-US" sz="1550" dirty="0"/>
+              <a:t>RF/BER Test: link diagnostics.</a:t>
+            </a:r>
+            <a:endParaRPr lang="en-US" sz="2200" dirty="0"/>
           </a:p>
         </p:txBody>
       </p:sp>
@@ -3002,7 +3180,7 @@
               <a:buNone/>
             </a:pPr>
             <a:r>
-              <a:rPr lang="en-US" sz="2400" b="1" dirty="0">
+              <a:rPr lang="en-US" sz="2600" b="1" dirty="0">
                 <a:solidFill>
                   <a:srgbClr val="FFFFFF"/>
                 </a:solidFill>
@@ -3012,7 +3190,7 @@
               </a:rPr>
               <a:t>Results</a:t>
             </a:r>
-            <a:endParaRPr lang="en-US" sz="2400" dirty="0"/>
+            <a:endParaRPr lang="en-US" sz="2600" dirty="0"/>
           </a:p>
         </p:txBody>
       </p:sp>
@@ -3031,8 +3209,8 @@
           </p:nvPr>
         </p:nvGraphicFramePr>
         <p:xfrm>
-          <a:off x="594360" y="1508760"/>
-          <a:ext cx="6217920" cy="914400"/>
+          <a:off x="594360" y="1554480"/>
+          <a:ext cx="6035040" cy="914400"/>
         </p:xfrm>
         <a:graphic>
           <a:graphicData uri="http://schemas.openxmlformats.org/drawingml/2006/table">
@@ -3040,10 +3218,10 @@
               <a:tblPr/>
               <a:tblGrid>
                 <a:gridCol w="2743200"/>
-                <a:gridCol w="1737360"/>
-                <a:gridCol w="1737360"/>
+                <a:gridCol w="1645920"/>
+                <a:gridCol w="1645920"/>
               </a:tblGrid>
-              <a:tr h="502920">
+              <a:tr h="566928">
                 <a:tc>
                   <a:txBody>
                     <a:bodyPr/>
@@ -3053,7 +3231,7 @@
                         <a:buNone/>
                       </a:pPr>
                       <a:r>
-                        <a:rPr lang="en-US" sz="1500" b="1" dirty="0">
+                        <a:rPr lang="en-US" sz="1700" b="1" dirty="0">
                           <a:solidFill>
                             <a:srgbClr val="FFFFFF"/>
                           </a:solidFill>
@@ -3063,7 +3241,7 @@
                         </a:rPr>
                         <a:t>Metric</a:t>
                       </a:r>
-                      <a:endParaRPr lang="en-US" sz="1500" dirty="0">
+                      <a:endParaRPr lang="en-US" sz="1700" dirty="0">
                         <a:latin typeface="Segoe UI" charset="0"/>
                         <a:ea typeface="Segoe UI" charset="0"/>
                         <a:cs typeface="Segoe UI" charset="0"/>
@@ -3121,7 +3299,7 @@
                         <a:buNone/>
                       </a:pPr>
                       <a:r>
-                        <a:rPr lang="en-US" sz="1500" b="1" dirty="0">
+                        <a:rPr lang="en-US" sz="1700" b="1" dirty="0">
                           <a:solidFill>
                             <a:srgbClr val="FFFFFF"/>
                           </a:solidFill>
@@ -3131,7 +3309,7 @@
                         </a:rPr>
                         <a:t>FHSS</a:t>
                       </a:r>
-                      <a:endParaRPr lang="en-US" sz="1500" dirty="0">
+                      <a:endParaRPr lang="en-US" sz="1700" dirty="0">
                         <a:latin typeface="Segoe UI" charset="0"/>
                         <a:ea typeface="Segoe UI" charset="0"/>
                         <a:cs typeface="Segoe UI" charset="0"/>
@@ -3189,7 +3367,7 @@
                         <a:buNone/>
                       </a:pPr>
                       <a:r>
-                        <a:rPr lang="en-US" sz="1500" b="1" dirty="0">
+                        <a:rPr lang="en-US" sz="1700" b="1" dirty="0">
                           <a:solidFill>
                             <a:srgbClr val="FFFFFF"/>
                           </a:solidFill>
@@ -3199,7 +3377,7 @@
                         </a:rPr>
                         <a:t>No FHSS</a:t>
                       </a:r>
-                      <a:endParaRPr lang="en-US" sz="1500" dirty="0">
+                      <a:endParaRPr lang="en-US" sz="1700" dirty="0">
                         <a:latin typeface="Segoe UI" charset="0"/>
                         <a:ea typeface="Segoe UI" charset="0"/>
                         <a:cs typeface="Segoe UI" charset="0"/>
@@ -3249,7 +3427,7 @@
                   </a:tcPr>
                 </a:tc>
               </a:tr>
-              <a:tr h="502920">
+              <a:tr h="566928">
                 <a:tc>
                   <a:txBody>
                     <a:bodyPr/>
@@ -3259,7 +3437,7 @@
                         <a:buNone/>
                       </a:pPr>
                       <a:r>
-                        <a:rPr lang="en-US" sz="1500" dirty="0">
+                        <a:rPr lang="en-US" sz="1700" dirty="0">
                           <a:solidFill>
                             <a:srgbClr val="2A2A33"/>
                           </a:solidFill>
@@ -3267,9 +3445,9 @@
                           <a:ea typeface="Segoe UI" pitchFamily="34" charset="-122"/>
                           <a:cs typeface="Segoe UI" pitchFamily="34" charset="-120"/>
                         </a:rPr>
-                        <a:t>Packets delivered</a:t>
+                        <a:t>Delivered</a:t>
                       </a:r>
-                      <a:endParaRPr lang="en-US" sz="1500" dirty="0">
+                      <a:endParaRPr lang="en-US" sz="1700" dirty="0">
                         <a:latin typeface="Segoe UI" charset="0"/>
                         <a:ea typeface="Segoe UI" charset="0"/>
                         <a:cs typeface="Segoe UI" charset="0"/>
@@ -3327,7 +3505,7 @@
                         <a:buNone/>
                       </a:pPr>
                       <a:r>
-                        <a:rPr lang="en-US" sz="1500" dirty="0">
+                        <a:rPr lang="en-US" sz="1700" dirty="0">
                           <a:solidFill>
                             <a:srgbClr val="2A2A33"/>
                           </a:solidFill>
@@ -3335,9 +3513,9 @@
                           <a:ea typeface="Segoe UI" pitchFamily="34" charset="-122"/>
                           <a:cs typeface="Segoe UI" pitchFamily="34" charset="-120"/>
                         </a:rPr>
-                        <a:t>854 (85.4%)</a:t>
+                        <a:t>85.4%</a:t>
                       </a:r>
-                      <a:endParaRPr lang="en-US" sz="1500" dirty="0">
+                      <a:endParaRPr lang="en-US" sz="1700" dirty="0">
                         <a:latin typeface="Segoe UI" charset="0"/>
                         <a:ea typeface="Segoe UI" charset="0"/>
                         <a:cs typeface="Segoe UI" charset="0"/>
@@ -3395,7 +3573,7 @@
                         <a:buNone/>
                       </a:pPr>
                       <a:r>
-                        <a:rPr lang="en-US" sz="1500" dirty="0">
+                        <a:rPr lang="en-US" sz="1700" dirty="0">
                           <a:solidFill>
                             <a:srgbClr val="2A2A33"/>
                           </a:solidFill>
@@ -3403,9 +3581,9 @@
                           <a:ea typeface="Segoe UI" pitchFamily="34" charset="-122"/>
                           <a:cs typeface="Segoe UI" pitchFamily="34" charset="-120"/>
                         </a:rPr>
-                        <a:t>480 (48%)</a:t>
+                        <a:t>48%</a:t>
                       </a:r>
-                      <a:endParaRPr lang="en-US" sz="1500" dirty="0">
+                      <a:endParaRPr lang="en-US" sz="1700" dirty="0">
                         <a:latin typeface="Segoe UI" charset="0"/>
                         <a:ea typeface="Segoe UI" charset="0"/>
                         <a:cs typeface="Segoe UI" charset="0"/>
@@ -3455,7 +3633,7 @@
                   </a:tcPr>
                 </a:tc>
               </a:tr>
-              <a:tr h="502920">
+              <a:tr h="566928">
                 <a:tc>
                   <a:txBody>
                     <a:bodyPr/>
@@ -3465,7 +3643,7 @@
                         <a:buNone/>
                       </a:pPr>
                       <a:r>
-                        <a:rPr lang="en-US" sz="1500" dirty="0">
+                        <a:rPr lang="en-US" sz="1700" dirty="0">
                           <a:solidFill>
                             <a:srgbClr val="2A2A33"/>
                           </a:solidFill>
@@ -3473,9 +3651,9 @@
                           <a:ea typeface="Segoe UI" pitchFamily="34" charset="-122"/>
                           <a:cs typeface="Segoe UI" pitchFamily="34" charset="-120"/>
                         </a:rPr>
-                        <a:t>Packets lost</a:t>
+                        <a:t>Lost</a:t>
                       </a:r>
-                      <a:endParaRPr lang="en-US" sz="1500" dirty="0">
+                      <a:endParaRPr lang="en-US" sz="1700" dirty="0">
                         <a:latin typeface="Segoe UI" charset="0"/>
                         <a:ea typeface="Segoe UI" charset="0"/>
                         <a:cs typeface="Segoe UI" charset="0"/>
@@ -3533,7 +3711,7 @@
                         <a:buNone/>
                       </a:pPr>
                       <a:r>
-                        <a:rPr lang="en-US" sz="1500" dirty="0">
+                        <a:rPr lang="en-US" sz="1700" dirty="0">
                           <a:solidFill>
                             <a:srgbClr val="2A2A33"/>
                           </a:solidFill>
@@ -3541,9 +3719,9 @@
                           <a:ea typeface="Segoe UI" pitchFamily="34" charset="-122"/>
                           <a:cs typeface="Segoe UI" pitchFamily="34" charset="-120"/>
                         </a:rPr>
-                        <a:t>146 (14.6%)</a:t>
+                        <a:t>14.6%</a:t>
                       </a:r>
-                      <a:endParaRPr lang="en-US" sz="1500" dirty="0">
+                      <a:endParaRPr lang="en-US" sz="1700" dirty="0">
                         <a:latin typeface="Segoe UI" charset="0"/>
                         <a:ea typeface="Segoe UI" charset="0"/>
                         <a:cs typeface="Segoe UI" charset="0"/>
@@ -3601,7 +3779,7 @@
                         <a:buNone/>
                       </a:pPr>
                       <a:r>
-                        <a:rPr lang="en-US" sz="1500" dirty="0">
+                        <a:rPr lang="en-US" sz="1700" dirty="0">
                           <a:solidFill>
                             <a:srgbClr val="2A2A33"/>
                           </a:solidFill>
@@ -3609,9 +3787,9 @@
                           <a:ea typeface="Segoe UI" pitchFamily="34" charset="-122"/>
                           <a:cs typeface="Segoe UI" pitchFamily="34" charset="-120"/>
                         </a:rPr>
-                        <a:t>520 (52%)</a:t>
+                        <a:t>52%</a:t>
                       </a:r>
-                      <a:endParaRPr lang="en-US" sz="1500" dirty="0">
+                      <a:endParaRPr lang="en-US" sz="1700" dirty="0">
                         <a:latin typeface="Segoe UI" charset="0"/>
                         <a:ea typeface="Segoe UI" charset="0"/>
                         <a:cs typeface="Segoe UI" charset="0"/>
@@ -3661,7 +3839,7 @@
                   </a:tcPr>
                 </a:tc>
               </a:tr>
-              <a:tr h="502920">
+              <a:tr h="566928">
                 <a:tc>
                   <a:txBody>
                     <a:bodyPr/>
@@ -3671,7 +3849,7 @@
                         <a:buNone/>
                       </a:pPr>
                       <a:r>
-                        <a:rPr lang="en-US" sz="1500" dirty="0">
+                        <a:rPr lang="en-US" sz="1700" dirty="0">
                           <a:solidFill>
                             <a:srgbClr val="2A2A33"/>
                           </a:solidFill>
@@ -3681,7 +3859,7 @@
                         </a:rPr>
                         <a:t>Bit-error rate</a:t>
                       </a:r>
-                      <a:endParaRPr lang="en-US" sz="1500" dirty="0">
+                      <a:endParaRPr lang="en-US" sz="1700" dirty="0">
                         <a:latin typeface="Segoe UI" charset="0"/>
                         <a:ea typeface="Segoe UI" charset="0"/>
                         <a:cs typeface="Segoe UI" charset="0"/>
@@ -3739,7 +3917,7 @@
                         <a:buNone/>
                       </a:pPr>
                       <a:r>
-                        <a:rPr lang="en-US" sz="1500" dirty="0">
+                        <a:rPr lang="en-US" sz="1700" dirty="0">
                           <a:solidFill>
                             <a:srgbClr val="2A2A33"/>
                           </a:solidFill>
@@ -3749,7 +3927,7 @@
                         </a:rPr>
                         <a:t>1%</a:t>
                       </a:r>
-                      <a:endParaRPr lang="en-US" sz="1500" dirty="0">
+                      <a:endParaRPr lang="en-US" sz="1700" dirty="0">
                         <a:latin typeface="Segoe UI" charset="0"/>
                         <a:ea typeface="Segoe UI" charset="0"/>
                         <a:cs typeface="Segoe UI" charset="0"/>
@@ -3807,7 +3985,7 @@
                         <a:buNone/>
                       </a:pPr>
                       <a:r>
-                        <a:rPr lang="en-US" sz="1500" dirty="0">
+                        <a:rPr lang="en-US" sz="1700" dirty="0">
                           <a:solidFill>
                             <a:srgbClr val="2A2A33"/>
                           </a:solidFill>
@@ -3817,7 +3995,7 @@
                         </a:rPr>
                         <a:t>19%</a:t>
                       </a:r>
-                      <a:endParaRPr lang="en-US" sz="1500" dirty="0">
+                      <a:endParaRPr lang="en-US" sz="1700" dirty="0">
                         <a:latin typeface="Segoe UI" charset="0"/>
                         <a:ea typeface="Segoe UI" charset="0"/>
                         <a:cs typeface="Segoe UI" charset="0"/>
@@ -3873,57 +4051,18 @@
       </p:graphicFrame>
       <p:sp>
         <p:nvSpPr>
-          <p:cNvPr id="7" name="Text 4"/>
-          <p:cNvSpPr/>
-          <p:nvPr/>
-        </p:nvSpPr>
-        <p:spPr>
-          <a:xfrm>
-            <a:off x="594360" y="3749040"/>
-            <a:ext cx="6217920" cy="365760"/>
-          </a:xfrm>
-          <a:prstGeom prst="rect">
-            <a:avLst/>
-          </a:prstGeom>
-          <a:noFill/>
-          <a:ln/>
-        </p:spPr>
-        <p:txBody>
-          <a:bodyPr wrap="square" rtlCol="0" anchor="ctr"/>
-          <a:lstStyle/>
-          <a:p>
-            <a:pPr indent="0" marL="0">
-              <a:buNone/>
-            </a:pPr>
-            <a:r>
-              <a:rPr lang="en-US" sz="1100" i="1" dirty="0">
-                <a:solidFill>
-                  <a:srgbClr val="6B7280"/>
-                </a:solidFill>
-                <a:latin typeface="Segoe UI" pitchFamily="34" charset="0"/>
-                <a:ea typeface="Segoe UI" pitchFamily="34" charset="-122"/>
-                <a:cs typeface="Segoe UI" pitchFamily="34" charset="-120"/>
-              </a:rPr>
-              <a:t>RF/BER test, same hardware and channel set, 1000 packets each.</a:t>
-            </a:r>
-            <a:endParaRPr lang="en-US" sz="1100" dirty="0"/>
-          </a:p>
-        </p:txBody>
-      </p:sp>
-      <p:sp>
-        <p:nvSpPr>
-          <p:cNvPr id="8" name="Shape 5"/>
-          <p:cNvSpPr/>
-          <p:nvPr/>
-        </p:nvSpPr>
-        <p:spPr>
-          <a:xfrm>
-            <a:off x="7086600" y="1508760"/>
-            <a:ext cx="4663440" cy="2560320"/>
+          <p:cNvPr id="7" name="Shape 4"/>
+          <p:cNvSpPr/>
+          <p:nvPr/>
+        </p:nvSpPr>
+        <p:spPr>
+          <a:xfrm>
+            <a:off x="7040880" y="1554480"/>
+            <a:ext cx="4709160" cy="2743200"/>
           </a:xfrm>
           <a:prstGeom prst="roundRect">
             <a:avLst>
-              <a:gd name="adj" fmla="val 2857"/>
+              <a:gd name="adj" fmla="val 2667"/>
             </a:avLst>
           </a:prstGeom>
           <a:solidFill>
@@ -3939,14 +4078,14 @@
       </p:sp>
       <p:sp>
         <p:nvSpPr>
-          <p:cNvPr id="9" name="Text 6"/>
-          <p:cNvSpPr/>
-          <p:nvPr/>
-        </p:nvSpPr>
-        <p:spPr>
-          <a:xfrm>
-            <a:off x="7269480" y="1645920"/>
-            <a:ext cx="4297680" cy="365760"/>
+          <p:cNvPr id="8" name="Text 5"/>
+          <p:cNvSpPr/>
+          <p:nvPr/>
+        </p:nvSpPr>
+        <p:spPr>
+          <a:xfrm>
+            <a:off x="7269480" y="1691640"/>
+            <a:ext cx="4297680" cy="411480"/>
           </a:xfrm>
           <a:prstGeom prst="rect">
             <a:avLst/>
@@ -3962,7 +4101,7 @@
               <a:buNone/>
             </a:pPr>
             <a:r>
-              <a:rPr lang="en-US" sz="1700" b="1" dirty="0">
+              <a:rPr lang="en-US" sz="1900" b="1" dirty="0">
                 <a:solidFill>
                   <a:srgbClr val="7C3AED"/>
                 </a:solidFill>
@@ -3972,20 +4111,20 @@
               </a:rPr>
               <a:t>Error correction</a:t>
             </a:r>
-            <a:endParaRPr lang="en-US" sz="1700" dirty="0"/>
-          </a:p>
-        </p:txBody>
-      </p:sp>
-      <p:sp>
-        <p:nvSpPr>
-          <p:cNvPr id="10" name="Text 7"/>
-          <p:cNvSpPr/>
-          <p:nvPr/>
-        </p:nvSpPr>
-        <p:spPr>
-          <a:xfrm>
-            <a:off x="7269480" y="2103120"/>
-            <a:ext cx="4297680" cy="1828800"/>
+            <a:endParaRPr lang="en-US" sz="1900" dirty="0"/>
+          </a:p>
+        </p:txBody>
+      </p:sp>
+      <p:sp>
+        <p:nvSpPr>
+          <p:cNvPr id="9" name="Text 6"/>
+          <p:cNvSpPr/>
+          <p:nvPr/>
+        </p:nvSpPr>
+        <p:spPr>
+          <a:xfrm>
+            <a:off x="7269480" y="2194560"/>
+            <a:ext cx="4297680" cy="2011680"/>
           </a:xfrm>
           <a:prstGeom prst="rect">
             <a:avLst/>
@@ -3997,15 +4136,15 @@
           <a:bodyPr wrap="square" rtlCol="0" anchor="t"/>
           <a:lstStyle/>
           <a:p>
-            <a:pPr marL="203200" indent="-203200">
+            <a:pPr marL="254000" indent="-254000">
               <a:spcAft>
-                <a:spcPts val="900"/>
+                <a:spcPts val="1200"/>
               </a:spcAft>
               <a:buSzPct val="100000"/>
               <a:buChar char="•"/>
             </a:pPr>
             <a:r>
-              <a:rPr lang="en-US" sz="1650" dirty="0">
+              <a:rPr lang="en-US" sz="2200" dirty="0">
                 <a:solidFill>
                   <a:srgbClr val="2A2A33"/>
                 </a:solidFill>
@@ -4013,20 +4152,20 @@
                 <a:ea typeface="Segoe UI" pitchFamily="34" charset="-122"/>
                 <a:cs typeface="Segoe UI" pitchFamily="34" charset="-120"/>
               </a:rPr>
-              <a:t>ARQ delivered 29 of 32 chat messages, with 0 corrupt (CRC).</a:t>
-            </a:r>
-            <a:endParaRPr lang="en-US" sz="1400" dirty="0"/>
-          </a:p>
-          <a:p>
-            <a:pPr marL="203200" indent="-203200">
+              <a:t>ARQ: 29 / 32 delivered, 0 corrupt.</a:t>
+            </a:r>
+            <a:endParaRPr lang="en-US" sz="1800" dirty="0"/>
+          </a:p>
+          <a:p>
+            <a:pPr marL="254000" indent="-254000">
               <a:spcAft>
-                <a:spcPts val="900"/>
+                <a:spcPts val="1200"/>
               </a:spcAft>
               <a:buSzPct val="100000"/>
               <a:buChar char="•"/>
             </a:pPr>
             <a:r>
-              <a:rPr lang="en-US" sz="1650" dirty="0">
+              <a:rPr lang="en-US" sz="2200" dirty="0">
                 <a:solidFill>
                   <a:srgbClr val="2A2A33"/>
                 </a:solidFill>
@@ -4034,20 +4173,20 @@
                 <a:ea typeface="Segoe UI" pitchFamily="34" charset="-122"/>
                 <a:cs typeface="Segoe UI" pitchFamily="34" charset="-120"/>
               </a:rPr>
-              <a:t>XOR rebuilt 516 audio packets with no retransmission.</a:t>
-            </a:r>
-            <a:endParaRPr lang="en-US" sz="1400" dirty="0"/>
-          </a:p>
-          <a:p>
-            <a:pPr marL="203200" indent="-203200">
+              <a:t>XOR: 516 packets rebuilt.</a:t>
+            </a:r>
+            <a:endParaRPr lang="en-US" sz="1800" dirty="0"/>
+          </a:p>
+          <a:p>
+            <a:pPr marL="254000" indent="-254000">
               <a:spcAft>
-                <a:spcPts val="900"/>
+                <a:spcPts val="1200"/>
               </a:spcAft>
               <a:buSzPct val="100000"/>
               <a:buChar char="•"/>
             </a:pPr>
             <a:r>
-              <a:rPr lang="en-US" sz="1650" dirty="0">
+              <a:rPr lang="en-US" sz="2200" dirty="0">
                 <a:solidFill>
                   <a:srgbClr val="2A2A33"/>
                 </a:solidFill>
@@ -4055,26 +4194,26 @@
                 <a:ea typeface="Segoe UI" pitchFamily="34" charset="-122"/>
                 <a:cs typeface="Segoe UI" pitchFamily="34" charset="-120"/>
               </a:rPr>
-              <a:t>CRC detected and dropped 2,027 corrupted audio packets.</a:t>
-            </a:r>
-            <a:endParaRPr lang="en-US" sz="1400" dirty="0"/>
-          </a:p>
-        </p:txBody>
-      </p:sp>
-      <p:sp>
-        <p:nvSpPr>
-          <p:cNvPr id="11" name="Shape 8"/>
-          <p:cNvSpPr/>
-          <p:nvPr/>
-        </p:nvSpPr>
-        <p:spPr>
-          <a:xfrm>
-            <a:off x="594360" y="4572000"/>
-            <a:ext cx="10972800" cy="914400"/>
+              <a:t>CRC: 2,027 corrupt dropped.</a:t>
+            </a:r>
+            <a:endParaRPr lang="en-US" sz="1800" dirty="0"/>
+          </a:p>
+        </p:txBody>
+      </p:sp>
+      <p:sp>
+        <p:nvSpPr>
+          <p:cNvPr id="10" name="Shape 7"/>
+          <p:cNvSpPr/>
+          <p:nvPr/>
+        </p:nvSpPr>
+        <p:spPr>
+          <a:xfrm>
+            <a:off x="594360" y="4617720"/>
+            <a:ext cx="11155680" cy="960120"/>
           </a:xfrm>
           <a:prstGeom prst="roundRect">
             <a:avLst>
-              <a:gd name="adj" fmla="val 10000"/>
+              <a:gd name="adj" fmla="val 9524"/>
             </a:avLst>
           </a:prstGeom>
           <a:solidFill>
@@ -4090,14 +4229,14 @@
       </p:sp>
       <p:sp>
         <p:nvSpPr>
-          <p:cNvPr id="12" name="Text 9"/>
-          <p:cNvSpPr/>
-          <p:nvPr/>
-        </p:nvSpPr>
-        <p:spPr>
-          <a:xfrm>
-            <a:off x="868680" y="4572000"/>
-            <a:ext cx="10515600" cy="914400"/>
+          <p:cNvPr id="11" name="Text 8"/>
+          <p:cNvSpPr/>
+          <p:nvPr/>
+        </p:nvSpPr>
+        <p:spPr>
+          <a:xfrm>
+            <a:off x="868680" y="4617720"/>
+            <a:ext cx="10698480" cy="960120"/>
           </a:xfrm>
           <a:prstGeom prst="rect">
             <a:avLst/>
@@ -4113,7 +4252,7 @@
               <a:buNone/>
             </a:pPr>
             <a:r>
-              <a:rPr lang="en-US" sz="1600" b="1" dirty="0">
+              <a:rPr lang="en-US" sz="2000" b="1" dirty="0">
                 <a:solidFill>
                   <a:srgbClr val="9A6800"/>
                 </a:solidFill>
@@ -4121,15 +4260,15 @@
                 <a:ea typeface="Segoe UI" pitchFamily="34" charset="-122"/>
                 <a:cs typeface="Segoe UI" pitchFamily="34" charset="-120"/>
               </a:rPr>
-              <a:t>FHSS turns a barely usable link into a usable one: packet loss fell from 52% to 14.6%.</a:t>
-            </a:r>
-            <a:endParaRPr lang="en-US" sz="1600" dirty="0"/>
-          </a:p>
-        </p:txBody>
-      </p:sp>
-      <p:sp>
-        <p:nvSpPr>
-          <p:cNvPr id="13" name="Shape 10"/>
+              <a:t>FHSS cut packet loss from 52% to 14.6% on the same channel set.</a:t>
+            </a:r>
+            <a:endParaRPr lang="en-US" sz="2000" dirty="0"/>
+          </a:p>
+        </p:txBody>
+      </p:sp>
+      <p:sp>
+        <p:nvSpPr>
+          <p:cNvPr id="12" name="Shape 9"/>
           <p:cNvSpPr/>
           <p:nvPr/>
         </p:nvSpPr>
@@ -4149,7 +4288,7 @@
       </p:sp>
       <p:sp>
         <p:nvSpPr>
-          <p:cNvPr id="14" name="Text 11"/>
+          <p:cNvPr id="13" name="Text 10"/>
           <p:cNvSpPr/>
           <p:nvPr/>
         </p:nvSpPr>
@@ -4188,7 +4327,7 @@
       </p:sp>
       <p:sp>
         <p:nvSpPr>
-          <p:cNvPr id="15" name="Text 12"/>
+          <p:cNvPr id="14" name="Text 11"/>
           <p:cNvSpPr/>
           <p:nvPr/>
         </p:nvSpPr>
@@ -4342,7 +4481,7 @@
               <a:buNone/>
             </a:pPr>
             <a:r>
-              <a:rPr lang="en-US" sz="2400" b="1" dirty="0">
+              <a:rPr lang="en-US" sz="2600" b="1" dirty="0">
                 <a:solidFill>
                   <a:srgbClr val="FFFFFF"/>
                 </a:solidFill>
@@ -4352,7 +4491,7 @@
               </a:rPr>
               <a:t>Challenges &amp; Future Work</a:t>
             </a:r>
-            <a:endParaRPr lang="en-US" sz="2400" dirty="0"/>
+            <a:endParaRPr lang="en-US" sz="2600" dirty="0"/>
           </a:p>
         </p:txBody>
       </p:sp>
@@ -4392,7 +4531,7 @@
         <p:spPr>
           <a:xfrm>
             <a:off x="822960" y="1600200"/>
-            <a:ext cx="4937760" cy="365760"/>
+            <a:ext cx="4937760" cy="411480"/>
           </a:xfrm>
           <a:prstGeom prst="rect">
             <a:avLst/>
@@ -4408,7 +4547,7 @@
               <a:buNone/>
             </a:pPr>
             <a:r>
-              <a:rPr lang="en-US" sz="1800" b="1" dirty="0">
+              <a:rPr lang="en-US" sz="2200" b="1" dirty="0">
                 <a:solidFill>
                   <a:srgbClr val="EC4899"/>
                 </a:solidFill>
@@ -4418,7 +4557,7 @@
               </a:rPr>
               <a:t>Challenges</a:t>
             </a:r>
-            <a:endParaRPr lang="en-US" sz="1800" dirty="0"/>
+            <a:endParaRPr lang="en-US" sz="2200" dirty="0"/>
           </a:p>
         </p:txBody>
       </p:sp>
@@ -4430,8 +4569,8 @@
         </p:nvSpPr>
         <p:spPr>
           <a:xfrm>
-            <a:off x="822960" y="2103120"/>
-            <a:ext cx="4983480" cy="3657600"/>
+            <a:off x="822960" y="2148840"/>
+            <a:ext cx="4983480" cy="3611880"/>
           </a:xfrm>
           <a:prstGeom prst="rect">
             <a:avLst/>
@@ -4443,15 +4582,15 @@
           <a:bodyPr wrap="square" rtlCol="0" anchor="t"/>
           <a:lstStyle/>
           <a:p>
-            <a:pPr marL="203200" indent="-203200">
+            <a:pPr marL="254000" indent="-254000">
               <a:spcAft>
-                <a:spcPts val="900"/>
+                <a:spcPts val="1200"/>
               </a:spcAft>
               <a:buSzPct val="100000"/>
               <a:buChar char="•"/>
             </a:pPr>
             <a:r>
-              <a:rPr lang="en-US" sz="1650" dirty="0">
+              <a:rPr lang="en-US" sz="2200" dirty="0">
                 <a:solidFill>
                   <a:srgbClr val="2A2A33"/>
                 </a:solidFill>
@@ -4459,20 +4598,20 @@
                 <a:ea typeface="Segoe UI" pitchFamily="34" charset="-122"/>
                 <a:cs typeface="Segoe UI" pitchFamily="34" charset="-120"/>
               </a:rPr>
-              <a:t>Synchronization: timer-driven hopping with a one-time manual Sync alignment (automatic sync was deferred).</a:t>
-            </a:r>
-            <a:endParaRPr lang="en-US" sz="1550" dirty="0"/>
-          </a:p>
-          <a:p>
-            <a:pPr marL="203200" indent="-203200">
+              <a:t>Sync: manual alignment (auto deferred).</a:t>
+            </a:r>
+            <a:endParaRPr lang="en-US" sz="2200" dirty="0"/>
+          </a:p>
+          <a:p>
+            <a:pPr marL="254000" indent="-254000">
               <a:spcAft>
-                <a:spcPts val="900"/>
+                <a:spcPts val="1200"/>
               </a:spcAft>
               <a:buSzPct val="100000"/>
               <a:buChar char="•"/>
             </a:pPr>
             <a:r>
-              <a:rPr lang="en-US" sz="1650" dirty="0">
+              <a:rPr lang="en-US" sz="2200" dirty="0">
                 <a:solidFill>
                   <a:srgbClr val="2A2A33"/>
                 </a:solidFill>
@@ -4480,20 +4619,20 @@
                 <a:ea typeface="Segoe UI" pitchFamily="34" charset="-122"/>
                 <a:cs typeface="Segoe UI" pitchFamily="34" charset="-120"/>
               </a:rPr>
-              <a:t>Audio pipeline initially too slow: reworked the DAC buffer to drop old samples and bypassed CSMA backoff.</a:t>
-            </a:r>
-            <a:endParaRPr lang="en-US" sz="1550" dirty="0"/>
-          </a:p>
-          <a:p>
-            <a:pPr marL="203200" indent="-203200">
+              <a:t>Audio pipeline: DAC rework, skip CSMA.</a:t>
+            </a:r>
+            <a:endParaRPr lang="en-US" sz="2200" dirty="0"/>
+          </a:p>
+          <a:p>
+            <a:pPr marL="254000" indent="-254000">
               <a:spcAft>
-                <a:spcPts val="900"/>
+                <a:spcPts val="1200"/>
               </a:spcAft>
               <a:buSzPct val="100000"/>
               <a:buChar char="•"/>
             </a:pPr>
             <a:r>
-              <a:rPr lang="en-US" sz="1650" dirty="0">
+              <a:rPr lang="en-US" sz="2200" dirty="0">
                 <a:solidFill>
                   <a:srgbClr val="2A2A33"/>
                 </a:solidFill>
@@ -4501,9 +4640,9 @@
                 <a:ea typeface="Segoe UI" pitchFamily="34" charset="-122"/>
                 <a:cs typeface="Segoe UI" pitchFamily="34" charset="-120"/>
               </a:rPr>
-              <a:t>nRF24L01+ modules proved unreliable: we screened several units, and they still drop the occasional packet.</a:t>
-            </a:r>
-            <a:endParaRPr lang="en-US" sz="1550" dirty="0"/>
+              <a:t>nRF24L01+ modules unreliable.</a:t>
+            </a:r>
+            <a:endParaRPr lang="en-US" sz="2200" dirty="0"/>
           </a:p>
         </p:txBody>
       </p:sp>
@@ -4543,7 +4682,7 @@
         <p:spPr>
           <a:xfrm>
             <a:off x="6537960" y="1600200"/>
-            <a:ext cx="4937760" cy="365760"/>
+            <a:ext cx="4937760" cy="411480"/>
           </a:xfrm>
           <a:prstGeom prst="rect">
             <a:avLst/>
@@ -4559,7 +4698,7 @@
               <a:buNone/>
             </a:pPr>
             <a:r>
-              <a:rPr lang="en-US" sz="1800" b="1" dirty="0">
+              <a:rPr lang="en-US" sz="2200" b="1" dirty="0">
                 <a:solidFill>
                   <a:srgbClr val="06B6D4"/>
                 </a:solidFill>
@@ -4569,7 +4708,7 @@
               </a:rPr>
               <a:t>Future Work</a:t>
             </a:r>
-            <a:endParaRPr lang="en-US" sz="1800" dirty="0"/>
+            <a:endParaRPr lang="en-US" sz="2200" dirty="0"/>
           </a:p>
         </p:txBody>
       </p:sp>
@@ -4581,8 +4720,8 @@
         </p:nvSpPr>
         <p:spPr>
           <a:xfrm>
-            <a:off x="6537960" y="2103120"/>
-            <a:ext cx="4983480" cy="3657600"/>
+            <a:off x="6537960" y="2148840"/>
+            <a:ext cx="4983480" cy="3611880"/>
           </a:xfrm>
           <a:prstGeom prst="rect">
             <a:avLst/>
@@ -4594,15 +4733,15 @@
           <a:bodyPr wrap="square" rtlCol="0" anchor="t"/>
           <a:lstStyle/>
           <a:p>
-            <a:pPr marL="203200" indent="-203200">
+            <a:pPr marL="254000" indent="-254000">
               <a:spcAft>
-                <a:spcPts val="900"/>
+                <a:spcPts val="1200"/>
               </a:spcAft>
               <a:buSzPct val="100000"/>
               <a:buChar char="•"/>
             </a:pPr>
             <a:r>
-              <a:rPr lang="en-US" sz="1650" dirty="0">
+              <a:rPr lang="en-US" sz="2200" dirty="0">
                 <a:solidFill>
                   <a:srgbClr val="2A2A33"/>
                 </a:solidFill>
@@ -4610,20 +4749,20 @@
                 <a:ea typeface="Segoe UI" pitchFamily="34" charset="-122"/>
                 <a:cs typeface="Segoe UI" pitchFamily="34" charset="-120"/>
               </a:rPr>
-              <a:t>Stronger, authenticated encryption (AES) in place of the lightweight XOR cipher.</a:t>
-            </a:r>
-            <a:endParaRPr lang="en-US" sz="1550" dirty="0"/>
-          </a:p>
-          <a:p>
-            <a:pPr marL="203200" indent="-203200">
+              <a:t>AES authenticated encryption.</a:t>
+            </a:r>
+            <a:endParaRPr lang="en-US" sz="2200" dirty="0"/>
+          </a:p>
+          <a:p>
+            <a:pPr marL="254000" indent="-254000">
               <a:spcAft>
-                <a:spcPts val="900"/>
+                <a:spcPts val="1200"/>
               </a:spcAft>
               <a:buSzPct val="100000"/>
               <a:buChar char="•"/>
             </a:pPr>
             <a:r>
-              <a:rPr lang="en-US" sz="1650" dirty="0">
+              <a:rPr lang="en-US" sz="2200" dirty="0">
                 <a:solidFill>
                   <a:srgbClr val="2A2A33"/>
                 </a:solidFill>
@@ -4631,20 +4770,20 @@
                 <a:ea typeface="Segoe UI" pitchFamily="34" charset="-122"/>
                 <a:cs typeface="Segoe UI" pitchFamily="34" charset="-120"/>
               </a:rPr>
-              <a:t>Automatic synchronization, removing the manual Sync step.</a:t>
-            </a:r>
-            <a:endParaRPr lang="en-US" sz="1550" dirty="0"/>
-          </a:p>
-          <a:p>
-            <a:pPr marL="203200" indent="-203200">
+              <a:t>Automatic synchronization.</a:t>
+            </a:r>
+            <a:endParaRPr lang="en-US" sz="2200" dirty="0"/>
+          </a:p>
+          <a:p>
+            <a:pPr marL="254000" indent="-254000">
               <a:spcAft>
-                <a:spcPts val="900"/>
+                <a:spcPts val="1200"/>
               </a:spcAft>
               <a:buSzPct val="100000"/>
               <a:buChar char="•"/>
             </a:pPr>
             <a:r>
-              <a:rPr lang="en-US" sz="1650" dirty="0">
+              <a:rPr lang="en-US" sz="2200" dirty="0">
                 <a:solidFill>
                   <a:srgbClr val="2A2A33"/>
                 </a:solidFill>
@@ -4652,9 +4791,9 @@
                 <a:ea typeface="Segoe UI" pitchFamily="34" charset="-122"/>
                 <a:cs typeface="Segoe UI" pitchFamily="34" charset="-120"/>
               </a:rPr>
-              <a:t>A larger receive buffer or a stronger code for cleaner audio.</a:t>
-            </a:r>
-            <a:endParaRPr lang="en-US" sz="1550" dirty="0"/>
+              <a:t>Larger buffer / stronger code for audio.</a:t>
+            </a:r>
+            <a:endParaRPr lang="en-US" sz="2200" dirty="0"/>
           </a:p>
         </p:txBody>
       </p:sp>
@@ -4878,7 +5017,7 @@
         </p:nvSpPr>
         <p:spPr>
           <a:xfrm>
-            <a:off x="777240" y="685800"/>
+            <a:off x="777240" y="640080"/>
             <a:ext cx="7315200" cy="822960"/>
           </a:xfrm>
           <a:prstGeom prst="rect">
@@ -4895,7 +5034,7 @@
               <a:buNone/>
             </a:pPr>
             <a:r>
-              <a:rPr lang="en-US" sz="3200" b="1" dirty="0">
+              <a:rPr lang="en-US" sz="3400" b="1" dirty="0">
                 <a:solidFill>
                   <a:srgbClr val="FFFFFF"/>
                 </a:solidFill>
@@ -4905,7 +5044,7 @@
               </a:rPr>
               <a:t>Conclusion</a:t>
             </a:r>
-            <a:endParaRPr lang="en-US" sz="3200" dirty="0"/>
+            <a:endParaRPr lang="en-US" sz="3400" dirty="0"/>
           </a:p>
         </p:txBody>
       </p:sp>
@@ -4917,7 +5056,7 @@
         </p:nvSpPr>
         <p:spPr>
           <a:xfrm>
-            <a:off x="804672" y="1481328"/>
+            <a:off x="804672" y="1463040"/>
             <a:ext cx="2103120" cy="64008"/>
           </a:xfrm>
           <a:prstGeom prst="rect">
@@ -4938,7 +5077,7 @@
         <p:spPr>
           <a:xfrm>
             <a:off x="804672" y="1828800"/>
-            <a:ext cx="7040880" cy="3108960"/>
+            <a:ext cx="7132320" cy="2926080"/>
           </a:xfrm>
           <a:prstGeom prst="rect">
             <a:avLst/>
@@ -4950,15 +5089,15 @@
           <a:bodyPr wrap="square" rtlCol="0" anchor="t"/>
           <a:lstStyle/>
           <a:p>
-            <a:pPr marL="203200" indent="-203200">
+            <a:pPr marL="254000" indent="-254000">
               <a:spcAft>
-                <a:spcPts val="900"/>
+                <a:spcPts val="1200"/>
               </a:spcAft>
               <a:buSzPct val="100000"/>
               <a:buChar char="•"/>
             </a:pPr>
             <a:r>
-              <a:rPr lang="en-US" sz="1700" dirty="0">
+              <a:rPr lang="en-US" sz="2200" dirty="0">
                 <a:solidFill>
                   <a:srgbClr val="FFFFFF"/>
                 </a:solidFill>
@@ -4966,20 +5105,20 @@
                 <a:ea typeface="Segoe UI" pitchFamily="34" charset="-122"/>
                 <a:cs typeface="Segoe UI" pitchFamily="34" charset="-120"/>
               </a:rPr>
-              <a:t>Jam-resistant, infrastructure-free text and voice on cheap, commodity hardware.</a:t>
-            </a:r>
-            <a:endParaRPr lang="en-US" sz="1700" dirty="0"/>
-          </a:p>
-          <a:p>
-            <a:pPr marL="203200" indent="-203200">
+              <a:t>Jam-resistant text and voice on cheap hardware.</a:t>
+            </a:r>
+            <a:endParaRPr lang="en-US" sz="2200" dirty="0"/>
+          </a:p>
+          <a:p>
+            <a:pPr marL="254000" indent="-254000">
               <a:spcAft>
-                <a:spcPts val="900"/>
+                <a:spcPts val="1200"/>
               </a:spcAft>
               <a:buSzPct val="100000"/>
               <a:buChar char="•"/>
             </a:pPr>
             <a:r>
-              <a:rPr lang="en-US" sz="1700" dirty="0">
+              <a:rPr lang="en-US" sz="2200" dirty="0">
                 <a:solidFill>
                   <a:srgbClr val="FFFFFF"/>
                 </a:solidFill>
@@ -4987,20 +5126,20 @@
                 <a:ea typeface="Segoe UI" pitchFamily="34" charset="-122"/>
                 <a:cs typeface="Segoe UI" pitchFamily="34" charset="-120"/>
               </a:rPr>
-              <a:t>FHSS is the key: it cut packet loss from 52% to 14.6% on the same channel set.</a:t>
-            </a:r>
-            <a:endParaRPr lang="en-US" sz="1700" dirty="0"/>
-          </a:p>
-          <a:p>
-            <a:pPr marL="203200" indent="-203200">
+              <a:t>FHSS is the key: packet loss 52% to 14.6%.</a:t>
+            </a:r>
+            <a:endParaRPr lang="en-US" sz="2200" dirty="0"/>
+          </a:p>
+          <a:p>
+            <a:pPr marL="254000" indent="-254000">
               <a:spcAft>
-                <a:spcPts val="900"/>
+                <a:spcPts val="1200"/>
               </a:spcAft>
               <a:buSzPct val="100000"/>
               <a:buChar char="•"/>
             </a:pPr>
             <a:r>
-              <a:rPr lang="en-US" sz="1700" dirty="0">
+              <a:rPr lang="en-US" sz="2200" dirty="0">
                 <a:solidFill>
                   <a:srgbClr val="FFFFFF"/>
                 </a:solidFill>
@@ -5008,20 +5147,20 @@
                 <a:ea typeface="Segoe UI" pitchFamily="34" charset="-122"/>
                 <a:cs typeface="Segoe UI" pitchFamily="34" charset="-120"/>
               </a:rPr>
-              <a:t>Forward error correction is matched to each traffic type (CRC, ARQ, XOR).</a:t>
-            </a:r>
-            <a:endParaRPr lang="en-US" sz="1700" dirty="0"/>
-          </a:p>
-          <a:p>
-            <a:pPr marL="203200" indent="-203200">
+              <a:t>FEC matched per traffic type: CRC, ARQ, XOR.</a:t>
+            </a:r>
+            <a:endParaRPr lang="en-US" sz="2200" dirty="0"/>
+          </a:p>
+          <a:p>
+            <a:pPr marL="254000" indent="-254000">
               <a:spcAft>
-                <a:spcPts val="900"/>
+                <a:spcPts val="1200"/>
               </a:spcAft>
               <a:buSzPct val="100000"/>
               <a:buChar char="•"/>
             </a:pPr>
             <a:r>
-              <a:rPr lang="en-US" sz="1700" dirty="0">
+              <a:rPr lang="en-US" sz="2200" dirty="0">
                 <a:solidFill>
                   <a:srgbClr val="FFFFFF"/>
                 </a:solidFill>
@@ -5029,9 +5168,9 @@
                 <a:ea typeface="Segoe UI" pitchFamily="34" charset="-122"/>
                 <a:cs typeface="Segoe UI" pitchFamily="34" charset="-120"/>
               </a:rPr>
-              <a:t>Designed, integrated on a custom PCB, and validated on real hardware.</a:t>
-            </a:r>
-            <a:endParaRPr lang="en-US" sz="1700" dirty="0"/>
+              <a:t>Built on a custom PCB, validated on real hardware.</a:t>
+            </a:r>
+            <a:endParaRPr lang="en-US" sz="2200" dirty="0"/>
           </a:p>
         </p:txBody>
       </p:sp>
@@ -5043,8 +5182,8 @@
         </p:nvSpPr>
         <p:spPr>
           <a:xfrm>
-            <a:off x="804672" y="5257800"/>
-            <a:ext cx="7315200" cy="640080"/>
+            <a:off x="804672" y="4983480"/>
+            <a:ext cx="7223760" cy="640080"/>
           </a:xfrm>
           <a:prstGeom prst="rect">
             <a:avLst/>
@@ -5060,17 +5199,31 @@
               <a:buNone/>
             </a:pPr>
             <a:r>
-              <a:rPr lang="en-US" sz="2400" b="1" dirty="0">
-                <a:solidFill>
-                  <a:srgbClr val="06B6D4"/>
-                </a:solidFill>
-                <a:latin typeface="Segoe UI" pitchFamily="34" charset="0"/>
-                <a:ea typeface="Segoe UI" pitchFamily="34" charset="-122"/>
-                <a:cs typeface="Segoe UI" pitchFamily="34" charset="-120"/>
-              </a:rPr>
-              <a:t>Thank you  ·  Questions?</a:t>
-            </a:r>
-            <a:endParaRPr lang="en-US" sz="2400" dirty="0"/>
+              <a:rPr lang="en-US" sz="2000" b="1" dirty="0">
+                <a:solidFill>
+                  <a:srgbClr val="F59E0B"/>
+                </a:solidFill>
+                <a:latin typeface="Segoe UI" pitchFamily="34" charset="0"/>
+                <a:ea typeface="Segoe UI" pitchFamily="34" charset="-122"/>
+                <a:cs typeface="Segoe UI" pitchFamily="34" charset="-120"/>
+              </a:rPr>
+              <a:t>Future work: </a:t>
+            </a:r>
+            <a:pPr indent="0" marL="0">
+              <a:buNone/>
+            </a:pPr>
+            <a:r>
+              <a:rPr lang="en-US" sz="2000" dirty="0">
+                <a:solidFill>
+                  <a:srgbClr val="FFFFFF"/>
+                </a:solidFill>
+                <a:latin typeface="Segoe UI" pitchFamily="34" charset="0"/>
+                <a:ea typeface="Segoe UI" pitchFamily="34" charset="-122"/>
+                <a:cs typeface="Segoe UI" pitchFamily="34" charset="-120"/>
+              </a:rPr>
+              <a:t>AES encryption and automatic synchronization.</a:t>
+            </a:r>
+            <a:endParaRPr lang="en-US" sz="2000" dirty="0"/>
           </a:p>
         </p:txBody>
       </p:sp>
@@ -5119,6 +5272,827 @@
           </a:prstGeom>
         </p:spPr>
       </p:pic>
+    </p:spTree>
+  </p:cSld>
+  <p:clrMapOvr>
+    <a:masterClrMapping/>
+  </p:clrMapOvr>
+</p:sld>
+</file>
+
+<file path=ppt/slides/slide14.xml><?xml version="1.0" encoding="utf-8"?>
+<p:sld xmlns:a="http://schemas.openxmlformats.org/drawingml/2006/main" xmlns:r="http://schemas.openxmlformats.org/officeDocument/2006/relationships" xmlns:p="http://schemas.openxmlformats.org/presentationml/2006/main">
+  <p:cSld name="Slide 14">
+    <p:bg>
+      <p:bgPr>
+        <a:solidFill>
+          <a:srgbClr val="FFFFFF"/>
+        </a:solidFill>
+      </p:bgPr>
+    </p:bg>
+    <p:spTree>
+      <p:nvGrpSpPr>
+        <p:cNvPr id="1" name=""/>
+        <p:cNvGrpSpPr/>
+        <p:nvPr/>
+      </p:nvGrpSpPr>
+      <p:grpSpPr>
+        <a:xfrm>
+          <a:off x="0" y="0"/>
+          <a:ext cx="0" cy="0"/>
+          <a:chOff x="0" y="0"/>
+          <a:chExt cx="0" cy="0"/>
+        </a:xfrm>
+      </p:grpSpPr>
+      <p:sp>
+        <p:nvSpPr>
+          <p:cNvPr id="2" name="Shape 0"/>
+          <p:cNvSpPr/>
+          <p:nvPr/>
+        </p:nvSpPr>
+        <p:spPr>
+          <a:xfrm>
+            <a:off x="0" y="0"/>
+            <a:ext cx="12191695" cy="1024128"/>
+          </a:xfrm>
+          <a:prstGeom prst="rect">
+            <a:avLst/>
+          </a:prstGeom>
+          <a:solidFill>
+            <a:srgbClr val="4F46E5"/>
+          </a:solidFill>
+          <a:ln/>
+        </p:spPr>
+      </p:sp>
+      <p:sp>
+        <p:nvSpPr>
+          <p:cNvPr id="3" name="Shape 1"/>
+          <p:cNvSpPr/>
+          <p:nvPr/>
+        </p:nvSpPr>
+        <p:spPr>
+          <a:xfrm>
+            <a:off x="0" y="1024128"/>
+            <a:ext cx="12191695" cy="100584"/>
+          </a:xfrm>
+          <a:prstGeom prst="rect">
+            <a:avLst/>
+          </a:prstGeom>
+          <a:solidFill>
+            <a:srgbClr val="7C3AED"/>
+          </a:solidFill>
+          <a:ln/>
+        </p:spPr>
+      </p:sp>
+      <p:sp>
+        <p:nvSpPr>
+          <p:cNvPr id="4" name="Shape 2"/>
+          <p:cNvSpPr/>
+          <p:nvPr/>
+        </p:nvSpPr>
+        <p:spPr>
+          <a:xfrm>
+            <a:off x="502920" y="384048"/>
+            <a:ext cx="256032" cy="256032"/>
+          </a:xfrm>
+          <a:prstGeom prst="ellipse">
+            <a:avLst/>
+          </a:prstGeom>
+          <a:solidFill>
+            <a:srgbClr val="7C3AED"/>
+          </a:solidFill>
+          <a:ln/>
+        </p:spPr>
+      </p:sp>
+      <p:sp>
+        <p:nvSpPr>
+          <p:cNvPr id="5" name="Text 3"/>
+          <p:cNvSpPr/>
+          <p:nvPr/>
+        </p:nvSpPr>
+        <p:spPr>
+          <a:xfrm>
+            <a:off x="914400" y="146304"/>
+            <a:ext cx="10789920" cy="749808"/>
+          </a:xfrm>
+          <a:prstGeom prst="rect">
+            <a:avLst/>
+          </a:prstGeom>
+          <a:noFill/>
+          <a:ln/>
+        </p:spPr>
+        <p:txBody>
+          <a:bodyPr wrap="square" rtlCol="0" anchor="ctr"/>
+          <a:lstStyle/>
+          <a:p>
+            <a:pPr indent="0" marL="0">
+              <a:buNone/>
+            </a:pPr>
+            <a:r>
+              <a:rPr lang="en-US" sz="2600" b="1" dirty="0">
+                <a:solidFill>
+                  <a:srgbClr val="FFFFFF"/>
+                </a:solidFill>
+                <a:latin typeface="Segoe UI" pitchFamily="34" charset="0"/>
+                <a:ea typeface="Segoe UI" pitchFamily="34" charset="-122"/>
+                <a:cs typeface="Segoe UI" pitchFamily="34" charset="-120"/>
+              </a:rPr>
+              <a:t>References</a:t>
+            </a:r>
+            <a:endParaRPr lang="en-US" sz="2600" dirty="0"/>
+          </a:p>
+        </p:txBody>
+      </p:sp>
+      <p:sp>
+        <p:nvSpPr>
+          <p:cNvPr id="6" name="Text 4"/>
+          <p:cNvSpPr/>
+          <p:nvPr/>
+        </p:nvSpPr>
+        <p:spPr>
+          <a:xfrm>
+            <a:off x="822960" y="1508760"/>
+            <a:ext cx="10607040" cy="4663440"/>
+          </a:xfrm>
+          <a:prstGeom prst="rect">
+            <a:avLst/>
+          </a:prstGeom>
+          <a:noFill/>
+          <a:ln/>
+        </p:spPr>
+        <p:txBody>
+          <a:bodyPr wrap="square" rtlCol="0" anchor="t"/>
+          <a:lstStyle/>
+          <a:p>
+            <a:pPr indent="0" marL="0">
+              <a:buNone/>
+            </a:pPr>
+            <a:r>
+              <a:rPr lang="en-US" sz="1700" b="1" dirty="0">
+                <a:solidFill>
+                  <a:srgbClr val="4F46E5"/>
+                </a:solidFill>
+                <a:latin typeface="Segoe UI" pitchFamily="34" charset="0"/>
+                <a:ea typeface="Segoe UI" pitchFamily="34" charset="-122"/>
+                <a:cs typeface="Segoe UI" pitchFamily="34" charset="-120"/>
+              </a:rPr>
+              <a:t>[1]  </a:t>
+            </a:r>
+            <a:pPr indent="0" marL="0">
+              <a:spcAft>
+                <a:spcPts val="1200"/>
+              </a:spcAft>
+              <a:buNone/>
+            </a:pPr>
+            <a:r>
+              <a:rPr lang="en-US" sz="1700" dirty="0">
+                <a:solidFill>
+                  <a:srgbClr val="2A2A33"/>
+                </a:solidFill>
+                <a:latin typeface="Segoe UI" pitchFamily="34" charset="0"/>
+                <a:ea typeface="Segoe UI" pitchFamily="34" charset="-122"/>
+                <a:cs typeface="Segoe UI" pitchFamily="34" charset="-120"/>
+              </a:rPr>
+              <a:t>Nordic Semiconductor, nRF24L01+ Transceiver Product Specification.</a:t>
+            </a:r>
+            <a:endParaRPr lang="en-US" sz="1700" dirty="0"/>
+          </a:p>
+          <a:p>
+            <a:pPr indent="0" marL="0">
+              <a:buNone/>
+            </a:pPr>
+            <a:r>
+              <a:rPr lang="en-US" sz="1700" b="1" dirty="0">
+                <a:solidFill>
+                  <a:srgbClr val="4F46E5"/>
+                </a:solidFill>
+                <a:latin typeface="Segoe UI" pitchFamily="34" charset="0"/>
+                <a:ea typeface="Segoe UI" pitchFamily="34" charset="-122"/>
+                <a:cs typeface="Segoe UI" pitchFamily="34" charset="-120"/>
+              </a:rPr>
+              <a:t>[2]  </a:t>
+            </a:r>
+            <a:pPr indent="0" marL="0">
+              <a:spcAft>
+                <a:spcPts val="1200"/>
+              </a:spcAft>
+              <a:buNone/>
+            </a:pPr>
+            <a:r>
+              <a:rPr lang="en-US" sz="1700" dirty="0">
+                <a:solidFill>
+                  <a:srgbClr val="2A2A33"/>
+                </a:solidFill>
+                <a:latin typeface="Segoe UI" pitchFamily="34" charset="0"/>
+                <a:ea typeface="Segoe UI" pitchFamily="34" charset="-122"/>
+                <a:cs typeface="Segoe UI" pitchFamily="34" charset="-120"/>
+              </a:rPr>
+              <a:t>Espressif Systems, ESP32 Technical Reference Manual and Datasheet.</a:t>
+            </a:r>
+            <a:endParaRPr lang="en-US" sz="1700" dirty="0"/>
+          </a:p>
+          <a:p>
+            <a:pPr indent="0" marL="0">
+              <a:buNone/>
+            </a:pPr>
+            <a:r>
+              <a:rPr lang="en-US" sz="1700" b="1" dirty="0">
+                <a:solidFill>
+                  <a:srgbClr val="4F46E5"/>
+                </a:solidFill>
+                <a:latin typeface="Segoe UI" pitchFamily="34" charset="0"/>
+                <a:ea typeface="Segoe UI" pitchFamily="34" charset="-122"/>
+                <a:cs typeface="Segoe UI" pitchFamily="34" charset="-120"/>
+              </a:rPr>
+              <a:t>[3]  </a:t>
+            </a:r>
+            <a:pPr indent="0" marL="0">
+              <a:spcAft>
+                <a:spcPts val="1200"/>
+              </a:spcAft>
+              <a:buNone/>
+            </a:pPr>
+            <a:r>
+              <a:rPr lang="en-US" sz="1700" dirty="0">
+                <a:solidFill>
+                  <a:srgbClr val="2A2A33"/>
+                </a:solidFill>
+                <a:latin typeface="Segoe UI" pitchFamily="34" charset="0"/>
+                <a:ea typeface="Segoe UI" pitchFamily="34" charset="-122"/>
+                <a:cs typeface="Segoe UI" pitchFamily="34" charset="-120"/>
+              </a:rPr>
+              <a:t>InvenSense (TDK), INMP441 I2S Microphone Datasheet.</a:t>
+            </a:r>
+            <a:endParaRPr lang="en-US" sz="1700" dirty="0"/>
+          </a:p>
+          <a:p>
+            <a:pPr indent="0" marL="0">
+              <a:buNone/>
+            </a:pPr>
+            <a:r>
+              <a:rPr lang="en-US" sz="1700" b="1" dirty="0">
+                <a:solidFill>
+                  <a:srgbClr val="4F46E5"/>
+                </a:solidFill>
+                <a:latin typeface="Segoe UI" pitchFamily="34" charset="0"/>
+                <a:ea typeface="Segoe UI" pitchFamily="34" charset="-122"/>
+                <a:cs typeface="Segoe UI" pitchFamily="34" charset="-120"/>
+              </a:rPr>
+              <a:t>[4]  </a:t>
+            </a:r>
+            <a:pPr indent="0" marL="0">
+              <a:spcAft>
+                <a:spcPts val="1200"/>
+              </a:spcAft>
+              <a:buNone/>
+            </a:pPr>
+            <a:r>
+              <a:rPr lang="en-US" sz="1700" dirty="0">
+                <a:solidFill>
+                  <a:srgbClr val="2A2A33"/>
+                </a:solidFill>
+                <a:latin typeface="Segoe UI" pitchFamily="34" charset="0"/>
+                <a:ea typeface="Segoe UI" pitchFamily="34" charset="-122"/>
+                <a:cs typeface="Segoe UI" pitchFamily="34" charset="-120"/>
+              </a:rPr>
+              <a:t>Texas Instruments, LM386 Audio Power Amplifier Datasheet.</a:t>
+            </a:r>
+            <a:endParaRPr lang="en-US" sz="1700" dirty="0"/>
+          </a:p>
+          <a:p>
+            <a:pPr indent="0" marL="0">
+              <a:buNone/>
+            </a:pPr>
+            <a:r>
+              <a:rPr lang="en-US" sz="1700" b="1" dirty="0">
+                <a:solidFill>
+                  <a:srgbClr val="4F46E5"/>
+                </a:solidFill>
+                <a:latin typeface="Segoe UI" pitchFamily="34" charset="0"/>
+                <a:ea typeface="Segoe UI" pitchFamily="34" charset="-122"/>
+                <a:cs typeface="Segoe UI" pitchFamily="34" charset="-120"/>
+              </a:rPr>
+              <a:t>[5]  </a:t>
+            </a:r>
+            <a:pPr indent="0" marL="0">
+              <a:spcAft>
+                <a:spcPts val="1200"/>
+              </a:spcAft>
+              <a:buNone/>
+            </a:pPr>
+            <a:r>
+              <a:rPr lang="en-US" sz="1700" dirty="0">
+                <a:solidFill>
+                  <a:srgbClr val="2A2A33"/>
+                </a:solidFill>
+                <a:latin typeface="Segoe UI" pitchFamily="34" charset="0"/>
+                <a:ea typeface="Segoe UI" pitchFamily="34" charset="-122"/>
+                <a:cs typeface="Segoe UI" pitchFamily="34" charset="-120"/>
+              </a:rPr>
+              <a:t>TMRh20, RF24: Optimized driver for nRF24L01(+) (open source).</a:t>
+            </a:r>
+            <a:endParaRPr lang="en-US" sz="1700" dirty="0"/>
+          </a:p>
+          <a:p>
+            <a:pPr indent="0" marL="0">
+              <a:buNone/>
+            </a:pPr>
+            <a:r>
+              <a:rPr lang="en-US" sz="1700" b="1" dirty="0">
+                <a:solidFill>
+                  <a:srgbClr val="4F46E5"/>
+                </a:solidFill>
+                <a:latin typeface="Segoe UI" pitchFamily="34" charset="0"/>
+                <a:ea typeface="Segoe UI" pitchFamily="34" charset="-122"/>
+                <a:cs typeface="Segoe UI" pitchFamily="34" charset="-120"/>
+              </a:rPr>
+              <a:t>[6]  </a:t>
+            </a:r>
+            <a:pPr indent="0" marL="0">
+              <a:spcAft>
+                <a:spcPts val="1200"/>
+              </a:spcAft>
+              <a:buNone/>
+            </a:pPr>
+            <a:r>
+              <a:rPr lang="en-US" sz="1700" dirty="0">
+                <a:solidFill>
+                  <a:srgbClr val="2A2A33"/>
+                </a:solidFill>
+                <a:latin typeface="Segoe UI" pitchFamily="34" charset="0"/>
+                <a:ea typeface="Segoe UI" pitchFamily="34" charset="-122"/>
+                <a:cs typeface="Segoe UI" pitchFamily="34" charset="-120"/>
+              </a:rPr>
+              <a:t>Lamarr &amp; Antheil, Secret Communication System, U.S. Patent 2,292,387, 1942.</a:t>
+            </a:r>
+            <a:endParaRPr lang="en-US" sz="1700" dirty="0"/>
+          </a:p>
+          <a:p>
+            <a:pPr indent="0" marL="0">
+              <a:buNone/>
+            </a:pPr>
+            <a:r>
+              <a:rPr lang="en-US" sz="1700" b="1" dirty="0">
+                <a:solidFill>
+                  <a:srgbClr val="4F46E5"/>
+                </a:solidFill>
+                <a:latin typeface="Segoe UI" pitchFamily="34" charset="0"/>
+                <a:ea typeface="Segoe UI" pitchFamily="34" charset="-122"/>
+                <a:cs typeface="Segoe UI" pitchFamily="34" charset="-120"/>
+              </a:rPr>
+              <a:t>[7]  </a:t>
+            </a:r>
+            <a:pPr indent="0" marL="0">
+              <a:spcAft>
+                <a:spcPts val="1200"/>
+              </a:spcAft>
+              <a:buNone/>
+            </a:pPr>
+            <a:r>
+              <a:rPr lang="en-US" sz="1700" dirty="0">
+                <a:solidFill>
+                  <a:srgbClr val="2A2A33"/>
+                </a:solidFill>
+                <a:latin typeface="Segoe UI" pitchFamily="34" charset="0"/>
+                <a:ea typeface="Segoe UI" pitchFamily="34" charset="-122"/>
+                <a:cs typeface="Segoe UI" pitchFamily="34" charset="-120"/>
+              </a:rPr>
+              <a:t>ITU-T Recommendation V.41, CRC-16-CCITT.</a:t>
+            </a:r>
+            <a:endParaRPr lang="en-US" sz="1700" dirty="0"/>
+          </a:p>
+          <a:p>
+            <a:pPr indent="0" marL="0">
+              <a:buNone/>
+            </a:pPr>
+            <a:r>
+              <a:rPr lang="en-US" sz="1700" b="1" dirty="0">
+                <a:solidFill>
+                  <a:srgbClr val="4F46E5"/>
+                </a:solidFill>
+                <a:latin typeface="Segoe UI" pitchFamily="34" charset="0"/>
+                <a:ea typeface="Segoe UI" pitchFamily="34" charset="-122"/>
+                <a:cs typeface="Segoe UI" pitchFamily="34" charset="-120"/>
+              </a:rPr>
+              <a:t>[8]  </a:t>
+            </a:r>
+            <a:pPr indent="0" marL="0">
+              <a:spcAft>
+                <a:spcPts val="1200"/>
+              </a:spcAft>
+              <a:buNone/>
+            </a:pPr>
+            <a:r>
+              <a:rPr lang="en-US" sz="1700" dirty="0">
+                <a:solidFill>
+                  <a:srgbClr val="2A2A33"/>
+                </a:solidFill>
+                <a:latin typeface="Segoe UI" pitchFamily="34" charset="0"/>
+                <a:ea typeface="Segoe UI" pitchFamily="34" charset="-122"/>
+                <a:cs typeface="Segoe UI" pitchFamily="34" charset="-120"/>
+              </a:rPr>
+              <a:t>A. Goldsmith, Wireless Communications, Cambridge University Press.</a:t>
+            </a:r>
+            <a:endParaRPr lang="en-US" sz="1700" dirty="0"/>
+          </a:p>
+        </p:txBody>
+      </p:sp>
+      <p:sp>
+        <p:nvSpPr>
+          <p:cNvPr id="7" name="Shape 5"/>
+          <p:cNvSpPr/>
+          <p:nvPr/>
+        </p:nvSpPr>
+        <p:spPr>
+          <a:xfrm>
+            <a:off x="11430000" y="6336792"/>
+            <a:ext cx="402336" cy="402336"/>
+          </a:xfrm>
+          <a:prstGeom prst="ellipse">
+            <a:avLst/>
+          </a:prstGeom>
+          <a:solidFill>
+            <a:srgbClr val="4F46E5"/>
+          </a:solidFill>
+          <a:ln/>
+        </p:spPr>
+      </p:sp>
+      <p:sp>
+        <p:nvSpPr>
+          <p:cNvPr id="8" name="Text 6"/>
+          <p:cNvSpPr/>
+          <p:nvPr/>
+        </p:nvSpPr>
+        <p:spPr>
+          <a:xfrm>
+            <a:off x="11430000" y="6336792"/>
+            <a:ext cx="402336" cy="402336"/>
+          </a:xfrm>
+          <a:prstGeom prst="rect">
+            <a:avLst/>
+          </a:prstGeom>
+          <a:noFill/>
+          <a:ln/>
+        </p:spPr>
+        <p:txBody>
+          <a:bodyPr wrap="square" rtlCol="0" anchor="ctr"/>
+          <a:lstStyle/>
+          <a:p>
+            <a:pPr algn="ctr" indent="0" marL="0">
+              <a:buNone/>
+            </a:pPr>
+            <a:r>
+              <a:rPr lang="en-US" sz="1100" b="1" dirty="0">
+                <a:solidFill>
+                  <a:srgbClr val="FFFFFF"/>
+                </a:solidFill>
+                <a:latin typeface="Segoe UI" pitchFamily="34" charset="0"/>
+                <a:ea typeface="Segoe UI" pitchFamily="34" charset="-122"/>
+                <a:cs typeface="Segoe UI" pitchFamily="34" charset="-120"/>
+              </a:rPr>
+              <a:t>14</a:t>
+            </a:r>
+            <a:endParaRPr lang="en-US" sz="1100" dirty="0"/>
+          </a:p>
+        </p:txBody>
+      </p:sp>
+      <p:sp>
+        <p:nvSpPr>
+          <p:cNvPr id="9" name="Text 7"/>
+          <p:cNvSpPr/>
+          <p:nvPr/>
+        </p:nvSpPr>
+        <p:spPr>
+          <a:xfrm>
+            <a:off x="411480" y="6437376"/>
+            <a:ext cx="8229600" cy="274320"/>
+          </a:xfrm>
+          <a:prstGeom prst="rect">
+            <a:avLst/>
+          </a:prstGeom>
+          <a:noFill/>
+          <a:ln/>
+        </p:spPr>
+        <p:txBody>
+          <a:bodyPr wrap="square" rtlCol="0" anchor="ctr"/>
+          <a:lstStyle/>
+          <a:p>
+            <a:pPr indent="0" marL="0">
+              <a:buNone/>
+            </a:pPr>
+            <a:r>
+              <a:rPr lang="en-US" sz="900" dirty="0">
+                <a:solidFill>
+                  <a:srgbClr val="6B7280"/>
+                </a:solidFill>
+                <a:latin typeface="Segoe UI" pitchFamily="34" charset="0"/>
+                <a:ea typeface="Segoe UI" pitchFamily="34" charset="-122"/>
+                <a:cs typeface="Segoe UI" pitchFamily="34" charset="-120"/>
+              </a:rPr>
+              <a:t>FELCOM  ·  Secure Handheld Communication Device</a:t>
+            </a:r>
+            <a:endParaRPr lang="en-US" sz="900" dirty="0"/>
+          </a:p>
+        </p:txBody>
+      </p:sp>
+    </p:spTree>
+  </p:cSld>
+  <p:clrMapOvr>
+    <a:masterClrMapping/>
+  </p:clrMapOvr>
+</p:sld>
+</file>
+
+<file path=ppt/slides/slide15.xml><?xml version="1.0" encoding="utf-8"?>
+<p:sld xmlns:a="http://schemas.openxmlformats.org/drawingml/2006/main" xmlns:r="http://schemas.openxmlformats.org/officeDocument/2006/relationships" xmlns:p="http://schemas.openxmlformats.org/presentationml/2006/main">
+  <p:cSld name="Slide 15">
+    <p:bg>
+      <p:bgPr>
+        <a:solidFill>
+          <a:srgbClr val="1E1B3A"/>
+        </a:solidFill>
+      </p:bgPr>
+    </p:bg>
+    <p:spTree>
+      <p:nvGrpSpPr>
+        <p:cNvPr id="1" name=""/>
+        <p:cNvGrpSpPr/>
+        <p:nvPr/>
+      </p:nvGrpSpPr>
+      <p:grpSpPr>
+        <a:xfrm>
+          <a:off x="0" y="0"/>
+          <a:ext cx="0" cy="0"/>
+          <a:chOff x="0" y="0"/>
+          <a:chExt cx="0" cy="0"/>
+        </a:xfrm>
+      </p:grpSpPr>
+      <p:sp>
+        <p:nvSpPr>
+          <p:cNvPr id="2" name="Shape 0"/>
+          <p:cNvSpPr/>
+          <p:nvPr/>
+        </p:nvSpPr>
+        <p:spPr>
+          <a:xfrm>
+            <a:off x="0" y="0"/>
+            <a:ext cx="4206240" cy="274320"/>
+          </a:xfrm>
+          <a:prstGeom prst="rect">
+            <a:avLst/>
+          </a:prstGeom>
+          <a:solidFill>
+            <a:srgbClr val="06B6D4"/>
+          </a:solidFill>
+          <a:ln/>
+        </p:spPr>
+      </p:sp>
+      <p:sp>
+        <p:nvSpPr>
+          <p:cNvPr id="3" name="Shape 1"/>
+          <p:cNvSpPr/>
+          <p:nvPr/>
+        </p:nvSpPr>
+        <p:spPr>
+          <a:xfrm>
+            <a:off x="4206240" y="0"/>
+            <a:ext cx="3840480" cy="274320"/>
+          </a:xfrm>
+          <a:prstGeom prst="rect">
+            <a:avLst/>
+          </a:prstGeom>
+          <a:solidFill>
+            <a:srgbClr val="EC4899"/>
+          </a:solidFill>
+          <a:ln/>
+        </p:spPr>
+      </p:sp>
+      <p:sp>
+        <p:nvSpPr>
+          <p:cNvPr id="4" name="Shape 2"/>
+          <p:cNvSpPr/>
+          <p:nvPr/>
+        </p:nvSpPr>
+        <p:spPr>
+          <a:xfrm>
+            <a:off x="8046720" y="0"/>
+            <a:ext cx="4144975" cy="274320"/>
+          </a:xfrm>
+          <a:prstGeom prst="rect">
+            <a:avLst/>
+          </a:prstGeom>
+          <a:solidFill>
+            <a:srgbClr val="F59E0B"/>
+          </a:solidFill>
+          <a:ln/>
+        </p:spPr>
+      </p:sp>
+      <p:sp>
+        <p:nvSpPr>
+          <p:cNvPr id="5" name="Shape 3"/>
+          <p:cNvSpPr/>
+          <p:nvPr/>
+        </p:nvSpPr>
+        <p:spPr>
+          <a:xfrm>
+            <a:off x="-1097280" y="4480560"/>
+            <a:ext cx="3291840" cy="3291840"/>
+          </a:xfrm>
+          <a:prstGeom prst="ellipse">
+            <a:avLst/>
+          </a:prstGeom>
+          <a:solidFill>
+            <a:srgbClr val="7C3AED">
+              <a:alpha val="60000"/>
+            </a:srgbClr>
+          </a:solidFill>
+          <a:ln/>
+        </p:spPr>
+      </p:sp>
+      <p:sp>
+        <p:nvSpPr>
+          <p:cNvPr id="6" name="Shape 4"/>
+          <p:cNvSpPr/>
+          <p:nvPr/>
+        </p:nvSpPr>
+        <p:spPr>
+          <a:xfrm>
+            <a:off x="9875520" y="-1097280"/>
+            <a:ext cx="3108960" cy="3108960"/>
+          </a:xfrm>
+          <a:prstGeom prst="ellipse">
+            <a:avLst/>
+          </a:prstGeom>
+          <a:solidFill>
+            <a:srgbClr val="4F46E5">
+              <a:alpha val="65000"/>
+            </a:srgbClr>
+          </a:solidFill>
+          <a:ln/>
+        </p:spPr>
+      </p:sp>
+      <p:sp>
+        <p:nvSpPr>
+          <p:cNvPr id="7" name="Text 5"/>
+          <p:cNvSpPr/>
+          <p:nvPr/>
+        </p:nvSpPr>
+        <p:spPr>
+          <a:xfrm>
+            <a:off x="777240" y="1371600"/>
+            <a:ext cx="10607040" cy="822960"/>
+          </a:xfrm>
+          <a:prstGeom prst="rect">
+            <a:avLst/>
+          </a:prstGeom>
+          <a:noFill/>
+          <a:ln/>
+        </p:spPr>
+        <p:txBody>
+          <a:bodyPr wrap="square" rtlCol="0" anchor="ctr"/>
+          <a:lstStyle/>
+          <a:p>
+            <a:pPr indent="0" marL="0">
+              <a:buNone/>
+            </a:pPr>
+            <a:r>
+              <a:rPr lang="en-US" sz="3400" b="1" dirty="0">
+                <a:solidFill>
+                  <a:srgbClr val="FFFFFF"/>
+                </a:solidFill>
+                <a:latin typeface="Segoe UI" pitchFamily="34" charset="0"/>
+                <a:ea typeface="Segoe UI" pitchFamily="34" charset="-122"/>
+                <a:cs typeface="Segoe UI" pitchFamily="34" charset="-120"/>
+              </a:rPr>
+              <a:t>Acknowledgments</a:t>
+            </a:r>
+            <a:endParaRPr lang="en-US" sz="3400" dirty="0"/>
+          </a:p>
+        </p:txBody>
+      </p:sp>
+      <p:sp>
+        <p:nvSpPr>
+          <p:cNvPr id="8" name="Shape 6"/>
+          <p:cNvSpPr/>
+          <p:nvPr/>
+        </p:nvSpPr>
+        <p:spPr>
+          <a:xfrm>
+            <a:off x="822960" y="2240280"/>
+            <a:ext cx="2377440" cy="64008"/>
+          </a:xfrm>
+          <a:prstGeom prst="rect">
+            <a:avLst/>
+          </a:prstGeom>
+          <a:solidFill>
+            <a:srgbClr val="06B6D4"/>
+          </a:solidFill>
+          <a:ln/>
+        </p:spPr>
+      </p:sp>
+      <p:sp>
+        <p:nvSpPr>
+          <p:cNvPr id="9" name="Text 7"/>
+          <p:cNvSpPr/>
+          <p:nvPr/>
+        </p:nvSpPr>
+        <p:spPr>
+          <a:xfrm>
+            <a:off x="822960" y="2651760"/>
+            <a:ext cx="10424160" cy="2011680"/>
+          </a:xfrm>
+          <a:prstGeom prst="rect">
+            <a:avLst/>
+          </a:prstGeom>
+          <a:noFill/>
+          <a:ln/>
+        </p:spPr>
+        <p:txBody>
+          <a:bodyPr wrap="square" rtlCol="0" anchor="t"/>
+          <a:lstStyle/>
+          <a:p>
+            <a:pPr marL="254000" indent="-254000">
+              <a:spcAft>
+                <a:spcPts val="1200"/>
+              </a:spcAft>
+              <a:buSzPct val="100000"/>
+              <a:buChar char="•"/>
+            </a:pPr>
+            <a:r>
+              <a:rPr lang="en-US" sz="2300" dirty="0">
+                <a:solidFill>
+                  <a:srgbClr val="FFFFFF"/>
+                </a:solidFill>
+                <a:latin typeface="Segoe UI" pitchFamily="34" charset="0"/>
+                <a:ea typeface="Segoe UI" pitchFamily="34" charset="-122"/>
+                <a:cs typeface="Segoe UI" pitchFamily="34" charset="-120"/>
+              </a:rPr>
+              <a:t>We thank our supervisor, Dr. Hadi Jerdek, for his guidance throughout the project.</a:t>
+            </a:r>
+            <a:endParaRPr lang="en-US" sz="2300" dirty="0"/>
+          </a:p>
+          <a:p>
+            <a:pPr marL="254000" indent="-254000">
+              <a:spcAft>
+                <a:spcPts val="1200"/>
+              </a:spcAft>
+              <a:buSzPct val="100000"/>
+              <a:buChar char="•"/>
+            </a:pPr>
+            <a:r>
+              <a:rPr lang="en-US" sz="2300" dirty="0">
+                <a:solidFill>
+                  <a:srgbClr val="FFFFFF"/>
+                </a:solidFill>
+                <a:latin typeface="Segoe UI" pitchFamily="34" charset="0"/>
+                <a:ea typeface="Segoe UI" pitchFamily="34" charset="-122"/>
+                <a:cs typeface="Segoe UI" pitchFamily="34" charset="-120"/>
+              </a:rPr>
+              <a:t>We thank the Lebanese University, Faculty of Engineering, for its support and resources.</a:t>
+            </a:r>
+            <a:endParaRPr lang="en-US" sz="2300" dirty="0"/>
+          </a:p>
+        </p:txBody>
+      </p:sp>
+      <p:sp>
+        <p:nvSpPr>
+          <p:cNvPr id="10" name="Text 8"/>
+          <p:cNvSpPr/>
+          <p:nvPr/>
+        </p:nvSpPr>
+        <p:spPr>
+          <a:xfrm>
+            <a:off x="822960" y="5029200"/>
+            <a:ext cx="10515600" cy="731520"/>
+          </a:xfrm>
+          <a:prstGeom prst="rect">
+            <a:avLst/>
+          </a:prstGeom>
+          <a:noFill/>
+          <a:ln/>
+        </p:spPr>
+        <p:txBody>
+          <a:bodyPr wrap="square" rtlCol="0" anchor="ctr"/>
+          <a:lstStyle/>
+          <a:p>
+            <a:pPr indent="0" marL="0">
+              <a:buNone/>
+            </a:pPr>
+            <a:r>
+              <a:rPr lang="en-US" sz="3000" b="1" dirty="0">
+                <a:solidFill>
+                  <a:srgbClr val="06B6D4"/>
+                </a:solidFill>
+                <a:latin typeface="Segoe UI" pitchFamily="34" charset="0"/>
+                <a:ea typeface="Segoe UI" pitchFamily="34" charset="-122"/>
+                <a:cs typeface="Segoe UI" pitchFamily="34" charset="-120"/>
+              </a:rPr>
+              <a:t>Thank you  ·  Questions?</a:t>
+            </a:r>
+            <a:endParaRPr lang="en-US" sz="3000" dirty="0"/>
+          </a:p>
+        </p:txBody>
+      </p:sp>
     </p:spTree>
   </p:cSld>
   <p:clrMapOvr>
@@ -5236,7 +6210,7 @@
               <a:buNone/>
             </a:pPr>
             <a:r>
-              <a:rPr lang="en-US" sz="2400" b="1" dirty="0">
+              <a:rPr lang="en-US" sz="2600" b="1" dirty="0">
                 <a:solidFill>
                   <a:srgbClr val="FFFFFF"/>
                 </a:solidFill>
@@ -5244,9 +6218,9 @@
                 <a:ea typeface="Segoe UI" pitchFamily="34" charset="-122"/>
                 <a:cs typeface="Segoe UI" pitchFamily="34" charset="-120"/>
               </a:rPr>
-              <a:t>Why FELCOM?</a:t>
-            </a:r>
-            <a:endParaRPr lang="en-US" sz="2400" dirty="0"/>
+              <a:t>Outline</a:t>
+            </a:r>
+            <a:endParaRPr lang="en-US" sz="2600" dirty="0"/>
           </a:p>
         </p:txBody>
       </p:sp>
@@ -5258,8 +6232,8 @@
         </p:nvSpPr>
         <p:spPr>
           <a:xfrm>
-            <a:off x="594360" y="1463040"/>
-            <a:ext cx="10972800" cy="4572000"/>
+            <a:off x="1005840" y="1737360"/>
+            <a:ext cx="5120640" cy="4389120"/>
           </a:xfrm>
           <a:prstGeom prst="rect">
             <a:avLst/>
@@ -5271,15 +6245,28 @@
           <a:bodyPr wrap="square" rtlCol="0" anchor="t"/>
           <a:lstStyle/>
           <a:p>
-            <a:pPr marL="203200" indent="-203200">
+            <a:pPr indent="0" marL="0">
+              <a:buNone/>
+            </a:pPr>
+            <a:r>
+              <a:rPr lang="en-US" sz="2300" b="1" dirty="0">
+                <a:solidFill>
+                  <a:srgbClr val="EC4899"/>
+                </a:solidFill>
+                <a:latin typeface="Segoe UI" pitchFamily="34" charset="0"/>
+                <a:ea typeface="Segoe UI" pitchFamily="34" charset="-122"/>
+                <a:cs typeface="Segoe UI" pitchFamily="34" charset="-120"/>
+              </a:rPr>
+              <a:t>1  </a:t>
+            </a:r>
+            <a:pPr indent="0" marL="0">
               <a:spcAft>
-                <a:spcPts val="900"/>
+                <a:spcPts val="1800"/>
               </a:spcAft>
-              <a:buSzPct val="100000"/>
-              <a:buChar char="•"/>
-            </a:pPr>
-            <a:r>
-              <a:rPr lang="en-US" sz="1650" dirty="0">
+              <a:buNone/>
+            </a:pPr>
+            <a:r>
+              <a:rPr lang="en-US" sz="2300" dirty="0">
                 <a:solidFill>
                   <a:srgbClr val="2A2A33"/>
                 </a:solidFill>
@@ -5287,20 +6274,33 @@
                 <a:ea typeface="Segoe UI" pitchFamily="34" charset="-122"/>
                 <a:cs typeface="Segoe UI" pitchFamily="34" charset="-120"/>
               </a:rPr>
-              <a:t>Everyday communication relies on fixed infrastructure (towers, base stations, the internet), which is a single point of failure.</a:t>
-            </a:r>
-            <a:endParaRPr lang="en-US" sz="1650" dirty="0"/>
-          </a:p>
-          <a:p>
-            <a:pPr marL="203200" indent="-203200">
+              <a:t>Motivation &amp; goals</a:t>
+            </a:r>
+            <a:endParaRPr lang="en-US" sz="2300" dirty="0"/>
+          </a:p>
+          <a:p>
+            <a:pPr indent="0" marL="0">
+              <a:buNone/>
+            </a:pPr>
+            <a:r>
+              <a:rPr lang="en-US" sz="2300" b="1" dirty="0">
+                <a:solidFill>
+                  <a:srgbClr val="F59E0B"/>
+                </a:solidFill>
+                <a:latin typeface="Segoe UI" pitchFamily="34" charset="0"/>
+                <a:ea typeface="Segoe UI" pitchFamily="34" charset="-122"/>
+                <a:cs typeface="Segoe UI" pitchFamily="34" charset="-120"/>
+              </a:rPr>
+              <a:t>2  </a:t>
+            </a:r>
+            <a:pPr indent="0" marL="0">
               <a:spcAft>
-                <a:spcPts val="900"/>
+                <a:spcPts val="1800"/>
               </a:spcAft>
-              <a:buSzPct val="100000"/>
-              <a:buChar char="•"/>
-            </a:pPr>
-            <a:r>
-              <a:rPr lang="en-US" sz="1650" dirty="0">
+              <a:buNone/>
+            </a:pPr>
+            <a:r>
+              <a:rPr lang="en-US" sz="2300" dirty="0">
                 <a:solidFill>
                   <a:srgbClr val="2A2A33"/>
                 </a:solidFill>
@@ -5308,20 +6308,33 @@
                 <a:ea typeface="Segoe UI" pitchFamily="34" charset="-122"/>
                 <a:cs typeface="Segoe UI" pitchFamily="34" charset="-120"/>
               </a:rPr>
-              <a:t>Off-grid need: a direct radio link between two people that depends on no third party.</a:t>
-            </a:r>
-            <a:endParaRPr lang="en-US" sz="1650" dirty="0"/>
-          </a:p>
-          <a:p>
-            <a:pPr marL="203200" indent="-203200">
+              <a:t>System overview</a:t>
+            </a:r>
+            <a:endParaRPr lang="en-US" sz="2300" dirty="0"/>
+          </a:p>
+          <a:p>
+            <a:pPr indent="0" marL="0">
+              <a:buNone/>
+            </a:pPr>
+            <a:r>
+              <a:rPr lang="en-US" sz="2300" b="1" dirty="0">
+                <a:solidFill>
+                  <a:srgbClr val="7C3AED"/>
+                </a:solidFill>
+                <a:latin typeface="Segoe UI" pitchFamily="34" charset="0"/>
+                <a:ea typeface="Segoe UI" pitchFamily="34" charset="-122"/>
+                <a:cs typeface="Segoe UI" pitchFamily="34" charset="-120"/>
+              </a:rPr>
+              <a:t>3  </a:t>
+            </a:r>
+            <a:pPr indent="0" marL="0">
               <a:spcAft>
-                <a:spcPts val="900"/>
+                <a:spcPts val="1800"/>
               </a:spcAft>
-              <a:buSzPct val="100000"/>
-              <a:buChar char="•"/>
-            </a:pPr>
-            <a:r>
-              <a:rPr lang="en-US" sz="1650" dirty="0">
+              <a:buNone/>
+            </a:pPr>
+            <a:r>
+              <a:rPr lang="en-US" sz="2300" dirty="0">
                 <a:solidFill>
                   <a:srgbClr val="2A2A33"/>
                 </a:solidFill>
@@ -5329,20 +6342,33 @@
                 <a:ea typeface="Segoe UI" pitchFamily="34" charset="-122"/>
                 <a:cs typeface="Segoe UI" pitchFamily="34" charset="-120"/>
               </a:rPr>
-              <a:t>But a fixed-frequency radio is easy to locate, intercept, and jam: one interferer on the right frequency silences it.</a:t>
-            </a:r>
-            <a:endParaRPr lang="en-US" sz="1650" dirty="0"/>
-          </a:p>
-          <a:p>
-            <a:pPr marL="203200" indent="-203200">
+              <a:t>Frequency hopping &amp; sync</a:t>
+            </a:r>
+            <a:endParaRPr lang="en-US" sz="2300" dirty="0"/>
+          </a:p>
+          <a:p>
+            <a:pPr indent="0" marL="0">
+              <a:buNone/>
+            </a:pPr>
+            <a:r>
+              <a:rPr lang="en-US" sz="2300" b="1" dirty="0">
+                <a:solidFill>
+                  <a:srgbClr val="06B6D4"/>
+                </a:solidFill>
+                <a:latin typeface="Segoe UI" pitchFamily="34" charset="0"/>
+                <a:ea typeface="Segoe UI" pitchFamily="34" charset="-122"/>
+                <a:cs typeface="Segoe UI" pitchFamily="34" charset="-120"/>
+              </a:rPr>
+              <a:t>4  </a:t>
+            </a:r>
+            <a:pPr indent="0" marL="0">
               <a:spcAft>
-                <a:spcPts val="900"/>
+                <a:spcPts val="1800"/>
               </a:spcAft>
-              <a:buSzPct val="100000"/>
-              <a:buChar char="•"/>
-            </a:pPr>
-            <a:r>
-              <a:rPr lang="en-US" sz="1650" dirty="0">
+              <a:buNone/>
+            </a:pPr>
+            <a:r>
+              <a:rPr lang="en-US" sz="2300" dirty="0">
                 <a:solidFill>
                   <a:srgbClr val="2A2A33"/>
                 </a:solidFill>
@@ -5350,15 +6376,173 @@
                 <a:ea typeface="Segoe UI" pitchFamily="34" charset="-122"/>
                 <a:cs typeface="Segoe UI" pitchFamily="34" charset="-120"/>
               </a:rPr>
-              <a:t>The classic answer is spread spectrum: constantly change the carrier frequency so no single interferer can follow.</a:t>
-            </a:r>
-            <a:endParaRPr lang="en-US" sz="1650" dirty="0"/>
-          </a:p>
-        </p:txBody>
-      </p:sp>
-      <p:sp>
-        <p:nvSpPr>
-          <p:cNvPr id="7" name="Shape 5"/>
+              <a:t>Packet protocol</a:t>
+            </a:r>
+            <a:endParaRPr lang="en-US" sz="2300" dirty="0"/>
+          </a:p>
+        </p:txBody>
+      </p:sp>
+      <p:sp>
+        <p:nvSpPr>
+          <p:cNvPr id="7" name="Text 5"/>
+          <p:cNvSpPr/>
+          <p:nvPr/>
+        </p:nvSpPr>
+        <p:spPr>
+          <a:xfrm>
+            <a:off x="6492240" y="1737360"/>
+            <a:ext cx="5120640" cy="4389120"/>
+          </a:xfrm>
+          <a:prstGeom prst="rect">
+            <a:avLst/>
+          </a:prstGeom>
+          <a:noFill/>
+          <a:ln/>
+        </p:spPr>
+        <p:txBody>
+          <a:bodyPr wrap="square" rtlCol="0" anchor="t"/>
+          <a:lstStyle/>
+          <a:p>
+            <a:pPr indent="0" marL="0">
+              <a:buNone/>
+            </a:pPr>
+            <a:r>
+              <a:rPr lang="en-US" sz="2300" b="1" dirty="0">
+                <a:solidFill>
+                  <a:srgbClr val="EC4899"/>
+                </a:solidFill>
+                <a:latin typeface="Segoe UI" pitchFamily="34" charset="0"/>
+                <a:ea typeface="Segoe UI" pitchFamily="34" charset="-122"/>
+                <a:cs typeface="Segoe UI" pitchFamily="34" charset="-120"/>
+              </a:rPr>
+              <a:t>5  </a:t>
+            </a:r>
+            <a:pPr indent="0" marL="0">
+              <a:spcAft>
+                <a:spcPts val="1800"/>
+              </a:spcAft>
+              <a:buNone/>
+            </a:pPr>
+            <a:r>
+              <a:rPr lang="en-US" sz="2300" dirty="0">
+                <a:solidFill>
+                  <a:srgbClr val="2A2A33"/>
+                </a:solidFill>
+                <a:latin typeface="Segoe UI" pitchFamily="34" charset="0"/>
+                <a:ea typeface="Segoe UI" pitchFamily="34" charset="-122"/>
+                <a:cs typeface="Segoe UI" pitchFamily="34" charset="-120"/>
+              </a:rPr>
+              <a:t>Forward error correction</a:t>
+            </a:r>
+            <a:endParaRPr lang="en-US" sz="2300" dirty="0"/>
+          </a:p>
+          <a:p>
+            <a:pPr indent="0" marL="0">
+              <a:buNone/>
+            </a:pPr>
+            <a:r>
+              <a:rPr lang="en-US" sz="2300" b="1" dirty="0">
+                <a:solidFill>
+                  <a:srgbClr val="F59E0B"/>
+                </a:solidFill>
+                <a:latin typeface="Segoe UI" pitchFamily="34" charset="0"/>
+                <a:ea typeface="Segoe UI" pitchFamily="34" charset="-122"/>
+                <a:cs typeface="Segoe UI" pitchFamily="34" charset="-120"/>
+              </a:rPr>
+              <a:t>6  </a:t>
+            </a:r>
+            <a:pPr indent="0" marL="0">
+              <a:spcAft>
+                <a:spcPts val="1800"/>
+              </a:spcAft>
+              <a:buNone/>
+            </a:pPr>
+            <a:r>
+              <a:rPr lang="en-US" sz="2300" dirty="0">
+                <a:solidFill>
+                  <a:srgbClr val="2A2A33"/>
+                </a:solidFill>
+                <a:latin typeface="Segoe UI" pitchFamily="34" charset="0"/>
+                <a:ea typeface="Segoe UI" pitchFamily="34" charset="-122"/>
+                <a:cs typeface="Segoe UI" pitchFamily="34" charset="-120"/>
+              </a:rPr>
+              <a:t>Real-time audio</a:t>
+            </a:r>
+            <a:endParaRPr lang="en-US" sz="2300" dirty="0"/>
+          </a:p>
+          <a:p>
+            <a:pPr indent="0" marL="0">
+              <a:buNone/>
+            </a:pPr>
+            <a:r>
+              <a:rPr lang="en-US" sz="2300" b="1" dirty="0">
+                <a:solidFill>
+                  <a:srgbClr val="7C3AED"/>
+                </a:solidFill>
+                <a:latin typeface="Segoe UI" pitchFamily="34" charset="0"/>
+                <a:ea typeface="Segoe UI" pitchFamily="34" charset="-122"/>
+                <a:cs typeface="Segoe UI" pitchFamily="34" charset="-120"/>
+              </a:rPr>
+              <a:t>7  </a:t>
+            </a:r>
+            <a:pPr indent="0" marL="0">
+              <a:spcAft>
+                <a:spcPts val="1800"/>
+              </a:spcAft>
+              <a:buNone/>
+            </a:pPr>
+            <a:r>
+              <a:rPr lang="en-US" sz="2300" dirty="0">
+                <a:solidFill>
+                  <a:srgbClr val="2A2A33"/>
+                </a:solidFill>
+                <a:latin typeface="Segoe UI" pitchFamily="34" charset="0"/>
+                <a:ea typeface="Segoe UI" pitchFamily="34" charset="-122"/>
+                <a:cs typeface="Segoe UI" pitchFamily="34" charset="-120"/>
+              </a:rPr>
+              <a:t>Security &amp; applications</a:t>
+            </a:r>
+            <a:endParaRPr lang="en-US" sz="2300" dirty="0"/>
+          </a:p>
+          <a:p>
+            <a:pPr indent="0" marL="0">
+              <a:buNone/>
+            </a:pPr>
+            <a:r>
+              <a:rPr lang="en-US" sz="2300" b="1" dirty="0">
+                <a:solidFill>
+                  <a:srgbClr val="06B6D4"/>
+                </a:solidFill>
+                <a:latin typeface="Segoe UI" pitchFamily="34" charset="0"/>
+                <a:ea typeface="Segoe UI" pitchFamily="34" charset="-122"/>
+                <a:cs typeface="Segoe UI" pitchFamily="34" charset="-120"/>
+              </a:rPr>
+              <a:t>8  </a:t>
+            </a:r>
+            <a:pPr indent="0" marL="0">
+              <a:spcAft>
+                <a:spcPts val="1800"/>
+              </a:spcAft>
+              <a:buNone/>
+            </a:pPr>
+            <a:r>
+              <a:rPr lang="en-US" sz="2300" dirty="0">
+                <a:solidFill>
+                  <a:srgbClr val="2A2A33"/>
+                </a:solidFill>
+                <a:latin typeface="Segoe UI" pitchFamily="34" charset="0"/>
+                <a:ea typeface="Segoe UI" pitchFamily="34" charset="-122"/>
+                <a:cs typeface="Segoe UI" pitchFamily="34" charset="-120"/>
+              </a:rPr>
+              <a:t>Results &amp; conclusion</a:t>
+            </a:r>
+            <a:endParaRPr lang="en-US" sz="2300" dirty="0"/>
+          </a:p>
+        </p:txBody>
+      </p:sp>
+      <p:sp>
+        <p:nvSpPr>
+          <p:cNvPr id="8" name="Shape 6"/>
           <p:cNvSpPr/>
           <p:nvPr/>
         </p:nvSpPr>
@@ -5378,7 +6562,7 @@
       </p:sp>
       <p:sp>
         <p:nvSpPr>
-          <p:cNvPr id="8" name="Text 6"/>
+          <p:cNvPr id="9" name="Text 7"/>
           <p:cNvSpPr/>
           <p:nvPr/>
         </p:nvSpPr>
@@ -5417,7 +6601,7 @@
       </p:sp>
       <p:sp>
         <p:nvSpPr>
-          <p:cNvPr id="9" name="Text 7"/>
+          <p:cNvPr id="10" name="Text 8"/>
           <p:cNvSpPr/>
           <p:nvPr/>
         </p:nvSpPr>
@@ -5571,7 +6755,7 @@
               <a:buNone/>
             </a:pPr>
             <a:r>
-              <a:rPr lang="en-US" sz="2400" b="1" dirty="0">
+              <a:rPr lang="en-US" sz="2600" b="1" dirty="0">
                 <a:solidFill>
                   <a:srgbClr val="FFFFFF"/>
                 </a:solidFill>
@@ -5579,9 +6763,9 @@
                 <a:ea typeface="Segoe UI" pitchFamily="34" charset="-122"/>
                 <a:cs typeface="Segoe UI" pitchFamily="34" charset="-120"/>
               </a:rPr>
-              <a:t>What We Built</a:t>
-            </a:r>
-            <a:endParaRPr lang="en-US" sz="2400" dirty="0"/>
+              <a:t>Why FELCOM?</a:t>
+            </a:r>
+            <a:endParaRPr lang="en-US" sz="2600" dirty="0"/>
           </a:p>
         </p:txBody>
       </p:sp>
@@ -5593,8 +6777,8 @@
         </p:nvSpPr>
         <p:spPr>
           <a:xfrm>
-            <a:off x="594360" y="1371600"/>
-            <a:ext cx="10972800" cy="2103120"/>
+            <a:off x="640080" y="1554480"/>
+            <a:ext cx="10881360" cy="4572000"/>
           </a:xfrm>
           <a:prstGeom prst="rect">
             <a:avLst/>
@@ -5606,15 +6790,15 @@
           <a:bodyPr wrap="square" rtlCol="0" anchor="t"/>
           <a:lstStyle/>
           <a:p>
-            <a:pPr marL="203200" indent="-203200">
+            <a:pPr marL="254000" indent="-254000">
               <a:spcAft>
-                <a:spcPts val="900"/>
+                <a:spcPts val="1200"/>
               </a:spcAft>
               <a:buSzPct val="100000"/>
               <a:buChar char="•"/>
             </a:pPr>
             <a:r>
-              <a:rPr lang="en-US" sz="1650" dirty="0">
+              <a:rPr lang="en-US" sz="2200" dirty="0">
                 <a:solidFill>
                   <a:srgbClr val="2A2A33"/>
                 </a:solidFill>
@@ -5622,20 +6806,20 @@
                 <a:ea typeface="Segoe UI" pitchFamily="34" charset="-122"/>
                 <a:cs typeface="Segoe UI" pitchFamily="34" charset="-120"/>
               </a:rPr>
-              <a:t>Two handheld units exchanging text and live voice directly over 2.4 GHz, with no infrastructure.</a:t>
-            </a:r>
-            <a:endParaRPr lang="en-US" sz="1650" dirty="0"/>
-          </a:p>
-          <a:p>
-            <a:pPr marL="203200" indent="-203200">
+              <a:t>Networks rely on fixed infrastructure: a single point of failure.</a:t>
+            </a:r>
+            <a:endParaRPr lang="en-US" sz="2200" dirty="0"/>
+          </a:p>
+          <a:p>
+            <a:pPr marL="254000" indent="-254000">
               <a:spcAft>
-                <a:spcPts val="900"/>
+                <a:spcPts val="1200"/>
               </a:spcAft>
               <a:buSzPct val="100000"/>
               <a:buChar char="•"/>
             </a:pPr>
             <a:r>
-              <a:rPr lang="en-US" sz="1650" dirty="0">
+              <a:rPr lang="en-US" sz="2200" dirty="0">
                 <a:solidFill>
                   <a:srgbClr val="2A2A33"/>
                 </a:solidFill>
@@ -5643,20 +6827,20 @@
                 <a:ea typeface="Segoe UI" pitchFamily="34" charset="-122"/>
                 <a:cs typeface="Segoe UI" pitchFamily="34" charset="-120"/>
               </a:rPr>
-              <a:t>Software Frequency-Hopping Spread Spectrum (FHSS) for jam and detection resistance.</a:t>
-            </a:r>
-            <a:endParaRPr lang="en-US" sz="1650" dirty="0"/>
-          </a:p>
-          <a:p>
-            <a:pPr marL="203200" indent="-203200">
+              <a:t>Off-grid need: a direct link, no third party.</a:t>
+            </a:r>
+            <a:endParaRPr lang="en-US" sz="2200" dirty="0"/>
+          </a:p>
+          <a:p>
+            <a:pPr marL="254000" indent="-254000">
               <a:spcAft>
-                <a:spcPts val="900"/>
+                <a:spcPts val="1200"/>
               </a:spcAft>
               <a:buSzPct val="100000"/>
               <a:buChar char="•"/>
             </a:pPr>
             <a:r>
-              <a:rPr lang="en-US" sz="1650" dirty="0">
+              <a:rPr lang="en-US" sz="2200" dirty="0">
                 <a:solidFill>
                   <a:srgbClr val="2A2A33"/>
                 </a:solidFill>
@@ -5664,20 +6848,20 @@
                 <a:ea typeface="Segoe UI" pitchFamily="34" charset="-122"/>
                 <a:cs typeface="Segoe UI" pitchFamily="34" charset="-120"/>
               </a:rPr>
-              <a:t>A custom 32-byte packet protocol with Forward Error Correction.</a:t>
-            </a:r>
-            <a:endParaRPr lang="en-US" sz="1650" dirty="0"/>
-          </a:p>
-          <a:p>
-            <a:pPr marL="203200" indent="-203200">
+              <a:t>A fixed-frequency radio is easy to jam and intercept.</a:t>
+            </a:r>
+            <a:endParaRPr lang="en-US" sz="2200" dirty="0"/>
+          </a:p>
+          <a:p>
+            <a:pPr marL="254000" indent="-254000">
               <a:spcAft>
-                <a:spcPts val="900"/>
+                <a:spcPts val="1200"/>
               </a:spcAft>
               <a:buSzPct val="100000"/>
               <a:buChar char="•"/>
             </a:pPr>
             <a:r>
-              <a:rPr lang="en-US" sz="1650" dirty="0">
+              <a:rPr lang="en-US" sz="2200" dirty="0">
                 <a:solidFill>
                   <a:srgbClr val="2A2A33"/>
                 </a:solidFill>
@@ -5685,65 +6869,15 @@
                 <a:ea typeface="Segoe UI" pitchFamily="34" charset="-122"/>
                 <a:cs typeface="Segoe UI" pitchFamily="34" charset="-120"/>
               </a:rPr>
-              <a:t>Lightweight text encryption, a built-in bit-error-rate test, and a real-time Pong demo.</a:t>
-            </a:r>
-            <a:endParaRPr lang="en-US" sz="1650" dirty="0"/>
+              <a:t>Answer: spread spectrum, constantly change the frequency.</a:t>
+            </a:r>
+            <a:endParaRPr lang="en-US" sz="2200" dirty="0"/>
           </a:p>
         </p:txBody>
       </p:sp>
       <p:sp>
         <p:nvSpPr>
           <p:cNvPr id="7" name="Shape 5"/>
-          <p:cNvSpPr/>
-          <p:nvPr/>
-        </p:nvSpPr>
-        <p:spPr>
-          <a:xfrm>
-            <a:off x="1280160" y="3474720"/>
-            <a:ext cx="9601200" cy="2743200"/>
-          </a:xfrm>
-          <a:prstGeom prst="roundRect">
-            <a:avLst>
-              <a:gd name="adj" fmla="val 2667"/>
-            </a:avLst>
-          </a:prstGeom>
-          <a:solidFill>
-            <a:srgbClr val="F4F2FF"/>
-          </a:solidFill>
-          <a:ln w="12700">
-            <a:solidFill>
-              <a:srgbClr val="D7D3F0"/>
-            </a:solidFill>
-            <a:prstDash val="solid"/>
-          </a:ln>
-        </p:spPr>
-      </p:sp>
-      <p:pic>
-        <p:nvPicPr>
-          <p:cNvPr id="8" name="Image 0" descr="C:/Users/h/AppData/Local/Temp/claude/c--Users-h-Desktop-Mini-project-Fec-Mini-Project/4af49bb4-fc29-49ed-b315-f05a2bedcaee/scratchpad/pptxbuild/assets/context.png">    </p:cNvPr>
-          <p:cNvPicPr>
-            <a:picLocks noChangeAspect="1"/>
-          </p:cNvPicPr>
-          <p:nvPr/>
-        </p:nvPicPr>
-        <p:blipFill>
-          <a:blip r:embed="rId1"/>
-          <a:srcRect l="0" r="0" t="0" b="0"/>
-          <a:stretch/>
-        </p:blipFill>
-        <p:spPr>
-          <a:xfrm>
-            <a:off x="1444752" y="3639312"/>
-            <a:ext cx="9272016" cy="2414016"/>
-          </a:xfrm>
-          <a:prstGeom prst="rect">
-            <a:avLst/>
-          </a:prstGeom>
-        </p:spPr>
-      </p:pic>
-      <p:sp>
-        <p:nvSpPr>
-          <p:cNvPr id="9" name="Shape 6"/>
           <p:cNvSpPr/>
           <p:nvPr/>
         </p:nvSpPr>
@@ -5763,7 +6897,7 @@
       </p:sp>
       <p:sp>
         <p:nvSpPr>
-          <p:cNvPr id="10" name="Text 7"/>
+          <p:cNvPr id="8" name="Text 6"/>
           <p:cNvSpPr/>
           <p:nvPr/>
         </p:nvSpPr>
@@ -5802,7 +6936,7 @@
       </p:sp>
       <p:sp>
         <p:nvSpPr>
-          <p:cNvPr id="11" name="Text 8"/>
+          <p:cNvPr id="9" name="Text 7"/>
           <p:cNvSpPr/>
           <p:nvPr/>
         </p:nvSpPr>
@@ -5956,7 +7090,7 @@
               <a:buNone/>
             </a:pPr>
             <a:r>
-              <a:rPr lang="en-US" sz="2400" b="1" dirty="0">
+              <a:rPr lang="en-US" sz="2600" b="1" dirty="0">
                 <a:solidFill>
                   <a:srgbClr val="FFFFFF"/>
                 </a:solidFill>
@@ -5964,9 +7098,9 @@
                 <a:ea typeface="Segoe UI" pitchFamily="34" charset="-122"/>
                 <a:cs typeface="Segoe UI" pitchFamily="34" charset="-120"/>
               </a:rPr>
-              <a:t>System Overview</a:t>
-            </a:r>
-            <a:endParaRPr lang="en-US" sz="2400" dirty="0"/>
+              <a:t>What We Built</a:t>
+            </a:r>
+            <a:endParaRPr lang="en-US" sz="2600" dirty="0"/>
           </a:p>
         </p:txBody>
       </p:sp>
@@ -5978,8 +7112,8 @@
         </p:nvSpPr>
         <p:spPr>
           <a:xfrm>
-            <a:off x="594360" y="1463040"/>
-            <a:ext cx="5852160" cy="4572000"/>
+            <a:off x="594360" y="1371600"/>
+            <a:ext cx="10972800" cy="2194560"/>
           </a:xfrm>
           <a:prstGeom prst="rect">
             <a:avLst/>
@@ -5991,15 +7125,15 @@
           <a:bodyPr wrap="square" rtlCol="0" anchor="t"/>
           <a:lstStyle/>
           <a:p>
-            <a:pPr marL="203200" indent="-203200">
+            <a:pPr marL="254000" indent="-254000">
               <a:spcAft>
-                <a:spcPts val="900"/>
+                <a:spcPts val="1200"/>
               </a:spcAft>
               <a:buSzPct val="100000"/>
               <a:buChar char="•"/>
             </a:pPr>
             <a:r>
-              <a:rPr lang="en-US" sz="1650" dirty="0">
+              <a:rPr lang="en-US" sz="2200" dirty="0">
                 <a:solidFill>
                   <a:srgbClr val="2A2A33"/>
                 </a:solidFill>
@@ -6007,20 +7141,20 @@
                 <a:ea typeface="Segoe UI" pitchFamily="34" charset="-122"/>
                 <a:cs typeface="Segoe UI" pitchFamily="34" charset="-120"/>
               </a:rPr>
-              <a:t>Core: an ESP32 microcontroller driving an nRF24L01+ 2.4 GHz GFSK radio over SPI.</a:t>
-            </a:r>
-            <a:endParaRPr lang="en-US" sz="1650" dirty="0"/>
-          </a:p>
-          <a:p>
-            <a:pPr marL="203200" indent="-203200">
+              <a:t>Text + live voice over 2.4 GHz, no infrastructure.</a:t>
+            </a:r>
+            <a:endParaRPr lang="en-US" sz="2200" dirty="0"/>
+          </a:p>
+          <a:p>
+            <a:pPr marL="254000" indent="-254000">
               <a:spcAft>
-                <a:spcPts val="900"/>
+                <a:spcPts val="1200"/>
               </a:spcAft>
               <a:buSzPct val="100000"/>
               <a:buChar char="•"/>
             </a:pPr>
             <a:r>
-              <a:rPr lang="en-US" sz="1650" dirty="0">
+              <a:rPr lang="en-US" sz="2200" dirty="0">
                 <a:solidFill>
                   <a:srgbClr val="2A2A33"/>
                 </a:solidFill>
@@ -6028,20 +7162,20 @@
                 <a:ea typeface="Segoe UI" pitchFamily="34" charset="-122"/>
                 <a:cs typeface="Segoe UI" pitchFamily="34" charset="-120"/>
               </a:rPr>
-              <a:t>Voice in: INMP441 I2S microphone. Voice out: DAC, LM386 amplifier, speaker.</a:t>
-            </a:r>
-            <a:endParaRPr lang="en-US" sz="1650" dirty="0"/>
-          </a:p>
-          <a:p>
-            <a:pPr marL="203200" indent="-203200">
+              <a:t>Software FHSS: jam and detection resistance.</a:t>
+            </a:r>
+            <a:endParaRPr lang="en-US" sz="2200" dirty="0"/>
+          </a:p>
+          <a:p>
+            <a:pPr marL="254000" indent="-254000">
               <a:spcAft>
-                <a:spcPts val="900"/>
+                <a:spcPts val="1200"/>
               </a:spcAft>
               <a:buSzPct val="100000"/>
               <a:buChar char="•"/>
             </a:pPr>
             <a:r>
-              <a:rPr lang="en-US" sz="1650" dirty="0">
+              <a:rPr lang="en-US" sz="2200" dirty="0">
                 <a:solidFill>
                   <a:srgbClr val="2A2A33"/>
                 </a:solidFill>
@@ -6049,20 +7183,20 @@
                 <a:ea typeface="Segoe UI" pitchFamily="34" charset="-122"/>
                 <a:cs typeface="Segoe UI" pitchFamily="34" charset="-120"/>
               </a:rPr>
-              <a:t>OLED display and tactile buttons, all integrated on a custom PCB.</a:t>
-            </a:r>
-            <a:endParaRPr lang="en-US" sz="1650" dirty="0"/>
-          </a:p>
-          <a:p>
-            <a:pPr marL="203200" indent="-203200">
+              <a:t>Custom 32-byte packet protocol with FEC.</a:t>
+            </a:r>
+            <a:endParaRPr lang="en-US" sz="2200" dirty="0"/>
+          </a:p>
+          <a:p>
+            <a:pPr marL="254000" indent="-254000">
               <a:spcAft>
-                <a:spcPts val="900"/>
+                <a:spcPts val="1200"/>
               </a:spcAft>
               <a:buSzPct val="100000"/>
               <a:buChar char="•"/>
             </a:pPr>
             <a:r>
-              <a:rPr lang="en-US" sz="1650" dirty="0">
+              <a:rPr lang="en-US" sz="2200" dirty="0">
                 <a:solidFill>
                   <a:srgbClr val="2A2A33"/>
                 </a:solidFill>
@@ -6070,30 +7204,9 @@
                 <a:ea typeface="Segoe UI" pitchFamily="34" charset="-122"/>
                 <a:cs typeface="Segoe UI" pitchFamily="34" charset="-120"/>
               </a:rPr>
-              <a:t>Layered firmware: physical, transceiver (owns the radio and all FEC), applications.</a:t>
-            </a:r>
-            <a:endParaRPr lang="en-US" sz="1650" dirty="0"/>
-          </a:p>
-          <a:p>
-            <a:pPr marL="203200" indent="-203200">
-              <a:spcAft>
-                <a:spcPts val="900"/>
-              </a:spcAft>
-              <a:buSzPct val="100000"/>
-              <a:buChar char="•"/>
-            </a:pPr>
-            <a:r>
-              <a:rPr lang="en-US" sz="1650" dirty="0">
-                <a:solidFill>
-                  <a:srgbClr val="2A2A33"/>
-                </a:solidFill>
-                <a:latin typeface="Segoe UI" pitchFamily="34" charset="0"/>
-                <a:ea typeface="Segoe UI" pitchFamily="34" charset="-122"/>
-                <a:cs typeface="Segoe UI" pitchFamily="34" charset="-120"/>
-              </a:rPr>
-              <a:t>A cooperative, non-blocking main loop, so channel hopping never stalls.</a:t>
-            </a:r>
-            <a:endParaRPr lang="en-US" sz="1650" dirty="0"/>
+              <a:t>Text encryption, BER test, and a Pong demo.</a:t>
+            </a:r>
+            <a:endParaRPr lang="en-US" sz="2200" dirty="0"/>
           </a:p>
         </p:txBody>
       </p:sp>
@@ -6105,12 +7218,12 @@
         </p:nvSpPr>
         <p:spPr>
           <a:xfrm>
-            <a:off x="6675120" y="1371600"/>
-            <a:ext cx="5074920" cy="4709160"/>
+            <a:off x="1463040" y="3611880"/>
+            <a:ext cx="9235440" cy="2606040"/>
           </a:xfrm>
           <a:prstGeom prst="roundRect">
             <a:avLst>
-              <a:gd name="adj" fmla="val 1553"/>
+              <a:gd name="adj" fmla="val 2807"/>
             </a:avLst>
           </a:prstGeom>
           <a:solidFill>
@@ -6126,7 +7239,7 @@
       </p:sp>
       <p:pic>
         <p:nvPicPr>
-          <p:cNvPr id="8" name="Image 0" descr="C:/Users/h/AppData/Local/Temp/claude/c--Users-h-Desktop-Mini-project-Fec-Mini-Project/4af49bb4-fc29-49ed-b315-f05a2bedcaee/scratchpad/pptxbuild/assets/architecture.png">    </p:cNvPr>
+          <p:cNvPr id="8" name="Image 0" descr="C:/Users/h/AppData/Local/Temp/claude/c--Users-h-Desktop-Mini-project-Fec-Mini-Project/4af49bb4-fc29-49ed-b315-f05a2bedcaee/scratchpad/pptxbuild/assets/context.png">    </p:cNvPr>
           <p:cNvPicPr>
             <a:picLocks noChangeAspect="1"/>
           </p:cNvPicPr>
@@ -6139,8 +7252,8 @@
         </p:blipFill>
         <p:spPr>
           <a:xfrm>
-            <a:off x="6839712" y="1536192"/>
-            <a:ext cx="4745736" cy="4379976"/>
+            <a:off x="1609344" y="3758184"/>
+            <a:ext cx="8942832" cy="2313432"/>
           </a:xfrm>
           <a:prstGeom prst="rect">
             <a:avLst/>
@@ -6362,7 +7475,7 @@
               <a:buNone/>
             </a:pPr>
             <a:r>
-              <a:rPr lang="en-US" sz="2400" b="1" dirty="0">
+              <a:rPr lang="en-US" sz="2600" b="1" dirty="0">
                 <a:solidFill>
                   <a:srgbClr val="FFFFFF"/>
                 </a:solidFill>
@@ -6370,9 +7483,9 @@
                 <a:ea typeface="Segoe UI" pitchFamily="34" charset="-122"/>
                 <a:cs typeface="Segoe UI" pitchFamily="34" charset="-120"/>
               </a:rPr>
-              <a:t>Frequency-Hopping Spread Spectrum</a:t>
-            </a:r>
-            <a:endParaRPr lang="en-US" sz="2400" dirty="0"/>
+              <a:t>System Overview</a:t>
+            </a:r>
+            <a:endParaRPr lang="en-US" sz="2600" dirty="0"/>
           </a:p>
         </p:txBody>
       </p:sp>
@@ -6384,8 +7497,8 @@
         </p:nvSpPr>
         <p:spPr>
           <a:xfrm>
-            <a:off x="548640" y="1417320"/>
-            <a:ext cx="6812280" cy="4572000"/>
+            <a:off x="594360" y="1554480"/>
+            <a:ext cx="5760720" cy="4572000"/>
           </a:xfrm>
           <a:prstGeom prst="rect">
             <a:avLst/>
@@ -6397,15 +7510,15 @@
           <a:bodyPr wrap="square" rtlCol="0" anchor="t"/>
           <a:lstStyle/>
           <a:p>
-            <a:pPr marL="203200" indent="-203200">
+            <a:pPr marL="254000" indent="-254000">
               <a:spcAft>
-                <a:spcPts val="900"/>
+                <a:spcPts val="1200"/>
               </a:spcAft>
               <a:buSzPct val="100000"/>
               <a:buChar char="•"/>
             </a:pPr>
             <a:r>
-              <a:rPr lang="en-US" sz="1650" dirty="0">
+              <a:rPr lang="en-US" sz="2200" dirty="0">
                 <a:solidFill>
                   <a:srgbClr val="2A2A33"/>
                 </a:solidFill>
@@ -6413,20 +7526,20 @@
                 <a:ea typeface="Segoe UI" pitchFamily="34" charset="-122"/>
                 <a:cs typeface="Segoe UI" pitchFamily="34" charset="-120"/>
               </a:rPr>
-              <a:t>FHSS gives the link its jam and detection resistance; the nRF24L01+ handles modulation in hardware.</a:t>
-            </a:r>
-            <a:endParaRPr lang="en-US" sz="1550" dirty="0"/>
-          </a:p>
-          <a:p>
-            <a:pPr marL="203200" indent="-203200">
+              <a:t>ESP32 + nRF24L01+ 2.4 GHz radio (SPI).</a:t>
+            </a:r>
+            <a:endParaRPr lang="en-US" sz="2200" dirty="0"/>
+          </a:p>
+          <a:p>
+            <a:pPr marL="254000" indent="-254000">
               <a:spcAft>
-                <a:spcPts val="900"/>
+                <a:spcPts val="1200"/>
               </a:spcAft>
               <a:buSzPct val="100000"/>
               <a:buChar char="•"/>
             </a:pPr>
             <a:r>
-              <a:rPr lang="en-US" sz="1650" dirty="0">
+              <a:rPr lang="en-US" sz="2200" dirty="0">
                 <a:solidFill>
                   <a:srgbClr val="2A2A33"/>
                 </a:solidFill>
@@ -6434,20 +7547,20 @@
                 <a:ea typeface="Segoe UI" pitchFamily="34" charset="-122"/>
                 <a:cs typeface="Segoe UI" pitchFamily="34" charset="-120"/>
               </a:rPr>
-              <a:t>Six interference-free channels (110 to 115), chosen to sit above the Wi-Fi bands.</a:t>
-            </a:r>
-            <a:endParaRPr lang="en-US" sz="1550" dirty="0"/>
-          </a:p>
-          <a:p>
-            <a:pPr marL="203200" indent="-203200">
+              <a:t>INMP441 mic; DAC + LM386 + speaker.</a:t>
+            </a:r>
+            <a:endParaRPr lang="en-US" sz="2200" dirty="0"/>
+          </a:p>
+          <a:p>
+            <a:pPr marL="254000" indent="-254000">
               <a:spcAft>
-                <a:spcPts val="900"/>
+                <a:spcPts val="1200"/>
               </a:spcAft>
               <a:buSzPct val="100000"/>
               <a:buChar char="•"/>
             </a:pPr>
             <a:r>
-              <a:rPr lang="en-US" sz="1650" dirty="0">
+              <a:rPr lang="en-US" sz="2200" dirty="0">
                 <a:solidFill>
                   <a:srgbClr val="2A2A33"/>
                 </a:solidFill>
@@ -6455,20 +7568,20 @@
                 <a:ea typeface="Segoe UI" pitchFamily="34" charset="-122"/>
                 <a:cs typeface="Segoe UI" pitchFamily="34" charset="-120"/>
               </a:rPr>
-              <a:t>Both nodes hop together every 500 ms from a shared timer counter; a full sweep takes 3 s.</a:t>
-            </a:r>
-            <a:endParaRPr lang="en-US" sz="1550" dirty="0"/>
-          </a:p>
-          <a:p>
-            <a:pPr marL="203200" indent="-203200">
+              <a:t>OLED + buttons; custom PCB.</a:t>
+            </a:r>
+            <a:endParaRPr lang="en-US" sz="2200" dirty="0"/>
+          </a:p>
+          <a:p>
+            <a:pPr marL="254000" indent="-254000">
               <a:spcAft>
-                <a:spcPts val="900"/>
+                <a:spcPts val="1200"/>
               </a:spcAft>
               <a:buSzPct val="100000"/>
               <a:buChar char="•"/>
             </a:pPr>
             <a:r>
-              <a:rPr lang="en-US" sz="1650" dirty="0">
+              <a:rPr lang="en-US" sz="2200" dirty="0">
                 <a:solidFill>
                   <a:srgbClr val="2A2A33"/>
                 </a:solidFill>
@@ -6476,30 +7589,9 @@
                 <a:ea typeface="Segoe UI" pitchFamily="34" charset="-122"/>
                 <a:cs typeface="Segoe UI" pitchFamily="34" charset="-120"/>
               </a:rPr>
-              <a:t>A narrowband jammer can only spoil the few hops that land on its frequency.</a:t>
-            </a:r>
-            <a:endParaRPr lang="en-US" sz="1550" dirty="0"/>
-          </a:p>
-          <a:p>
-            <a:pPr marL="203200" indent="-203200">
-              <a:spcAft>
-                <a:spcPts val="900"/>
-              </a:spcAft>
-              <a:buSzPct val="100000"/>
-              <a:buChar char="•"/>
-            </a:pPr>
-            <a:r>
-              <a:rPr lang="en-US" sz="1650" dirty="0">
-                <a:solidFill>
-                  <a:srgbClr val="2A2A33"/>
-                </a:solidFill>
-                <a:latin typeface="Segoe UI" pitchFamily="34" charset="0"/>
-                <a:ea typeface="Segoe UI" pitchFamily="34" charset="-122"/>
-                <a:cs typeface="Segoe UI" pitchFamily="34" charset="-120"/>
-              </a:rPr>
-              <a:t>An eavesdropper who does not know the sequence sees only brief, scattered bursts.</a:t>
-            </a:r>
-            <a:endParaRPr lang="en-US" sz="1550" dirty="0"/>
+              <a:t>Layered firmware; non-blocking loop.</a:t>
+            </a:r>
+            <a:endParaRPr lang="en-US" sz="2200" dirty="0"/>
           </a:p>
         </p:txBody>
       </p:sp>
@@ -6511,16 +7603,16 @@
         </p:nvSpPr>
         <p:spPr>
           <a:xfrm>
-            <a:off x="7543800" y="2148840"/>
-            <a:ext cx="4206240" cy="1874520"/>
+            <a:off x="6675120" y="1371600"/>
+            <a:ext cx="5074920" cy="4709160"/>
           </a:xfrm>
           <a:prstGeom prst="roundRect">
             <a:avLst>
-              <a:gd name="adj" fmla="val 2927"/>
+              <a:gd name="adj" fmla="val 1553"/>
             </a:avLst>
           </a:prstGeom>
           <a:solidFill>
-            <a:srgbClr val="F3F4F6"/>
+            <a:srgbClr val="F4F2FF"/>
           </a:solidFill>
           <a:ln w="12700">
             <a:solidFill>
@@ -6530,101 +7622,59 @@
           </a:ln>
         </p:spPr>
       </p:sp>
-      <p:sp>
-        <p:nvSpPr>
-          <p:cNvPr id="8" name="Text 6"/>
-          <p:cNvSpPr/>
-          <p:nvPr/>
-        </p:nvSpPr>
-        <p:spPr>
-          <a:xfrm>
-            <a:off x="7726680" y="2286000"/>
-            <a:ext cx="3886200" cy="1645920"/>
-          </a:xfrm>
-          <a:prstGeom prst="rect">
-            <a:avLst/>
-          </a:prstGeom>
-          <a:noFill/>
-          <a:ln/>
-        </p:spPr>
-        <p:txBody>
-          <a:bodyPr wrap="square" rtlCol="0" anchor="t"/>
-          <a:lstStyle/>
-          <a:p>
-            <a:pPr indent="0" marL="0">
-              <a:lnSpc>
-                <a:spcPct val="125000"/>
-              </a:lnSpc>
-              <a:buNone/>
-            </a:pPr>
-            <a:r>
-              <a:rPr lang="en-US" sz="1300" dirty="0">
-                <a:solidFill>
-                  <a:srgbClr val="6B7280"/>
-                </a:solidFill>
-                <a:latin typeface="Consolas" pitchFamily="34" charset="0"/>
-                <a:ea typeface="Consolas" pitchFamily="34" charset="-122"/>
-                <a:cs typeface="Consolas" pitchFamily="34" charset="-120"/>
-              </a:rPr>
-              <a:t>// hop every 500 ms from
-// the shared counter
-</a:t>
-            </a:r>
-            <a:endParaRPr lang="en-US" sz="1300" dirty="0"/>
-          </a:p>
-          <a:p>
-            <a:pPr indent="0" marL="0">
-              <a:lnSpc>
-                <a:spcPct val="125000"/>
-              </a:lnSpc>
-              <a:buNone/>
-            </a:pPr>
-            <a:r>
-              <a:rPr lang="en-US" sz="1300" dirty="0">
-                <a:solidFill>
-                  <a:srgbClr val="1F2937"/>
-                </a:solidFill>
-                <a:latin typeface="Consolas" pitchFamily="34" charset="0"/>
-                <a:ea typeface="Consolas" pitchFamily="34" charset="-122"/>
-                <a:cs typeface="Consolas" pitchFamily="34" charset="-120"/>
-              </a:rPr>
-              <a:t>slot = readCounter() % 6;
-</a:t>
-            </a:r>
-            <a:endParaRPr lang="en-US" sz="1300" dirty="0"/>
-          </a:p>
-          <a:p>
-            <a:pPr indent="0" marL="0">
-              <a:lnSpc>
-                <a:spcPct val="125000"/>
-              </a:lnSpc>
-              <a:buNone/>
-            </a:pPr>
-            <a:r>
-              <a:rPr lang="en-US" sz="1300" dirty="0">
-                <a:solidFill>
-                  <a:srgbClr val="6D28D9"/>
-                </a:solidFill>
-                <a:latin typeface="Consolas" pitchFamily="34" charset="0"/>
-                <a:ea typeface="Consolas" pitchFamily="34" charset="-122"/>
-                <a:cs typeface="Consolas" pitchFamily="34" charset="-120"/>
-              </a:rPr>
-              <a:t>setChannel(HOPPING[slot]);</a:t>
-            </a:r>
-            <a:endParaRPr lang="en-US" sz="1300" dirty="0"/>
-          </a:p>
-        </p:txBody>
-      </p:sp>
-      <p:sp>
-        <p:nvSpPr>
-          <p:cNvPr id="9" name="Text 7"/>
-          <p:cNvSpPr/>
-          <p:nvPr/>
-        </p:nvSpPr>
-        <p:spPr>
-          <a:xfrm>
-            <a:off x="7543800" y="4069080"/>
-            <a:ext cx="4206240" cy="457200"/>
+      <p:pic>
+        <p:nvPicPr>
+          <p:cNvPr id="8" name="Image 0" descr="C:/Users/h/AppData/Local/Temp/claude/c--Users-h-Desktop-Mini-project-Fec-Mini-Project/4af49bb4-fc29-49ed-b315-f05a2bedcaee/scratchpad/pptxbuild/assets/architecture.png">    </p:cNvPr>
+          <p:cNvPicPr>
+            <a:picLocks noChangeAspect="1"/>
+          </p:cNvPicPr>
+          <p:nvPr/>
+        </p:nvPicPr>
+        <p:blipFill>
+          <a:blip r:embed="rId1"/>
+          <a:srcRect l="0" r="0" t="0" b="0"/>
+          <a:stretch/>
+        </p:blipFill>
+        <p:spPr>
+          <a:xfrm>
+            <a:off x="6821424" y="1517904"/>
+            <a:ext cx="4782312" cy="4416552"/>
+          </a:xfrm>
+          <a:prstGeom prst="rect">
+            <a:avLst/>
+          </a:prstGeom>
+        </p:spPr>
+      </p:pic>
+      <p:sp>
+        <p:nvSpPr>
+          <p:cNvPr id="9" name="Shape 6"/>
+          <p:cNvSpPr/>
+          <p:nvPr/>
+        </p:nvSpPr>
+        <p:spPr>
+          <a:xfrm>
+            <a:off x="11430000" y="6336792"/>
+            <a:ext cx="402336" cy="402336"/>
+          </a:xfrm>
+          <a:prstGeom prst="ellipse">
+            <a:avLst/>
+          </a:prstGeom>
+          <a:solidFill>
+            <a:srgbClr val="4F46E5"/>
+          </a:solidFill>
+          <a:ln/>
+        </p:spPr>
+      </p:sp>
+      <p:sp>
+        <p:nvSpPr>
+          <p:cNvPr id="10" name="Text 7"/>
+          <p:cNvSpPr/>
+          <p:nvPr/>
+        </p:nvSpPr>
+        <p:spPr>
+          <a:xfrm>
+            <a:off x="11430000" y="6336792"/>
+            <a:ext cx="402336" cy="402336"/>
           </a:xfrm>
           <a:prstGeom prst="rect">
             <a:avLst/>
@@ -6640,15 +7690,15 @@
               <a:buNone/>
             </a:pPr>
             <a:r>
-              <a:rPr lang="en-US" sz="1100" i="1" dirty="0">
-                <a:solidFill>
-                  <a:srgbClr val="6B7280"/>
-                </a:solidFill>
-                <a:latin typeface="Segoe UI" pitchFamily="34" charset="0"/>
-                <a:ea typeface="Segoe UI" pitchFamily="34" charset="-122"/>
-                <a:cs typeface="Segoe UI" pitchFamily="34" charset="-120"/>
-              </a:rPr>
-              <a:t>Both nodes pick the channel from the same counter.</a:t>
+              <a:rPr lang="en-US" sz="1100" b="1" dirty="0">
+                <a:solidFill>
+                  <a:srgbClr val="FFFFFF"/>
+                </a:solidFill>
+                <a:latin typeface="Segoe UI" pitchFamily="34" charset="0"/>
+                <a:ea typeface="Segoe UI" pitchFamily="34" charset="-122"/>
+                <a:cs typeface="Segoe UI" pitchFamily="34" charset="-120"/>
+              </a:rPr>
+              <a:t>5</a:t>
             </a:r>
             <a:endParaRPr lang="en-US" sz="1100" dirty="0"/>
           </a:p>
@@ -6656,66 +7706,7 @@
       </p:sp>
       <p:sp>
         <p:nvSpPr>
-          <p:cNvPr id="10" name="Shape 8"/>
-          <p:cNvSpPr/>
-          <p:nvPr/>
-        </p:nvSpPr>
-        <p:spPr>
-          <a:xfrm>
-            <a:off x="11430000" y="6336792"/>
-            <a:ext cx="402336" cy="402336"/>
-          </a:xfrm>
-          <a:prstGeom prst="ellipse">
-            <a:avLst/>
-          </a:prstGeom>
-          <a:solidFill>
-            <a:srgbClr val="4F46E5"/>
-          </a:solidFill>
-          <a:ln/>
-        </p:spPr>
-      </p:sp>
-      <p:sp>
-        <p:nvSpPr>
-          <p:cNvPr id="11" name="Text 9"/>
-          <p:cNvSpPr/>
-          <p:nvPr/>
-        </p:nvSpPr>
-        <p:spPr>
-          <a:xfrm>
-            <a:off x="11430000" y="6336792"/>
-            <a:ext cx="402336" cy="402336"/>
-          </a:xfrm>
-          <a:prstGeom prst="rect">
-            <a:avLst/>
-          </a:prstGeom>
-          <a:noFill/>
-          <a:ln/>
-        </p:spPr>
-        <p:txBody>
-          <a:bodyPr wrap="square" rtlCol="0" anchor="ctr"/>
-          <a:lstStyle/>
-          <a:p>
-            <a:pPr algn="ctr" indent="0" marL="0">
-              <a:buNone/>
-            </a:pPr>
-            <a:r>
-              <a:rPr lang="en-US" sz="1100" b="1" dirty="0">
-                <a:solidFill>
-                  <a:srgbClr val="FFFFFF"/>
-                </a:solidFill>
-                <a:latin typeface="Segoe UI" pitchFamily="34" charset="0"/>
-                <a:ea typeface="Segoe UI" pitchFamily="34" charset="-122"/>
-                <a:cs typeface="Segoe UI" pitchFamily="34" charset="-120"/>
-              </a:rPr>
-              <a:t>5</a:t>
-            </a:r>
-            <a:endParaRPr lang="en-US" sz="1100" dirty="0"/>
-          </a:p>
-        </p:txBody>
-      </p:sp>
-      <p:sp>
-        <p:nvSpPr>
-          <p:cNvPr id="12" name="Text 10"/>
+          <p:cNvPr id="11" name="Text 8"/>
           <p:cNvSpPr/>
           <p:nvPr/>
         </p:nvSpPr>
@@ -6869,7 +7860,7 @@
               <a:buNone/>
             </a:pPr>
             <a:r>
-              <a:rPr lang="en-US" sz="2400" b="1" dirty="0">
+              <a:rPr lang="en-US" sz="2600" b="1" dirty="0">
                 <a:solidFill>
                   <a:srgbClr val="FFFFFF"/>
                 </a:solidFill>
@@ -6877,9 +7868,9 @@
                 <a:ea typeface="Segoe UI" pitchFamily="34" charset="-122"/>
                 <a:cs typeface="Segoe UI" pitchFamily="34" charset="-120"/>
               </a:rPr>
-              <a:t>Keeping the Two Nodes in Sync</a:t>
-            </a:r>
-            <a:endParaRPr lang="en-US" sz="2400" dirty="0"/>
+              <a:t>Frequency Hopping &amp; Synchronization</a:t>
+            </a:r>
+            <a:endParaRPr lang="en-US" sz="2600" dirty="0"/>
           </a:p>
         </p:txBody>
       </p:sp>
@@ -6891,8 +7882,8 @@
         </p:nvSpPr>
         <p:spPr>
           <a:xfrm>
-            <a:off x="548640" y="1463040"/>
-            <a:ext cx="11064240" cy="2743200"/>
+            <a:off x="548640" y="1417320"/>
+            <a:ext cx="6858000" cy="4572000"/>
           </a:xfrm>
           <a:prstGeom prst="rect">
             <a:avLst/>
@@ -6904,15 +7895,15 @@
           <a:bodyPr wrap="square" rtlCol="0" anchor="t"/>
           <a:lstStyle/>
           <a:p>
-            <a:pPr marL="203200" indent="-203200">
+            <a:pPr marL="254000" indent="-254000">
               <a:spcAft>
-                <a:spcPts val="900"/>
+                <a:spcPts val="1200"/>
               </a:spcAft>
               <a:buSzPct val="100000"/>
               <a:buChar char="•"/>
             </a:pPr>
             <a:r>
-              <a:rPr lang="en-US" sz="1650" dirty="0">
+              <a:rPr lang="en-US" sz="2200" dirty="0">
                 <a:solidFill>
                   <a:srgbClr val="2A2A33"/>
                 </a:solidFill>
@@ -6920,20 +7911,20 @@
                 <a:ea typeface="Segoe UI" pitchFamily="34" charset="-122"/>
                 <a:cs typeface="Segoe UI" pitchFamily="34" charset="-120"/>
               </a:rPr>
-              <a:t>Both radios must be on the same channel at the same instant: the most significant challenge of the FHSS link.</a:t>
-            </a:r>
-            <a:endParaRPr lang="en-US" sz="1650" dirty="0"/>
-          </a:p>
-          <a:p>
-            <a:pPr marL="203200" indent="-203200">
+              <a:t>Six channels (110 to 115), above Wi-Fi.</a:t>
+            </a:r>
+            <a:endParaRPr lang="en-US" sz="2200" dirty="0"/>
+          </a:p>
+          <a:p>
+            <a:pPr marL="254000" indent="-254000">
               <a:spcAft>
-                <a:spcPts val="900"/>
+                <a:spcPts val="1200"/>
               </a:spcAft>
               <a:buSzPct val="100000"/>
               <a:buChar char="•"/>
             </a:pPr>
             <a:r>
-              <a:rPr lang="en-US" sz="1650" dirty="0">
+              <a:rPr lang="en-US" sz="2200" dirty="0">
                 <a:solidFill>
                   <a:srgbClr val="2A2A33"/>
                 </a:solidFill>
@@ -6941,20 +7932,20 @@
                 <a:ea typeface="Segoe UI" pitchFamily="34" charset="-122"/>
                 <a:cs typeface="Segoe UI" pitchFamily="34" charset="-120"/>
               </a:rPr>
-              <a:t>Each node runs a free-running hardware timer that ticks a counter every 500 ms; the channel is counter mod 6.</a:t>
-            </a:r>
-            <a:endParaRPr lang="en-US" sz="1650" dirty="0"/>
-          </a:p>
-          <a:p>
-            <a:pPr marL="203200" indent="-203200">
+              <a:t>Hop every 500 ms; full sweep in 3 s.</a:t>
+            </a:r>
+            <a:endParaRPr lang="en-US" sz="2200" dirty="0"/>
+          </a:p>
+          <a:p>
+            <a:pPr marL="254000" indent="-254000">
               <a:spcAft>
-                <a:spcPts val="900"/>
+                <a:spcPts val="1200"/>
               </a:spcAft>
               <a:buSzPct val="100000"/>
               <a:buChar char="•"/>
             </a:pPr>
             <a:r>
-              <a:rPr lang="en-US" sz="1650" dirty="0">
+              <a:rPr lang="en-US" sz="2200" dirty="0">
                 <a:solidFill>
                   <a:srgbClr val="2A2A33"/>
                 </a:solidFill>
@@ -6962,20 +7953,20 @@
                 <a:ea typeface="Segoe UI" pitchFamily="34" charset="-122"/>
                 <a:cs typeface="Segoe UI" pitchFamily="34" charset="-120"/>
               </a:rPr>
-              <a:t>A dedicated Sync screen manually aligns the two counters once, before a chat or audio session.</a:t>
-            </a:r>
-            <a:endParaRPr lang="en-US" sz="1650" dirty="0"/>
-          </a:p>
-          <a:p>
-            <a:pPr marL="203200" indent="-203200">
+              <a:t>A jammer only spoils the few matching hops.</a:t>
+            </a:r>
+            <a:endParaRPr lang="en-US" sz="2200" dirty="0"/>
+          </a:p>
+          <a:p>
+            <a:pPr marL="254000" indent="-254000">
               <a:spcAft>
-                <a:spcPts val="900"/>
+                <a:spcPts val="1200"/>
               </a:spcAft>
               <a:buSzPct val="100000"/>
               <a:buChar char="•"/>
             </a:pPr>
             <a:r>
-              <a:rPr lang="en-US" sz="1650" dirty="0">
+              <a:rPr lang="en-US" sz="2200" dirty="0">
                 <a:solidFill>
                   <a:srgbClr val="2A2A33"/>
                 </a:solidFill>
@@ -6983,9 +7974,30 @@
                 <a:ea typeface="Segoe UI" pitchFamily="34" charset="-122"/>
                 <a:cs typeface="Segoe UI" pitchFamily="34" charset="-120"/>
               </a:rPr>
-              <a:t>After that one-time step, the timers keep the nodes aligned on their own, with no further exchange.</a:t>
-            </a:r>
-            <a:endParaRPr lang="en-US" sz="1650" dirty="0"/>
+              <a:t>A shared counter keeps both nodes aligned.</a:t>
+            </a:r>
+            <a:endParaRPr lang="en-US" sz="2200" dirty="0"/>
+          </a:p>
+          <a:p>
+            <a:pPr marL="254000" indent="-254000">
+              <a:spcAft>
+                <a:spcPts val="1200"/>
+              </a:spcAft>
+              <a:buSzPct val="100000"/>
+              <a:buChar char="•"/>
+            </a:pPr>
+            <a:r>
+              <a:rPr lang="en-US" sz="2200" dirty="0">
+                <a:solidFill>
+                  <a:srgbClr val="2A2A33"/>
+                </a:solidFill>
+                <a:latin typeface="Segoe UI" pitchFamily="34" charset="0"/>
+                <a:ea typeface="Segoe UI" pitchFamily="34" charset="-122"/>
+                <a:cs typeface="Segoe UI" pitchFamily="34" charset="-120"/>
+              </a:rPr>
+              <a:t>Manual Sync once, then stable: no drift over 3 h.</a:t>
+            </a:r>
+            <a:endParaRPr lang="en-US" sz="2200" dirty="0"/>
           </a:p>
         </p:txBody>
       </p:sp>
@@ -6997,20 +8009,20 @@
         </p:nvSpPr>
         <p:spPr>
           <a:xfrm>
-            <a:off x="548640" y="4389120"/>
-            <a:ext cx="11064240" cy="1143000"/>
+            <a:off x="7589520" y="2286000"/>
+            <a:ext cx="4160520" cy="1783080"/>
           </a:xfrm>
           <a:prstGeom prst="roundRect">
             <a:avLst>
-              <a:gd name="adj" fmla="val 8000"/>
+              <a:gd name="adj" fmla="val 3077"/>
             </a:avLst>
           </a:prstGeom>
           <a:solidFill>
-            <a:srgbClr val="E6FBFF"/>
-          </a:solidFill>
-          <a:ln w="19050">
+            <a:srgbClr val="F3F4F6"/>
+          </a:solidFill>
+          <a:ln w="12700">
             <a:solidFill>
-              <a:srgbClr val="06B6D4"/>
+              <a:srgbClr val="D7D3F0"/>
             </a:solidFill>
             <a:prstDash val="solid"/>
           </a:ln>
@@ -7024,8 +8036,8 @@
         </p:nvSpPr>
         <p:spPr>
           <a:xfrm>
-            <a:off x="868680" y="4389120"/>
-            <a:ext cx="10424160" cy="1143000"/>
+            <a:off x="7772400" y="2423160"/>
+            <a:ext cx="3840480" cy="1554480"/>
           </a:xfrm>
           <a:prstGeom prst="rect">
             <a:avLst/>
@@ -7034,38 +8046,70 @@
           <a:ln/>
         </p:spPr>
         <p:txBody>
-          <a:bodyPr wrap="square" rtlCol="0" anchor="ctr"/>
+          <a:bodyPr wrap="square" rtlCol="0" anchor="t"/>
           <a:lstStyle/>
           <a:p>
             <a:pPr indent="0" marL="0">
+              <a:lnSpc>
+                <a:spcPct val="125000"/>
+              </a:lnSpc>
               <a:buNone/>
             </a:pPr>
             <a:r>
-              <a:rPr lang="en-US" sz="1800" b="1" dirty="0">
-                <a:solidFill>
-                  <a:srgbClr val="0E7490"/>
-                </a:solidFill>
-                <a:latin typeface="Segoe UI" pitchFamily="34" charset="0"/>
-                <a:ea typeface="Segoe UI" pitchFamily="34" charset="-122"/>
-                <a:cs typeface="Segoe UI" pitchFamily="34" charset="-120"/>
-              </a:rPr>
-              <a:t>Negligible clock drift: </a:t>
-            </a:r>
+              <a:rPr lang="en-US" sz="1400" dirty="0">
+                <a:solidFill>
+                  <a:srgbClr val="6B7280"/>
+                </a:solidFill>
+                <a:latin typeface="Consolas" pitchFamily="34" charset="0"/>
+                <a:ea typeface="Consolas" pitchFamily="34" charset="-122"/>
+                <a:cs typeface="Consolas" pitchFamily="34" charset="-120"/>
+              </a:rPr>
+              <a:t>// hop every 500 ms from
+// the shared counter
+</a:t>
+            </a:r>
+            <a:endParaRPr lang="en-US" sz="1400" dirty="0"/>
+          </a:p>
+          <a:p>
             <a:pPr indent="0" marL="0">
+              <a:lnSpc>
+                <a:spcPct val="125000"/>
+              </a:lnSpc>
               <a:buNone/>
             </a:pPr>
             <a:r>
-              <a:rPr lang="en-US" sz="1800" dirty="0">
-                <a:solidFill>
-                  <a:srgbClr val="0E7490"/>
-                </a:solidFill>
-                <a:latin typeface="Segoe UI" pitchFamily="34" charset="0"/>
-                <a:ea typeface="Segoe UI" pitchFamily="34" charset="-122"/>
-                <a:cs typeface="Segoe UI" pitchFamily="34" charset="-120"/>
-              </a:rPr>
-              <a:t>no measurable desynchronization over 3 hours of continuous operation.</a:t>
-            </a:r>
-            <a:endParaRPr lang="en-US" sz="1800" dirty="0"/>
+              <a:rPr lang="en-US" sz="1400" dirty="0">
+                <a:solidFill>
+                  <a:srgbClr val="1F2937"/>
+                </a:solidFill>
+                <a:latin typeface="Consolas" pitchFamily="34" charset="0"/>
+                <a:ea typeface="Consolas" pitchFamily="34" charset="-122"/>
+                <a:cs typeface="Consolas" pitchFamily="34" charset="-120"/>
+              </a:rPr>
+              <a:t>slot = readCounter() % 6;
+</a:t>
+            </a:r>
+            <a:endParaRPr lang="en-US" sz="1400" dirty="0"/>
+          </a:p>
+          <a:p>
+            <a:pPr indent="0" marL="0">
+              <a:lnSpc>
+                <a:spcPct val="125000"/>
+              </a:lnSpc>
+              <a:buNone/>
+            </a:pPr>
+            <a:r>
+              <a:rPr lang="en-US" sz="1400" dirty="0">
+                <a:solidFill>
+                  <a:srgbClr val="6D28D9"/>
+                </a:solidFill>
+                <a:latin typeface="Consolas" pitchFamily="34" charset="0"/>
+                <a:ea typeface="Consolas" pitchFamily="34" charset="-122"/>
+                <a:cs typeface="Consolas" pitchFamily="34" charset="-120"/>
+              </a:rPr>
+              <a:t>setChannel(HOPPING[slot]);</a:t>
+            </a:r>
+            <a:endParaRPr lang="en-US" sz="1400" dirty="0"/>
           </a:p>
         </p:txBody>
       </p:sp>
@@ -7284,7 +8328,7 @@
               <a:buNone/>
             </a:pPr>
             <a:r>
-              <a:rPr lang="en-US" sz="2400" b="1" dirty="0">
+              <a:rPr lang="en-US" sz="2600" b="1" dirty="0">
                 <a:solidFill>
                   <a:srgbClr val="FFFFFF"/>
                 </a:solidFill>
@@ -7294,7 +8338,7 @@
               </a:rPr>
               <a:t>One 32-Byte Frame for Everything</a:t>
             </a:r>
-            <a:endParaRPr lang="en-US" sz="2400" dirty="0"/>
+            <a:endParaRPr lang="en-US" sz="2600" dirty="0"/>
           </a:p>
         </p:txBody>
       </p:sp>
@@ -7307,7 +8351,7 @@
         <p:spPr>
           <a:xfrm>
             <a:off x="594360" y="1371600"/>
-            <a:ext cx="10972800" cy="1554480"/>
+            <a:ext cx="10972800" cy="1645920"/>
           </a:xfrm>
           <a:prstGeom prst="rect">
             <a:avLst/>
@@ -7319,15 +8363,15 @@
           <a:bodyPr wrap="square" rtlCol="0" anchor="t"/>
           <a:lstStyle/>
           <a:p>
-            <a:pPr marL="203200" indent="-203200">
+            <a:pPr marL="254000" indent="-254000">
               <a:spcAft>
-                <a:spcPts val="900"/>
+                <a:spcPts val="1200"/>
               </a:spcAft>
               <a:buSzPct val="100000"/>
               <a:buChar char="•"/>
             </a:pPr>
             <a:r>
-              <a:rPr lang="en-US" sz="1650" dirty="0">
+              <a:rPr lang="en-US" sz="2200" dirty="0">
                 <a:solidFill>
                   <a:srgbClr val="2A2A33"/>
                 </a:solidFill>
@@ -7335,20 +8379,20 @@
                 <a:ea typeface="Segoe UI" pitchFamily="34" charset="-122"/>
                 <a:cs typeface="Segoe UI" pitchFamily="34" charset="-120"/>
               </a:rPr>
-              <a:t>Every transmission is a fixed 32-byte frame, the maximum nRF24L01+ payload.</a:t>
-            </a:r>
-            <a:endParaRPr lang="en-US" sz="1650" dirty="0"/>
-          </a:p>
-          <a:p>
-            <a:pPr marL="203200" indent="-203200">
+              <a:t>Fixed 32-byte frame (the nRF24 maximum).</a:t>
+            </a:r>
+            <a:endParaRPr lang="en-US" sz="2200" dirty="0"/>
+          </a:p>
+          <a:p>
+            <a:pPr marL="254000" indent="-254000">
               <a:spcAft>
-                <a:spcPts val="900"/>
+                <a:spcPts val="1200"/>
               </a:spcAft>
               <a:buSzPct val="100000"/>
               <a:buChar char="•"/>
             </a:pPr>
             <a:r>
-              <a:rPr lang="en-US" sz="1650" dirty="0">
+              <a:rPr lang="en-US" sz="2200" dirty="0">
                 <a:solidFill>
                   <a:srgbClr val="2A2A33"/>
                 </a:solidFill>
@@ -7356,20 +8400,20 @@
                 <a:ea typeface="Segoe UI" pitchFamily="34" charset="-122"/>
                 <a:cs typeface="Segoe UI" pitchFamily="34" charset="-120"/>
               </a:rPr>
-              <a:t>Header: source ID, destination ID, packet type, and FEC metadata; then 28 data bytes.</a:t>
-            </a:r>
-            <a:endParaRPr lang="en-US" sz="1650" dirty="0"/>
-          </a:p>
-          <a:p>
-            <a:pPr marL="203200" indent="-203200">
+              <a:t>Header: src, dst, packet type, FEC metadata.</a:t>
+            </a:r>
+            <a:endParaRPr lang="en-US" sz="2200" dirty="0"/>
+          </a:p>
+          <a:p>
+            <a:pPr marL="254000" indent="-254000">
               <a:spcAft>
-                <a:spcPts val="900"/>
+                <a:spcPts val="1200"/>
               </a:spcAft>
               <a:buSzPct val="100000"/>
               <a:buChar char="•"/>
             </a:pPr>
             <a:r>
-              <a:rPr lang="en-US" sz="1650" dirty="0">
+              <a:rPr lang="en-US" sz="2200" dirty="0">
                 <a:solidFill>
                   <a:srgbClr val="2A2A33"/>
                 </a:solidFill>
@@ -7377,9 +8421,9 @@
                 <a:ea typeface="Segoe UI" pitchFamily="34" charset="-122"/>
                 <a:cs typeface="Segoe UI" pitchFamily="34" charset="-120"/>
               </a:rPr>
-              <a:t>A single frame format multiplexes text, voice, and control over one radio (0xFF = broadcast).</a:t>
-            </a:r>
-            <a:endParaRPr lang="en-US" sz="1650" dirty="0"/>
+              <a:t>28 data bytes; one frame for text, voice, control (0xFF = broadcast).</a:t>
+            </a:r>
+            <a:endParaRPr lang="en-US" sz="2200" dirty="0"/>
           </a:p>
         </p:txBody>
       </p:sp>
@@ -7391,8 +8435,8 @@
         </p:nvSpPr>
         <p:spPr>
           <a:xfrm>
-            <a:off x="868680" y="3337560"/>
-            <a:ext cx="1051560" cy="914400"/>
+            <a:off x="868680" y="3611880"/>
+            <a:ext cx="1097280" cy="960120"/>
           </a:xfrm>
           <a:prstGeom prst="rect">
             <a:avLst/>
@@ -7416,8 +8460,8 @@
         </p:nvSpPr>
         <p:spPr>
           <a:xfrm>
-            <a:off x="868680" y="3337560"/>
-            <a:ext cx="1051560" cy="914400"/>
+            <a:off x="868680" y="3611880"/>
+            <a:ext cx="1097280" cy="960120"/>
           </a:xfrm>
           <a:prstGeom prst="rect">
             <a:avLst/>
@@ -7433,7 +8477,7 @@
               <a:buNone/>
             </a:pPr>
             <a:r>
-              <a:rPr lang="en-US" sz="1300" b="1" dirty="0">
+              <a:rPr lang="en-US" sz="1500" b="1" dirty="0">
                 <a:solidFill>
                   <a:srgbClr val="FFFFFF"/>
                 </a:solidFill>
@@ -7443,14 +8487,14 @@
               </a:rPr>
               <a:t>src</a:t>
             </a:r>
-            <a:endParaRPr lang="en-US" sz="1300" dirty="0"/>
+            <a:endParaRPr lang="en-US" sz="1500" dirty="0"/>
           </a:p>
           <a:p>
             <a:pPr algn="ctr" indent="0" marL="0">
               <a:buNone/>
             </a:pPr>
             <a:r>
-              <a:rPr lang="en-US" sz="1050" dirty="0">
+              <a:rPr lang="en-US" sz="1200" dirty="0">
                 <a:solidFill>
                   <a:srgbClr val="FFFFFF"/>
                 </a:solidFill>
@@ -7460,7 +8504,7 @@
               </a:rPr>
               <a:t>1 B</a:t>
             </a:r>
-            <a:endParaRPr lang="en-US" sz="1300" dirty="0"/>
+            <a:endParaRPr lang="en-US" sz="1500" dirty="0"/>
           </a:p>
         </p:txBody>
       </p:sp>
@@ -7472,8 +8516,8 @@
         </p:nvSpPr>
         <p:spPr>
           <a:xfrm>
-            <a:off x="1920240" y="3337560"/>
-            <a:ext cx="1051560" cy="914400"/>
+            <a:off x="1965960" y="3611880"/>
+            <a:ext cx="1097280" cy="960120"/>
           </a:xfrm>
           <a:prstGeom prst="rect">
             <a:avLst/>
@@ -7497,8 +8541,8 @@
         </p:nvSpPr>
         <p:spPr>
           <a:xfrm>
-            <a:off x="1920240" y="3337560"/>
-            <a:ext cx="1051560" cy="914400"/>
+            <a:off x="1965960" y="3611880"/>
+            <a:ext cx="1097280" cy="960120"/>
           </a:xfrm>
           <a:prstGeom prst="rect">
             <a:avLst/>
@@ -7514,7 +8558,7 @@
               <a:buNone/>
             </a:pPr>
             <a:r>
-              <a:rPr lang="en-US" sz="1300" b="1" dirty="0">
+              <a:rPr lang="en-US" sz="1500" b="1" dirty="0">
                 <a:solidFill>
                   <a:srgbClr val="FFFFFF"/>
                 </a:solidFill>
@@ -7524,14 +8568,14 @@
               </a:rPr>
               <a:t>dst</a:t>
             </a:r>
-            <a:endParaRPr lang="en-US" sz="1300" dirty="0"/>
+            <a:endParaRPr lang="en-US" sz="1500" dirty="0"/>
           </a:p>
           <a:p>
             <a:pPr algn="ctr" indent="0" marL="0">
               <a:buNone/>
             </a:pPr>
             <a:r>
-              <a:rPr lang="en-US" sz="1050" dirty="0">
+              <a:rPr lang="en-US" sz="1200" dirty="0">
                 <a:solidFill>
                   <a:srgbClr val="FFFFFF"/>
                 </a:solidFill>
@@ -7541,7 +8585,7 @@
               </a:rPr>
               <a:t>1 B</a:t>
             </a:r>
-            <a:endParaRPr lang="en-US" sz="1300" dirty="0"/>
+            <a:endParaRPr lang="en-US" sz="1500" dirty="0"/>
           </a:p>
         </p:txBody>
       </p:sp>
@@ -7553,8 +8597,8 @@
         </p:nvSpPr>
         <p:spPr>
           <a:xfrm>
-            <a:off x="2971800" y="3337560"/>
-            <a:ext cx="1783080" cy="914400"/>
+            <a:off x="3063240" y="3611880"/>
+            <a:ext cx="1783080" cy="960120"/>
           </a:xfrm>
           <a:prstGeom prst="rect">
             <a:avLst/>
@@ -7578,8 +8622,8 @@
         </p:nvSpPr>
         <p:spPr>
           <a:xfrm>
-            <a:off x="2971800" y="3337560"/>
-            <a:ext cx="1783080" cy="914400"/>
+            <a:off x="3063240" y="3611880"/>
+            <a:ext cx="1783080" cy="960120"/>
           </a:xfrm>
           <a:prstGeom prst="rect">
             <a:avLst/>
@@ -7595,7 +8639,7 @@
               <a:buNone/>
             </a:pPr>
             <a:r>
-              <a:rPr lang="en-US" sz="1300" b="1" dirty="0">
+              <a:rPr lang="en-US" sz="1500" b="1" dirty="0">
                 <a:solidFill>
                   <a:srgbClr val="FFFFFF"/>
                 </a:solidFill>
@@ -7605,14 +8649,14 @@
               </a:rPr>
               <a:t>type + fec</a:t>
             </a:r>
-            <a:endParaRPr lang="en-US" sz="1300" dirty="0"/>
+            <a:endParaRPr lang="en-US" sz="1500" dirty="0"/>
           </a:p>
           <a:p>
             <a:pPr algn="ctr" indent="0" marL="0">
               <a:buNone/>
             </a:pPr>
             <a:r>
-              <a:rPr lang="en-US" sz="1050" dirty="0">
+              <a:rPr lang="en-US" sz="1200" dirty="0">
                 <a:solidFill>
                   <a:srgbClr val="FFFFFF"/>
                 </a:solidFill>
@@ -7622,7 +8666,7 @@
               </a:rPr>
               <a:t>2 B</a:t>
             </a:r>
-            <a:endParaRPr lang="en-US" sz="1300" dirty="0"/>
+            <a:endParaRPr lang="en-US" sz="1500" dirty="0"/>
           </a:p>
         </p:txBody>
       </p:sp>
@@ -7634,8 +8678,8 @@
         </p:nvSpPr>
         <p:spPr>
           <a:xfrm>
-            <a:off x="4754880" y="3337560"/>
-            <a:ext cx="6355080" cy="914400"/>
+            <a:off x="4846320" y="3611880"/>
+            <a:ext cx="6263640" cy="960120"/>
           </a:xfrm>
           <a:prstGeom prst="rect">
             <a:avLst/>
@@ -7659,8 +8703,8 @@
         </p:nvSpPr>
         <p:spPr>
           <a:xfrm>
-            <a:off x="4754880" y="3337560"/>
-            <a:ext cx="6355080" cy="914400"/>
+            <a:off x="4846320" y="3611880"/>
+            <a:ext cx="6263640" cy="960120"/>
           </a:xfrm>
           <a:prstGeom prst="rect">
             <a:avLst/>
@@ -7676,7 +8720,7 @@
               <a:buNone/>
             </a:pPr>
             <a:r>
-              <a:rPr lang="en-US" sz="1300" b="1" dirty="0">
+              <a:rPr lang="en-US" sz="1500" b="1" dirty="0">
                 <a:solidFill>
                   <a:srgbClr val="FFFFFF"/>
                 </a:solidFill>
@@ -7686,14 +8730,14 @@
               </a:rPr>
               <a:t>data</a:t>
             </a:r>
-            <a:endParaRPr lang="en-US" sz="1300" dirty="0"/>
+            <a:endParaRPr lang="en-US" sz="1500" dirty="0"/>
           </a:p>
           <a:p>
             <a:pPr algn="ctr" indent="0" marL="0">
               <a:buNone/>
             </a:pPr>
             <a:r>
-              <a:rPr lang="en-US" sz="1050" dirty="0">
+              <a:rPr lang="en-US" sz="1200" dirty="0">
                 <a:solidFill>
                   <a:srgbClr val="FFFFFF"/>
                 </a:solidFill>
@@ -7703,59 +8747,20 @@
               </a:rPr>
               <a:t>28 B</a:t>
             </a:r>
-            <a:endParaRPr lang="en-US" sz="1300" dirty="0"/>
-          </a:p>
-        </p:txBody>
-      </p:sp>
-      <p:sp>
-        <p:nvSpPr>
-          <p:cNvPr id="15" name="Text 13"/>
-          <p:cNvSpPr/>
-          <p:nvPr/>
-        </p:nvSpPr>
-        <p:spPr>
-          <a:xfrm>
-            <a:off x="4754880" y="4215384"/>
-            <a:ext cx="1828800" cy="274320"/>
-          </a:xfrm>
-          <a:prstGeom prst="rect">
-            <a:avLst/>
-          </a:prstGeom>
-          <a:noFill/>
-          <a:ln/>
-        </p:spPr>
-        <p:txBody>
-          <a:bodyPr wrap="square" rtlCol="0" anchor="ctr"/>
-          <a:lstStyle/>
-          <a:p>
-            <a:pPr indent="0" marL="0">
-              <a:buNone/>
-            </a:pPr>
-            <a:r>
-              <a:rPr lang="en-US" sz="1100" i="1" dirty="0">
-                <a:solidFill>
-                  <a:srgbClr val="6B7280"/>
-                </a:solidFill>
-                <a:latin typeface="Segoe UI" pitchFamily="34" charset="0"/>
-                <a:ea typeface="Segoe UI" pitchFamily="34" charset="-122"/>
-                <a:cs typeface="Segoe UI" pitchFamily="34" charset="-120"/>
-              </a:rPr>
-              <a:t>data[28]:</a:t>
-            </a:r>
-            <a:endParaRPr lang="en-US" sz="1100" dirty="0"/>
-          </a:p>
-        </p:txBody>
-      </p:sp>
-      <p:sp>
-        <p:nvSpPr>
-          <p:cNvPr id="16" name="Shape 14"/>
-          <p:cNvSpPr/>
-          <p:nvPr/>
-        </p:nvSpPr>
-        <p:spPr>
-          <a:xfrm>
-            <a:off x="4754880" y="4507992"/>
-            <a:ext cx="5029200" cy="566928"/>
+            <a:endParaRPr lang="en-US" sz="1500" dirty="0"/>
+          </a:p>
+        </p:txBody>
+      </p:sp>
+      <p:sp>
+        <p:nvSpPr>
+          <p:cNvPr id="15" name="Shape 13"/>
+          <p:cNvSpPr/>
+          <p:nvPr/>
+        </p:nvSpPr>
+        <p:spPr>
+          <a:xfrm>
+            <a:off x="4846320" y="4800600"/>
+            <a:ext cx="4937760" cy="594360"/>
           </a:xfrm>
           <a:prstGeom prst="rect">
             <a:avLst/>
@@ -7773,14 +8778,14 @@
       </p:sp>
       <p:sp>
         <p:nvSpPr>
-          <p:cNvPr id="17" name="Text 15"/>
-          <p:cNvSpPr/>
-          <p:nvPr/>
-        </p:nvSpPr>
-        <p:spPr>
-          <a:xfrm>
-            <a:off x="4754880" y="4507992"/>
-            <a:ext cx="5029200" cy="566928"/>
+          <p:cNvPr id="16" name="Text 14"/>
+          <p:cNvSpPr/>
+          <p:nvPr/>
+        </p:nvSpPr>
+        <p:spPr>
+          <a:xfrm>
+            <a:off x="4846320" y="4800600"/>
+            <a:ext cx="4937760" cy="594360"/>
           </a:xfrm>
           <a:prstGeom prst="rect">
             <a:avLst/>
@@ -7796,7 +8801,7 @@
               <a:buNone/>
             </a:pPr>
             <a:r>
-              <a:rPr lang="en-US" sz="1250" b="1" dirty="0">
+              <a:rPr lang="en-US" sz="1300" b="1" dirty="0">
                 <a:solidFill>
                   <a:srgbClr val="FFFFFF"/>
                 </a:solidFill>
@@ -7806,14 +8811,14 @@
               </a:rPr>
               <a:t>user payload</a:t>
             </a:r>
-            <a:endParaRPr lang="en-US" sz="1250" dirty="0"/>
+            <a:endParaRPr lang="en-US" sz="1300" dirty="0"/>
           </a:p>
           <a:p>
             <a:pPr algn="ctr" indent="0" marL="0">
               <a:buNone/>
             </a:pPr>
             <a:r>
-              <a:rPr lang="en-US" sz="1050" dirty="0">
+              <a:rPr lang="en-US" sz="1100" dirty="0">
                 <a:solidFill>
                   <a:srgbClr val="FFFFFF"/>
                 </a:solidFill>
@@ -7823,20 +8828,20 @@
               </a:rPr>
               <a:t>26 B</a:t>
             </a:r>
-            <a:endParaRPr lang="en-US" sz="1250" dirty="0"/>
-          </a:p>
-        </p:txBody>
-      </p:sp>
-      <p:sp>
-        <p:nvSpPr>
-          <p:cNvPr id="18" name="Shape 16"/>
-          <p:cNvSpPr/>
-          <p:nvPr/>
-        </p:nvSpPr>
-        <p:spPr>
-          <a:xfrm>
-            <a:off x="9784080" y="4507992"/>
-            <a:ext cx="1325880" cy="566928"/>
+            <a:endParaRPr lang="en-US" sz="1300" dirty="0"/>
+          </a:p>
+        </p:txBody>
+      </p:sp>
+      <p:sp>
+        <p:nvSpPr>
+          <p:cNvPr id="17" name="Shape 15"/>
+          <p:cNvSpPr/>
+          <p:nvPr/>
+        </p:nvSpPr>
+        <p:spPr>
+          <a:xfrm>
+            <a:off x="9784080" y="4800600"/>
+            <a:ext cx="1325880" cy="594360"/>
           </a:xfrm>
           <a:prstGeom prst="rect">
             <a:avLst/>
@@ -7854,14 +8859,14 @@
       </p:sp>
       <p:sp>
         <p:nvSpPr>
-          <p:cNvPr id="19" name="Text 17"/>
-          <p:cNvSpPr/>
-          <p:nvPr/>
-        </p:nvSpPr>
-        <p:spPr>
-          <a:xfrm>
-            <a:off x="9784080" y="4507992"/>
-            <a:ext cx="1325880" cy="566928"/>
+          <p:cNvPr id="18" name="Text 16"/>
+          <p:cNvSpPr/>
+          <p:nvPr/>
+        </p:nvSpPr>
+        <p:spPr>
+          <a:xfrm>
+            <a:off x="9784080" y="4800600"/>
+            <a:ext cx="1325880" cy="594360"/>
           </a:xfrm>
           <a:prstGeom prst="rect">
             <a:avLst/>
@@ -7877,7 +8882,7 @@
               <a:buNone/>
             </a:pPr>
             <a:r>
-              <a:rPr lang="en-US" sz="1250" b="1" dirty="0">
+              <a:rPr lang="en-US" sz="1300" b="1" dirty="0">
                 <a:solidFill>
                   <a:srgbClr val="FFFFFF"/>
                 </a:solidFill>
@@ -7887,14 +8892,14 @@
               </a:rPr>
               <a:t>CRC-16</a:t>
             </a:r>
-            <a:endParaRPr lang="en-US" sz="1250" dirty="0"/>
+            <a:endParaRPr lang="en-US" sz="1300" dirty="0"/>
           </a:p>
           <a:p>
             <a:pPr algn="ctr" indent="0" marL="0">
               <a:buNone/>
             </a:pPr>
             <a:r>
-              <a:rPr lang="en-US" sz="1050" dirty="0">
+              <a:rPr lang="en-US" sz="1100" dirty="0">
                 <a:solidFill>
                   <a:srgbClr val="FFFFFF"/>
                 </a:solidFill>
@@ -7904,19 +8909,19 @@
               </a:rPr>
               <a:t>2 B</a:t>
             </a:r>
-            <a:endParaRPr lang="en-US" sz="1250" dirty="0"/>
-          </a:p>
-        </p:txBody>
-      </p:sp>
-      <p:sp>
-        <p:nvSpPr>
-          <p:cNvPr id="20" name="Text 18"/>
-          <p:cNvSpPr/>
-          <p:nvPr/>
-        </p:nvSpPr>
-        <p:spPr>
-          <a:xfrm>
-            <a:off x="868680" y="5184648"/>
+            <a:endParaRPr lang="en-US" sz="1300" dirty="0"/>
+          </a:p>
+        </p:txBody>
+      </p:sp>
+      <p:sp>
+        <p:nvSpPr>
+          <p:cNvPr id="19" name="Text 17"/>
+          <p:cNvSpPr/>
+          <p:nvPr/>
+        </p:nvSpPr>
+        <p:spPr>
+          <a:xfrm>
+            <a:off x="868680" y="5532120"/>
             <a:ext cx="10332720" cy="457200"/>
           </a:xfrm>
           <a:prstGeom prst="rect">
@@ -7933,7 +8938,7 @@
               <a:buNone/>
             </a:pPr>
             <a:r>
-              <a:rPr lang="en-US" sz="1100" i="1" dirty="0">
+              <a:rPr lang="en-US" sz="1300" i="1" dirty="0">
                 <a:solidFill>
                   <a:srgbClr val="6B7280"/>
                 </a:solidFill>
@@ -7941,15 +8946,15 @@
                 <a:ea typeface="Segoe UI" pitchFamily="34" charset="-122"/>
                 <a:cs typeface="Segoe UI" pitchFamily="34" charset="-120"/>
               </a:rPr>
-              <a:t>The last 2 of the 28 data bytes hold the CRC; reliable (ARQ) packets also reserve the first 2 bytes for a sequence number.</a:t>
-            </a:r>
-            <a:endParaRPr lang="en-US" sz="1100" dirty="0"/>
-          </a:p>
-        </p:txBody>
-      </p:sp>
-      <p:sp>
-        <p:nvSpPr>
-          <p:cNvPr id="21" name="Shape 19"/>
+              <a:t>CRC in the last 2 of the 28 data bytes; ARQ uses the first 2 for a sequence number.</a:t>
+            </a:r>
+            <a:endParaRPr lang="en-US" sz="1300" dirty="0"/>
+          </a:p>
+        </p:txBody>
+      </p:sp>
+      <p:sp>
+        <p:nvSpPr>
+          <p:cNvPr id="20" name="Shape 18"/>
           <p:cNvSpPr/>
           <p:nvPr/>
         </p:nvSpPr>
@@ -7969,7 +8974,7 @@
       </p:sp>
       <p:sp>
         <p:nvSpPr>
-          <p:cNvPr id="22" name="Text 20"/>
+          <p:cNvPr id="21" name="Text 19"/>
           <p:cNvSpPr/>
           <p:nvPr/>
         </p:nvSpPr>
@@ -8008,7 +9013,7 @@
       </p:sp>
       <p:sp>
         <p:nvSpPr>
-          <p:cNvPr id="23" name="Text 21"/>
+          <p:cNvPr id="22" name="Text 20"/>
           <p:cNvSpPr/>
           <p:nvPr/>
         </p:nvSpPr>
@@ -8162,7 +9167,7 @@
               <a:buNone/>
             </a:pPr>
             <a:r>
-              <a:rPr lang="en-US" sz="2400" b="1" dirty="0">
+              <a:rPr lang="en-US" sz="2600" b="1" dirty="0">
                 <a:solidFill>
                   <a:srgbClr val="FFFFFF"/>
                 </a:solidFill>
@@ -8172,7 +9177,7 @@
               </a:rPr>
               <a:t>Forward Error Correction</a:t>
             </a:r>
-            <a:endParaRPr lang="en-US" sz="2400" dirty="0"/>
+            <a:endParaRPr lang="en-US" sz="2600" dirty="0"/>
           </a:p>
         </p:txBody>
       </p:sp>
@@ -8185,7 +9190,7 @@
         <p:spPr>
           <a:xfrm>
             <a:off x="594360" y="1371600"/>
-            <a:ext cx="10972800" cy="2103120"/>
+            <a:ext cx="10972800" cy="2194560"/>
           </a:xfrm>
           <a:prstGeom prst="rect">
             <a:avLst/>
@@ -8197,15 +9202,15 @@
           <a:bodyPr wrap="square" rtlCol="0" anchor="t"/>
           <a:lstStyle/>
           <a:p>
-            <a:pPr marL="203200" indent="-203200">
+            <a:pPr marL="254000" indent="-254000">
               <a:spcAft>
-                <a:spcPts val="900"/>
+                <a:spcPts val="1200"/>
               </a:spcAft>
               <a:buSzPct val="100000"/>
               <a:buChar char="•"/>
             </a:pPr>
             <a:r>
-              <a:rPr lang="en-US" sz="1650" dirty="0">
+              <a:rPr lang="en-US" sz="2200" dirty="0">
                 <a:solidFill>
                   <a:srgbClr val="2A2A33"/>
                 </a:solidFill>
@@ -8213,20 +9218,20 @@
                 <a:ea typeface="Segoe UI" pitchFamily="34" charset="-122"/>
                 <a:cs typeface="Segoe UI" pitchFamily="34" charset="-120"/>
               </a:rPr>
-              <a:t>The radio's own CRC and auto-ACK are disabled; error control is ours, matched per traffic type.</a:t>
-            </a:r>
-            <a:endParaRPr lang="en-US" sz="1650" dirty="0"/>
-          </a:p>
-          <a:p>
-            <a:pPr marL="203200" indent="-203200">
+              <a:t>Our own error control (radio CRC and ACK off).</a:t>
+            </a:r>
+            <a:endParaRPr lang="en-US" sz="2200" dirty="0"/>
+          </a:p>
+          <a:p>
+            <a:pPr marL="254000" indent="-254000">
               <a:spcAft>
-                <a:spcPts val="900"/>
+                <a:spcPts val="1200"/>
               </a:spcAft>
               <a:buSzPct val="100000"/>
               <a:buChar char="•"/>
             </a:pPr>
             <a:r>
-              <a:rPr lang="en-US" sz="1650" dirty="0">
+              <a:rPr lang="en-US" sz="2200" dirty="0">
                 <a:solidFill>
                   <a:srgbClr val="2A2A33"/>
                 </a:solidFill>
@@ -8234,20 +9239,20 @@
                 <a:ea typeface="Segoe UI" pitchFamily="34" charset="-122"/>
                 <a:cs typeface="Segoe UI" pitchFamily="34" charset="-120"/>
               </a:rPr>
-              <a:t>CRC-16: detects corruption and drops bad packets.</a:t>
-            </a:r>
-            <a:endParaRPr lang="en-US" sz="1650" dirty="0"/>
-          </a:p>
-          <a:p>
-            <a:pPr marL="203200" indent="-203200">
+              <a:t>CRC-16: detect and drop corruption.</a:t>
+            </a:r>
+            <a:endParaRPr lang="en-US" sz="2200" dirty="0"/>
+          </a:p>
+          <a:p>
+            <a:pPr marL="254000" indent="-254000">
               <a:spcAft>
-                <a:spcPts val="900"/>
+                <a:spcPts val="1200"/>
               </a:spcAft>
               <a:buSzPct val="100000"/>
               <a:buChar char="•"/>
             </a:pPr>
             <a:r>
-              <a:rPr lang="en-US" sz="1650" dirty="0">
+              <a:rPr lang="en-US" sz="2200" dirty="0">
                 <a:solidFill>
                   <a:srgbClr val="2A2A33"/>
                 </a:solidFill>
@@ -8255,20 +9260,20 @@
                 <a:ea typeface="Segoe UI" pitchFamily="34" charset="-122"/>
                 <a:cs typeface="Segoe UI" pitchFamily="34" charset="-120"/>
               </a:rPr>
-              <a:t>ARQ (chat): retransmit until acknowledged, guaranteeing exact delivery.</a:t>
-            </a:r>
-            <a:endParaRPr lang="en-US" sz="1650" dirty="0"/>
-          </a:p>
-          <a:p>
-            <a:pPr marL="203200" indent="-203200">
+              <a:t>ARQ (chat): retransmit until acknowledged.</a:t>
+            </a:r>
+            <a:endParaRPr lang="en-US" sz="2200" dirty="0"/>
+          </a:p>
+          <a:p>
+            <a:pPr marL="254000" indent="-254000">
               <a:spcAft>
-                <a:spcPts val="900"/>
+                <a:spcPts val="1200"/>
               </a:spcAft>
               <a:buSzPct val="100000"/>
               <a:buChar char="•"/>
             </a:pPr>
             <a:r>
-              <a:rPr lang="en-US" sz="1650" dirty="0">
+              <a:rPr lang="en-US" sz="2200" dirty="0">
                 <a:solidFill>
                   <a:srgbClr val="2A2A33"/>
                 </a:solidFill>
@@ -8276,9 +9281,9 @@
                 <a:ea typeface="Segoe UI" pitchFamily="34" charset="-122"/>
                 <a:cs typeface="Segoe UI" pitchFamily="34" charset="-120"/>
               </a:rPr>
-              <a:t>XOR block (audio): rebuild one lost packet per block of four, with no retransmission.</a:t>
-            </a:r>
-            <a:endParaRPr lang="en-US" sz="1650" dirty="0"/>
+              <a:t>XOR (audio): rebuild one lost packet per block of four.</a:t>
+            </a:r>
+            <a:endParaRPr lang="en-US" sz="2200" dirty="0"/>
           </a:p>
         </p:txBody>
       </p:sp>
@@ -8290,12 +9295,12 @@
         </p:nvSpPr>
         <p:spPr>
           <a:xfrm>
-            <a:off x="1463040" y="3474720"/>
-            <a:ext cx="9235440" cy="2697480"/>
+            <a:off x="1737360" y="3611880"/>
+            <a:ext cx="8686800" cy="2606040"/>
           </a:xfrm>
           <a:prstGeom prst="roundRect">
             <a:avLst>
-              <a:gd name="adj" fmla="val 2712"/>
+              <a:gd name="adj" fmla="val 2807"/>
             </a:avLst>
           </a:prstGeom>
           <a:solidFill>
@@ -8324,8 +9329,8 @@
         </p:blipFill>
         <p:spPr>
           <a:xfrm>
-            <a:off x="1627632" y="3639312"/>
-            <a:ext cx="8906256" cy="2368296"/>
+            <a:off x="1883664" y="3758184"/>
+            <a:ext cx="8394192" cy="2313432"/>
           </a:xfrm>
           <a:prstGeom prst="rect">
             <a:avLst/>
@@ -8547,7 +9552,7 @@
               <a:buNone/>
             </a:pPr>
             <a:r>
-              <a:rPr lang="en-US" sz="2400" b="1" dirty="0">
+              <a:rPr lang="en-US" sz="2600" b="1" dirty="0">
                 <a:solidFill>
                   <a:srgbClr val="FFFFFF"/>
                 </a:solidFill>
@@ -8557,7 +9562,7 @@
               </a:rPr>
               <a:t>Real-Time Voice</a:t>
             </a:r>
-            <a:endParaRPr lang="en-US" sz="2400" dirty="0"/>
+            <a:endParaRPr lang="en-US" sz="2600" dirty="0"/>
           </a:p>
         </p:txBody>
       </p:sp>
@@ -8569,7 +9574,7 @@
         </p:nvSpPr>
         <p:spPr>
           <a:xfrm>
-            <a:off x="502920" y="1463040"/>
+            <a:off x="502920" y="1508760"/>
             <a:ext cx="4160520" cy="4572000"/>
           </a:xfrm>
           <a:prstGeom prst="rect">
@@ -8582,15 +9587,15 @@
           <a:bodyPr wrap="square" rtlCol="0" anchor="t"/>
           <a:lstStyle/>
           <a:p>
-            <a:pPr marL="203200" indent="-203200">
+            <a:pPr marL="254000" indent="-254000">
               <a:spcAft>
-                <a:spcPts val="900"/>
+                <a:spcPts val="1200"/>
               </a:spcAft>
               <a:buSzPct val="100000"/>
               <a:buChar char="•"/>
             </a:pPr>
             <a:r>
-              <a:rPr lang="en-US" sz="1650" dirty="0">
+              <a:rPr lang="en-US" sz="2200" dirty="0">
                 <a:solidFill>
                   <a:srgbClr val="2A2A33"/>
                 </a:solidFill>
@@ -8598,20 +9603,20 @@
                 <a:ea typeface="Segoe UI" pitchFamily="34" charset="-122"/>
                 <a:cs typeface="Segoe UI" pitchFamily="34" charset="-120"/>
               </a:rPr>
-              <a:t>Half-duplex walkie-talkie: one node talks, the other listens.</a:t>
-            </a:r>
-            <a:endParaRPr lang="en-US" sz="1550" dirty="0"/>
-          </a:p>
-          <a:p>
-            <a:pPr marL="203200" indent="-203200">
+              <a:t>Half-duplex walkie-talkie.</a:t>
+            </a:r>
+            <a:endParaRPr lang="en-US" sz="2200" dirty="0"/>
+          </a:p>
+          <a:p>
+            <a:pPr marL="254000" indent="-254000">
               <a:spcAft>
-                <a:spcPts val="900"/>
+                <a:spcPts val="1200"/>
               </a:spcAft>
               <a:buSzPct val="100000"/>
               <a:buChar char="•"/>
             </a:pPr>
             <a:r>
-              <a:rPr lang="en-US" sz="1650" dirty="0">
+              <a:rPr lang="en-US" sz="2200" dirty="0">
                 <a:solidFill>
                   <a:srgbClr val="2A2A33"/>
                 </a:solidFill>
@@ -8619,20 +9624,20 @@
                 <a:ea typeface="Segoe UI" pitchFamily="34" charset="-122"/>
                 <a:cs typeface="Segoe UI" pitchFamily="34" charset="-120"/>
               </a:rPr>
-              <a:t>8 kHz, 8-bit voice: low bitrate, intelligible speech.</a:t>
-            </a:r>
-            <a:endParaRPr lang="en-US" sz="1550" dirty="0"/>
-          </a:p>
-          <a:p>
-            <a:pPr marL="203200" indent="-203200">
+              <a:t>8 kHz, 8-bit voice.</a:t>
+            </a:r>
+            <a:endParaRPr lang="en-US" sz="2200" dirty="0"/>
+          </a:p>
+          <a:p>
+            <a:pPr marL="254000" indent="-254000">
               <a:spcAft>
-                <a:spcPts val="900"/>
+                <a:spcPts val="1200"/>
               </a:spcAft>
               <a:buSzPct val="100000"/>
               <a:buChar char="•"/>
             </a:pPr>
             <a:r>
-              <a:rPr lang="en-US" sz="1650" dirty="0">
+              <a:rPr lang="en-US" sz="2200" dirty="0">
                 <a:solidFill>
                   <a:srgbClr val="2A2A33"/>
                 </a:solidFill>
@@ -8640,20 +9645,20 @@
                 <a:ea typeface="Segoe UI" pitchFamily="34" charset="-122"/>
                 <a:cs typeface="Segoe UI" pitchFamily="34" charset="-120"/>
               </a:rPr>
-              <a:t>Every step is non-blocking, so voice streams while the radio keeps hopping.</a:t>
-            </a:r>
-            <a:endParaRPr lang="en-US" sz="1550" dirty="0"/>
-          </a:p>
-          <a:p>
-            <a:pPr marL="203200" indent="-203200">
+              <a:t>Non-blocking: streams while hopping.</a:t>
+            </a:r>
+            <a:endParaRPr lang="en-US" sz="2200" dirty="0"/>
+          </a:p>
+          <a:p>
+            <a:pPr marL="254000" indent="-254000">
               <a:spcAft>
-                <a:spcPts val="900"/>
+                <a:spcPts val="1200"/>
               </a:spcAft>
               <a:buSzPct val="100000"/>
               <a:buChar char="•"/>
             </a:pPr>
             <a:r>
-              <a:rPr lang="en-US" sz="1650" dirty="0">
+              <a:rPr lang="en-US" sz="2200" dirty="0">
                 <a:solidFill>
                   <a:srgbClr val="2A2A33"/>
                 </a:solidFill>
@@ -8661,9 +9666,9 @@
                 <a:ea typeface="Segoe UI" pitchFamily="34" charset="-122"/>
                 <a:cs typeface="Segoe UI" pitchFamily="34" charset="-120"/>
               </a:rPr>
-              <a:t>Rides the CRC + XOR FEC for forward recovery.</a:t>
-            </a:r>
-            <a:endParaRPr lang="en-US" sz="1550" dirty="0"/>
+              <a:t>Protected by CRC + XOR FEC.</a:t>
+            </a:r>
+            <a:endParaRPr lang="en-US" sz="2200" dirty="0"/>
           </a:p>
         </p:txBody>
       </p:sp>
@@ -8719,7 +9724,7 @@
               <a:buNone/>
             </a:pPr>
             <a:r>
-              <a:rPr lang="en-US" sz="1400" b="1" dirty="0">
+              <a:rPr lang="en-US" sz="1500" b="1" dirty="0">
                 <a:solidFill>
                   <a:srgbClr val="EC4899"/>
                 </a:solidFill>
@@ -8729,7 +9734,7 @@
               </a:rPr>
               <a:t>Transmit (talk)</a:t>
             </a:r>
-            <a:endParaRPr lang="en-US" sz="1400" dirty="0"/>
+            <a:endParaRPr lang="en-US" sz="1500" dirty="0"/>
           </a:p>
         </p:txBody>
       </p:sp>
@@ -8808,7 +9813,7 @@
               <a:buNone/>
             </a:pPr>
             <a:r>
-              <a:rPr lang="en-US" sz="1400" b="1" dirty="0">
+              <a:rPr lang="en-US" sz="1500" b="1" dirty="0">
                 <a:solidFill>
                   <a:srgbClr val="06B6D4"/>
                 </a:solidFill>
@@ -8818,7 +9823,7 @@
               </a:rPr>
               <a:t>Receive (listen)</a:t>
             </a:r>
-            <a:endParaRPr lang="en-US" sz="1400" dirty="0"/>
+            <a:endParaRPr lang="en-US" sz="1500" dirty="0"/>
           </a:p>
         </p:txBody>
       </p:sp>

--- a/FELCOM_Presentation.pptx
+++ b/FELCOM_Presentation.pptx
@@ -4,6 +4,9 @@
   <p:sldMasterIdLst>
     <p:sldMasterId id="2147483648" r:id="rId1"/>
   </p:sldMasterIdLst>
+  <p:notesMasterIdLst>
+    <p:notesMasterId r:id="rId17"/>
+  </p:notesMasterIdLst>
   <p:sldIdLst>
     <p:sldId id="256" r:id="rId2"/>
     <p:sldId id="257" r:id="rId3"/>
@@ -21,11 +24,8 @@
     <p:sldId id="269" r:id="rId15"/>
     <p:sldId id="270" r:id="rId16"/>
   </p:sldIdLst>
-  <p:notesMasterIdLst>
-    <p:notesMasterId r:id="rId17"/>
-  </p:notesMasterIdLst>
-  <p:sldSz cx="12191695" cy="6858000"/>
-  <p:notesSz cx="6858000" cy="12191695"/>
+  <p:sldSz cx="12192000" cy="6858000"/>
+  <p:notesSz cx="6858000" cy="12192000"/>
   <p:defaultTextStyle>
     <a:lvl1pPr marL="0" algn="l" defTabSz="914400" rtl="0" eaLnBrk="1" latinLnBrk="0" hangingPunct="1">
       <a:defRPr sz="1800" kern="1200">
@@ -118,6 +118,11 @@
       </a:defRPr>
     </a:lvl9pPr>
   </p:defaultTextStyle>
+  <p:extLst>
+    <p:ext uri="{EFAFB233-063F-42B5-8137-9DF3F51BA10A}">
+      <p15:sldGuideLst xmlns:p15="http://schemas.microsoft.com/office/powerpoint/2012/main"/>
+    </p:ext>
+  </p:extLst>
 </p:presentation>
 </file>
 
@@ -143,234 +148,10 @@
           <a:chExt cx="0" cy="0"/>
         </a:xfrm>
       </p:grpSpPr>
-      <p:sp>
-        <p:nvSpPr>
-          <p:cNvPr id="2" name="Header Placeholder 1"/>
-          <p:cNvSpPr>
-            <a:spLocks noGrp="1"/>
-          </p:cNvSpPr>
-          <p:nvPr>
-            <p:ph type="hdr" sz="quarter"/>
-          </p:nvPr>
-        </p:nvSpPr>
-        <p:spPr>
-          <a:xfrm>
-            <a:off x="0" y="0"/>
-            <a:ext cx="2971800" cy="458788"/>
-          </a:xfrm>
-          <a:prstGeom prst="rect">
-            <a:avLst/>
-          </a:prstGeom>
-        </p:spPr>
-        <p:txBody>
-          <a:bodyPr vert="horz" lIns="91440" tIns="45720" rIns="91440" bIns="45720" rtlCol="0"/>
-          <a:lstStyle>
-            <a:lvl1pPr algn="l">
-              <a:defRPr sz="1200"/>
-            </a:lvl1pPr>
-          </a:lstStyle>
-          <a:p>
-            <a:endParaRPr lang="en-US"/>
-          </a:p>
-        </p:txBody>
-      </p:sp>
-      <p:sp>
-        <p:nvSpPr>
-          <p:cNvPr id="3" name="Date Placeholder 2"/>
-          <p:cNvSpPr>
-            <a:spLocks noGrp="1"/>
-          </p:cNvSpPr>
-          <p:nvPr>
-            <p:ph type="dt" idx="1"/>
-          </p:nvPr>
-        </p:nvSpPr>
-        <p:spPr>
-          <a:xfrm>
-            <a:off x="3884613" y="0"/>
-            <a:ext cx="2971800" cy="458788"/>
-          </a:xfrm>
-          <a:prstGeom prst="rect">
-            <a:avLst/>
-          </a:prstGeom>
-        </p:spPr>
-        <p:txBody>
-          <a:bodyPr vert="horz" lIns="91440" tIns="45720" rIns="91440" bIns="45720" rtlCol="0"/>
-          <a:lstStyle>
-            <a:lvl1pPr algn="r">
-              <a:defRPr sz="1200"/>
-            </a:lvl1pPr>
-          </a:lstStyle>
-          <a:p>
-            <a:fld id="{5282F153-3F37-0F45-9E97-73ACFA13230C}" type="datetimeFigureOut">
-              <a:rPr lang="en-US"/>
-              <a:t>7/23/19</a:t>
-            </a:fld>
-            <a:endParaRPr lang="en-US"/>
-          </a:p>
-        </p:txBody>
-      </p:sp>
-      <p:sp>
-        <p:nvSpPr>
-          <p:cNvPr id="4" name="Slide Image Placeholder 3"/>
-          <p:cNvSpPr>
-            <a:spLocks noGrp="1" noRot="1" noChangeAspect="1"/>
-          </p:cNvSpPr>
-          <p:nvPr>
-            <p:ph type="sldImg" idx="2"/>
-          </p:nvPr>
-        </p:nvSpPr>
-        <p:spPr>
-          <a:xfrm>
-            <a:off x="685800" y="1143000"/>
-            <a:ext cx="5486400" cy="3086100"/>
-          </a:xfrm>
-          <a:prstGeom prst="rect">
-            <a:avLst/>
-          </a:prstGeom>
-          <a:noFill/>
-          <a:ln w="12700">
-            <a:solidFill>
-              <a:prstClr val="black"/>
-            </a:solidFill>
-          </a:ln>
-        </p:spPr>
-        <p:txBody>
-          <a:bodyPr vert="horz" lIns="91440" tIns="45720" rIns="91440" bIns="45720" rtlCol="0" anchor="ctr"/>
-          <a:lstStyle/>
-          <a:p>
-            <a:endParaRPr lang="en-US"/>
-          </a:p>
-        </p:txBody>
-      </p:sp>
-      <p:sp>
-        <p:nvSpPr>
-          <p:cNvPr id="5" name="Notes Placeholder 4"/>
-          <p:cNvSpPr>
-            <a:spLocks noGrp="1"/>
-          </p:cNvSpPr>
-          <p:nvPr>
-            <p:ph type="body" sz="quarter" idx="3"/>
-          </p:nvPr>
-        </p:nvSpPr>
-        <p:spPr>
-          <a:xfrm>
-            <a:off x="685800" y="4400550"/>
-            <a:ext cx="5486400" cy="3600450"/>
-          </a:xfrm>
-          <a:prstGeom prst="rect">
-            <a:avLst/>
-          </a:prstGeom>
-        </p:spPr>
-        <p:txBody>
-          <a:bodyPr vert="horz" lIns="91440" tIns="45720" rIns="91440" bIns="45720" rtlCol="0"/>
-          <a:lstStyle/>
-          <a:p>
-            <a:pPr lvl="0"/>
-            <a:r>
-              <a:rPr lang="en-US"/>
-              <a:t>Click to edit Master text styles</a:t>
-            </a:r>
-          </a:p>
-          <a:p>
-            <a:pPr lvl="1"/>
-            <a:r>
-              <a:rPr lang="en-US"/>
-              <a:t>Second level</a:t>
-            </a:r>
-          </a:p>
-          <a:p>
-            <a:pPr lvl="2"/>
-            <a:r>
-              <a:rPr lang="en-US"/>
-              <a:t>Third level</a:t>
-            </a:r>
-          </a:p>
-          <a:p>
-            <a:pPr lvl="3"/>
-            <a:r>
-              <a:rPr lang="en-US"/>
-              <a:t>Fourth level</a:t>
-            </a:r>
-          </a:p>
-          <a:p>
-            <a:pPr lvl="4"/>
-            <a:r>
-              <a:rPr lang="en-US"/>
-              <a:t>Fifth level</a:t>
-            </a:r>
-          </a:p>
-        </p:txBody>
-      </p:sp>
-      <p:sp>
-        <p:nvSpPr>
-          <p:cNvPr id="6" name="Footer Placeholder 5"/>
-          <p:cNvSpPr>
-            <a:spLocks noGrp="1"/>
-          </p:cNvSpPr>
-          <p:nvPr>
-            <p:ph type="ftr" sz="quarter" idx="4"/>
-          </p:nvPr>
-        </p:nvSpPr>
-        <p:spPr>
-          <a:xfrm>
-            <a:off x="0" y="8685213"/>
-            <a:ext cx="2971800" cy="458787"/>
-          </a:xfrm>
-          <a:prstGeom prst="rect">
-            <a:avLst/>
-          </a:prstGeom>
-        </p:spPr>
-        <p:txBody>
-          <a:bodyPr vert="horz" lIns="91440" tIns="45720" rIns="91440" bIns="45720" rtlCol="0" anchor="b"/>
-          <a:lstStyle>
-            <a:lvl1pPr algn="l">
-              <a:defRPr sz="1200"/>
-            </a:lvl1pPr>
-          </a:lstStyle>
-          <a:p>
-            <a:endParaRPr lang="en-US"/>
-          </a:p>
-        </p:txBody>
-      </p:sp>
-      <p:sp>
-        <p:nvSpPr>
-          <p:cNvPr id="7" name="Slide Number Placeholder 6"/>
-          <p:cNvSpPr>
-            <a:spLocks noGrp="1"/>
-          </p:cNvSpPr>
-          <p:nvPr>
-            <p:ph type="sldNum" sz="quarter" idx="5"/>
-          </p:nvPr>
-        </p:nvSpPr>
-        <p:spPr>
-          <a:xfrm>
-            <a:off x="3884613" y="8685213"/>
-            <a:ext cx="2971800" cy="458787"/>
-          </a:xfrm>
-          <a:prstGeom prst="rect">
-            <a:avLst/>
-          </a:prstGeom>
-        </p:spPr>
-        <p:txBody>
-          <a:bodyPr vert="horz" lIns="91440" tIns="45720" rIns="91440" bIns="45720" rtlCol="0" anchor="b"/>
-          <a:lstStyle>
-            <a:lvl1pPr algn="r">
-              <a:defRPr sz="1200"/>
-            </a:lvl1pPr>
-          </a:lstStyle>
-          <a:p>
-            <a:fld id="{CE5E9CC1-C706-0F49-92D6-E571CC5EEA8F}" type="slidenum">
-              <a:rPr lang="en-US"/>
-              <a:t>‹#›</a:t>
-            </a:fld>
-            <a:endParaRPr lang="en-US"/>
-          </a:p>
-        </p:txBody>
-      </p:sp>
     </p:spTree>
     <p:extLst>
       <p:ext uri="{BB962C8B-B14F-4D97-AF65-F5344CB8AC3E}">
-        <p14:creationId xmlns:p14="http://schemas.microsoft.com/office/powerpoint/2010/main" val="1024086991"/>
+        <p14:creationId xmlns:p14="http://schemas.microsoft.com/office/powerpoint/2010/main" val="1936333488"/>
       </p:ext>
     </p:extLst>
   </p:cSld>
@@ -514,10 +295,6 @@
           <a:bodyPr/>
           <a:lstStyle/>
           <a:p>
-            <a:r>
-              <a:rPr lang="en-US" dirty="0"/>
-              <a:t/>
-            </a:r>
             <a:endParaRPr lang="en-US" dirty="0"/>
           </a:p>
         </p:txBody>
@@ -602,10 +379,6 @@
           <a:bodyPr/>
           <a:lstStyle/>
           <a:p>
-            <a:r>
-              <a:rPr lang="en-US" dirty="0"/>
-              <a:t/>
-            </a:r>
             <a:endParaRPr lang="en-US" dirty="0"/>
           </a:p>
         </p:txBody>
@@ -690,10 +463,6 @@
           <a:bodyPr/>
           <a:lstStyle/>
           <a:p>
-            <a:r>
-              <a:rPr lang="en-US" dirty="0"/>
-              <a:t/>
-            </a:r>
             <a:endParaRPr lang="en-US" dirty="0"/>
           </a:p>
         </p:txBody>
@@ -778,10 +547,6 @@
           <a:bodyPr/>
           <a:lstStyle/>
           <a:p>
-            <a:r>
-              <a:rPr lang="en-US" dirty="0"/>
-              <a:t/>
-            </a:r>
             <a:endParaRPr lang="en-US" dirty="0"/>
           </a:p>
         </p:txBody>
@@ -866,10 +631,6 @@
           <a:bodyPr/>
           <a:lstStyle/>
           <a:p>
-            <a:r>
-              <a:rPr lang="en-US" dirty="0"/>
-              <a:t/>
-            </a:r>
             <a:endParaRPr lang="en-US" dirty="0"/>
           </a:p>
         </p:txBody>
@@ -954,10 +715,6 @@
           <a:bodyPr/>
           <a:lstStyle/>
           <a:p>
-            <a:r>
-              <a:rPr lang="en-US" dirty="0"/>
-              <a:t/>
-            </a:r>
             <a:endParaRPr lang="en-US" dirty="0"/>
           </a:p>
         </p:txBody>
@@ -1042,10 +799,6 @@
           <a:bodyPr/>
           <a:lstStyle/>
           <a:p>
-            <a:r>
-              <a:rPr lang="en-US" dirty="0"/>
-              <a:t/>
-            </a:r>
             <a:endParaRPr lang="en-US" dirty="0"/>
           </a:p>
         </p:txBody>
@@ -1130,10 +883,6 @@
           <a:bodyPr/>
           <a:lstStyle/>
           <a:p>
-            <a:r>
-              <a:rPr lang="en-US" dirty="0"/>
-              <a:t/>
-            </a:r>
             <a:endParaRPr lang="en-US" dirty="0"/>
           </a:p>
         </p:txBody>
@@ -1218,10 +967,6 @@
           <a:bodyPr/>
           <a:lstStyle/>
           <a:p>
-            <a:r>
-              <a:rPr lang="en-US" dirty="0"/>
-              <a:t/>
-            </a:r>
             <a:endParaRPr lang="en-US" dirty="0"/>
           </a:p>
         </p:txBody>
@@ -1306,10 +1051,6 @@
           <a:bodyPr/>
           <a:lstStyle/>
           <a:p>
-            <a:r>
-              <a:rPr lang="en-US" dirty="0"/>
-              <a:t/>
-            </a:r>
             <a:endParaRPr lang="en-US" dirty="0"/>
           </a:p>
         </p:txBody>
@@ -1394,10 +1135,6 @@
           <a:bodyPr/>
           <a:lstStyle/>
           <a:p>
-            <a:r>
-              <a:rPr lang="en-US" dirty="0"/>
-              <a:t/>
-            </a:r>
             <a:endParaRPr lang="en-US" dirty="0"/>
           </a:p>
         </p:txBody>
@@ -1482,10 +1219,6 @@
           <a:bodyPr/>
           <a:lstStyle/>
           <a:p>
-            <a:r>
-              <a:rPr lang="en-US" dirty="0"/>
-              <a:t/>
-            </a:r>
             <a:endParaRPr lang="en-US" dirty="0"/>
           </a:p>
         </p:txBody>
@@ -1570,10 +1303,6 @@
           <a:bodyPr/>
           <a:lstStyle/>
           <a:p>
-            <a:r>
-              <a:rPr lang="en-US" dirty="0"/>
-              <a:t/>
-            </a:r>
             <a:endParaRPr lang="en-US" dirty="0"/>
           </a:p>
         </p:txBody>
@@ -1658,10 +1387,6 @@
           <a:bodyPr/>
           <a:lstStyle/>
           <a:p>
-            <a:r>
-              <a:rPr lang="en-US" dirty="0"/>
-              <a:t/>
-            </a:r>
             <a:endParaRPr lang="en-US" dirty="0"/>
           </a:p>
         </p:txBody>
@@ -1746,10 +1471,6 @@
           <a:bodyPr/>
           <a:lstStyle/>
           <a:p>
-            <a:r>
-              <a:rPr lang="en-US" dirty="0"/>
-              <a:t/>
-            </a:r>
             <a:endParaRPr lang="en-US" dirty="0"/>
           </a:p>
         </p:txBody>
@@ -1823,6 +1544,11 @@
 <file path=ppt/slideMasters/slideMaster1.xml><?xml version="1.0" encoding="utf-8"?>
 <p:sldMaster xmlns:a="http://schemas.openxmlformats.org/drawingml/2006/main" xmlns:r="http://schemas.openxmlformats.org/officeDocument/2006/relationships" xmlns:p="http://schemas.openxmlformats.org/presentationml/2006/main">
   <p:cSld>
+    <p:bg>
+      <p:bgRef idx="1001">
+        <a:schemeClr val="bg1"/>
+      </p:bgRef>
+    </p:bg>
     <p:spTree>
       <p:nvGrpSpPr>
         <p:cNvPr id="1" name=""/>
@@ -2105,6 +1831,7 @@
         <a:solidFill>
           <a:srgbClr val="1E1B3A"/>
         </a:solidFill>
+        <a:effectLst/>
       </p:bgPr>
     </p:bg>
     <p:spTree>
@@ -2246,7 +1973,7 @@
           <a:bodyPr wrap="square" rtlCol="0" anchor="ctr"/>
           <a:lstStyle/>
           <a:p>
-            <a:pPr indent="0" marL="0">
+            <a:pPr marL="0" indent="0">
               <a:buNone/>
             </a:pPr>
             <a:r>
@@ -2285,7 +2012,7 @@
           <a:bodyPr wrap="square" rtlCol="0" anchor="ctr"/>
           <a:lstStyle/>
           <a:p>
-            <a:pPr indent="0" marL="0">
+            <a:pPr marL="0" indent="0">
               <a:buNone/>
             </a:pPr>
             <a:r>
@@ -2364,7 +2091,7 @@
           <a:bodyPr wrap="square" rtlCol="0" anchor="t"/>
           <a:lstStyle/>
           <a:p>
-            <a:pPr indent="0" marL="0">
+            <a:pPr marL="0" indent="0">
               <a:spcAft>
                 <a:spcPts val="1400"/>
               </a:spcAft>
@@ -2384,7 +2111,7 @@
             <a:endParaRPr lang="en-US" sz="1900" dirty="0"/>
           </a:p>
           <a:p>
-            <a:pPr indent="0" marL="0">
+            <a:pPr marL="0" indent="0">
               <a:spcAft>
                 <a:spcPts val="700"/>
               </a:spcAft>
@@ -2404,7 +2131,7 @@
             <a:endParaRPr lang="en-US" sz="1900" dirty="0"/>
           </a:p>
           <a:p>
-            <a:pPr indent="0" marL="0">
+            <a:pPr marL="0" indent="0">
               <a:spcAft>
                 <a:spcPts val="700"/>
               </a:spcAft>
@@ -2424,7 +2151,7 @@
             <a:endParaRPr lang="en-US" sz="1900" dirty="0"/>
           </a:p>
           <a:p>
-            <a:pPr indent="0" marL="0">
+            <a:pPr marL="0" indent="0">
               <a:spcAft>
                 <a:spcPts val="1200"/>
               </a:spcAft>
@@ -2469,15 +2196,15 @@
       </p:sp>
       <p:pic>
         <p:nvPicPr>
-          <p:cNvPr id="13" name="Image 0" descr="C:/Users/h/Desktop/Mini-project Fec/Mini-Project/hardware/imgs/FELCOM assembled.jpeg">    </p:cNvPr>
+          <p:cNvPr id="13" name="Image 0" descr="C:/Users/h/Desktop/Mini-project Fec/Mini-Project/hardware/imgs/FELCOM assembled.jpeg"/>
           <p:cNvPicPr>
             <a:picLocks noChangeAspect="1"/>
           </p:cNvPicPr>
           <p:nvPr/>
         </p:nvPicPr>
         <p:blipFill>
-          <a:blip r:embed="rId1"/>
-          <a:srcRect l="0" r="0" t="0" b="0"/>
+          <a:blip r:embed="rId3"/>
+          <a:srcRect/>
           <a:stretch/>
         </p:blipFill>
         <p:spPr>
@@ -2506,6 +2233,7 @@
         <a:solidFill>
           <a:srgbClr val="FFFFFF"/>
         </a:solidFill>
+        <a:effectLst/>
       </p:bgPr>
     </p:bg>
     <p:spTree>
@@ -2603,7 +2331,7 @@
           <a:bodyPr wrap="square" rtlCol="0" anchor="ctr"/>
           <a:lstStyle/>
           <a:p>
-            <a:pPr indent="0" marL="0">
+            <a:pPr marL="0" indent="0">
               <a:buNone/>
             </a:pPr>
             <a:r>
@@ -2669,7 +2397,7 @@
           <a:bodyPr wrap="square" rtlCol="0" anchor="ctr"/>
           <a:lstStyle/>
           <a:p>
-            <a:pPr indent="0" marL="0">
+            <a:pPr marL="0" indent="0">
               <a:buNone/>
             </a:pPr>
             <a:r>
@@ -2820,7 +2548,7 @@
           <a:bodyPr wrap="square" rtlCol="0" anchor="ctr"/>
           <a:lstStyle/>
           <a:p>
-            <a:pPr indent="0" marL="0">
+            <a:pPr marL="0" indent="0">
               <a:buNone/>
             </a:pPr>
             <a:r>
@@ -3006,7 +2734,7 @@
           <a:bodyPr wrap="square" rtlCol="0" anchor="ctr"/>
           <a:lstStyle/>
           <a:p>
-            <a:pPr algn="ctr" indent="0" marL="0">
+            <a:pPr marL="0" indent="0" algn="ctr">
               <a:buNone/>
             </a:pPr>
             <a:r>
@@ -3045,7 +2773,7 @@
           <a:bodyPr wrap="square" rtlCol="0" anchor="ctr"/>
           <a:lstStyle/>
           <a:p>
-            <a:pPr indent="0" marL="0">
+            <a:pPr marL="0" indent="0">
               <a:buNone/>
             </a:pPr>
             <a:r>
@@ -3079,6 +2807,7 @@
         <a:solidFill>
           <a:srgbClr val="FFFFFF"/>
         </a:solidFill>
+        <a:effectLst/>
       </p:bgPr>
     </p:bg>
     <p:spTree>
@@ -3176,7 +2905,7 @@
           <a:bodyPr wrap="square" rtlCol="0" anchor="ctr"/>
           <a:lstStyle/>
           <a:p>
-            <a:pPr indent="0" marL="0">
+            <a:pPr marL="0" indent="0">
               <a:buNone/>
             </a:pPr>
             <a:r>
@@ -3210,16 +2939,34 @@
         </p:nvGraphicFramePr>
         <p:xfrm>
           <a:off x="594360" y="1554480"/>
-          <a:ext cx="6035040" cy="914400"/>
+          <a:ext cx="6035040" cy="2267712"/>
         </p:xfrm>
         <a:graphic>
           <a:graphicData uri="http://schemas.openxmlformats.org/drawingml/2006/table">
             <a:tbl>
               <a:tblPr/>
               <a:tblGrid>
-                <a:gridCol w="2743200"/>
-                <a:gridCol w="1645920"/>
-                <a:gridCol w="1645920"/>
+                <a:gridCol w="2743200">
+                  <a:extLst>
+                    <a:ext uri="{9D8B030D-6E8A-4147-A177-3AD203B41FA5}">
+                      <a16:colId xmlns:a16="http://schemas.microsoft.com/office/drawing/2014/main" val="20000"/>
+                    </a:ext>
+                  </a:extLst>
+                </a:gridCol>
+                <a:gridCol w="1645920">
+                  <a:extLst>
+                    <a:ext uri="{9D8B030D-6E8A-4147-A177-3AD203B41FA5}">
+                      <a16:colId xmlns:a16="http://schemas.microsoft.com/office/drawing/2014/main" val="20001"/>
+                    </a:ext>
+                  </a:extLst>
+                </a:gridCol>
+                <a:gridCol w="1645920">
+                  <a:extLst>
+                    <a:ext uri="{9D8B030D-6E8A-4147-A177-3AD203B41FA5}">
+                      <a16:colId xmlns:a16="http://schemas.microsoft.com/office/drawing/2014/main" val="20002"/>
+                    </a:ext>
+                  </a:extLst>
+                </a:gridCol>
               </a:tblGrid>
               <a:tr h="566928">
                 <a:tc>
@@ -3227,7 +2974,7 @@
                     <a:bodyPr/>
                     <a:lstStyle/>
                     <a:p>
-                      <a:pPr algn="ctr" indent="0" marL="0">
+                      <a:pPr marL="0" indent="0" algn="ctr">
                         <a:buNone/>
                       </a:pPr>
                       <a:r>
@@ -3248,7 +2995,7 @@
                       </a:endParaRPr>
                     </a:p>
                   </a:txBody>
-                  <a:tcPr marL="91440" marR="91440" marT="45720" marB="45720" anchor="ctr">
+                  <a:tcPr anchor="ctr">
                     <a:lnL w="12700" cap="flat" cmpd="sng" algn="ctr">
                       <a:solidFill>
                         <a:srgbClr val="D7D3F0"/>
@@ -3295,7 +3042,7 @@
                     <a:bodyPr/>
                     <a:lstStyle/>
                     <a:p>
-                      <a:pPr algn="ctr" indent="0" marL="0">
+                      <a:pPr marL="0" indent="0" algn="ctr">
                         <a:buNone/>
                       </a:pPr>
                       <a:r>
@@ -3316,7 +3063,7 @@
                       </a:endParaRPr>
                     </a:p>
                   </a:txBody>
-                  <a:tcPr marL="91440" marR="91440" marT="45720" marB="45720" anchor="ctr">
+                  <a:tcPr anchor="ctr">
                     <a:lnL w="12700" cap="flat" cmpd="sng" algn="ctr">
                       <a:solidFill>
                         <a:srgbClr val="D7D3F0"/>
@@ -3363,7 +3110,7 @@
                     <a:bodyPr/>
                     <a:lstStyle/>
                     <a:p>
-                      <a:pPr algn="ctr" indent="0" marL="0">
+                      <a:pPr marL="0" indent="0" algn="ctr">
                         <a:buNone/>
                       </a:pPr>
                       <a:r>
@@ -3384,7 +3131,7 @@
                       </a:endParaRPr>
                     </a:p>
                   </a:txBody>
-                  <a:tcPr marL="91440" marR="91440" marT="45720" marB="45720" anchor="ctr">
+                  <a:tcPr anchor="ctr">
                     <a:lnL w="12700" cap="flat" cmpd="sng" algn="ctr">
                       <a:solidFill>
                         <a:srgbClr val="D7D3F0"/>
@@ -3426,6 +3173,11 @@
                     </a:solidFill>
                   </a:tcPr>
                 </a:tc>
+                <a:extLst>
+                  <a:ext uri="{0D108BD9-81ED-4DB2-BD59-A6C34878D82A}">
+                    <a16:rowId xmlns:a16="http://schemas.microsoft.com/office/drawing/2014/main" val="10000"/>
+                  </a:ext>
+                </a:extLst>
               </a:tr>
               <a:tr h="566928">
                 <a:tc>
@@ -3433,7 +3185,7 @@
                     <a:bodyPr/>
                     <a:lstStyle/>
                     <a:p>
-                      <a:pPr algn="l" indent="0" marL="0">
+                      <a:pPr marL="0" indent="0" algn="l">
                         <a:buNone/>
                       </a:pPr>
                       <a:r>
@@ -3454,7 +3206,7 @@
                       </a:endParaRPr>
                     </a:p>
                   </a:txBody>
-                  <a:tcPr marL="91440" marR="91440" marT="45720" marB="45720" anchor="ctr">
+                  <a:tcPr anchor="ctr">
                     <a:lnL w="12700" cap="flat" cmpd="sng" algn="ctr">
                       <a:solidFill>
                         <a:srgbClr val="D7D3F0"/>
@@ -3501,7 +3253,7 @@
                     <a:bodyPr/>
                     <a:lstStyle/>
                     <a:p>
-                      <a:pPr algn="ctr" indent="0" marL="0">
+                      <a:pPr marL="0" indent="0" algn="ctr">
                         <a:buNone/>
                       </a:pPr>
                       <a:r>
@@ -3522,7 +3274,7 @@
                       </a:endParaRPr>
                     </a:p>
                   </a:txBody>
-                  <a:tcPr marL="91440" marR="91440" marT="45720" marB="45720" anchor="ctr">
+                  <a:tcPr anchor="ctr">
                     <a:lnL w="12700" cap="flat" cmpd="sng" algn="ctr">
                       <a:solidFill>
                         <a:srgbClr val="D7D3F0"/>
@@ -3569,7 +3321,7 @@
                     <a:bodyPr/>
                     <a:lstStyle/>
                     <a:p>
-                      <a:pPr algn="ctr" indent="0" marL="0">
+                      <a:pPr marL="0" indent="0" algn="ctr">
                         <a:buNone/>
                       </a:pPr>
                       <a:r>
@@ -3590,7 +3342,7 @@
                       </a:endParaRPr>
                     </a:p>
                   </a:txBody>
-                  <a:tcPr marL="91440" marR="91440" marT="45720" marB="45720" anchor="ctr">
+                  <a:tcPr anchor="ctr">
                     <a:lnL w="12700" cap="flat" cmpd="sng" algn="ctr">
                       <a:solidFill>
                         <a:srgbClr val="D7D3F0"/>
@@ -3632,6 +3384,11 @@
                     </a:solidFill>
                   </a:tcPr>
                 </a:tc>
+                <a:extLst>
+                  <a:ext uri="{0D108BD9-81ED-4DB2-BD59-A6C34878D82A}">
+                    <a16:rowId xmlns:a16="http://schemas.microsoft.com/office/drawing/2014/main" val="10001"/>
+                  </a:ext>
+                </a:extLst>
               </a:tr>
               <a:tr h="566928">
                 <a:tc>
@@ -3639,7 +3396,7 @@
                     <a:bodyPr/>
                     <a:lstStyle/>
                     <a:p>
-                      <a:pPr algn="l" indent="0" marL="0">
+                      <a:pPr marL="0" indent="0" algn="l">
                         <a:buNone/>
                       </a:pPr>
                       <a:r>
@@ -3660,7 +3417,7 @@
                       </a:endParaRPr>
                     </a:p>
                   </a:txBody>
-                  <a:tcPr marL="91440" marR="91440" marT="45720" marB="45720" anchor="ctr">
+                  <a:tcPr anchor="ctr">
                     <a:lnL w="12700" cap="flat" cmpd="sng" algn="ctr">
                       <a:solidFill>
                         <a:srgbClr val="D7D3F0"/>
@@ -3707,7 +3464,7 @@
                     <a:bodyPr/>
                     <a:lstStyle/>
                     <a:p>
-                      <a:pPr algn="ctr" indent="0" marL="0">
+                      <a:pPr marL="0" indent="0" algn="ctr">
                         <a:buNone/>
                       </a:pPr>
                       <a:r>
@@ -3728,7 +3485,7 @@
                       </a:endParaRPr>
                     </a:p>
                   </a:txBody>
-                  <a:tcPr marL="91440" marR="91440" marT="45720" marB="45720" anchor="ctr">
+                  <a:tcPr anchor="ctr">
                     <a:lnL w="12700" cap="flat" cmpd="sng" algn="ctr">
                       <a:solidFill>
                         <a:srgbClr val="D7D3F0"/>
@@ -3775,7 +3532,7 @@
                     <a:bodyPr/>
                     <a:lstStyle/>
                     <a:p>
-                      <a:pPr algn="ctr" indent="0" marL="0">
+                      <a:pPr marL="0" indent="0" algn="ctr">
                         <a:buNone/>
                       </a:pPr>
                       <a:r>
@@ -3796,7 +3553,7 @@
                       </a:endParaRPr>
                     </a:p>
                   </a:txBody>
-                  <a:tcPr marL="91440" marR="91440" marT="45720" marB="45720" anchor="ctr">
+                  <a:tcPr anchor="ctr">
                     <a:lnL w="12700" cap="flat" cmpd="sng" algn="ctr">
                       <a:solidFill>
                         <a:srgbClr val="D7D3F0"/>
@@ -3838,6 +3595,11 @@
                     </a:solidFill>
                   </a:tcPr>
                 </a:tc>
+                <a:extLst>
+                  <a:ext uri="{0D108BD9-81ED-4DB2-BD59-A6C34878D82A}">
+                    <a16:rowId xmlns:a16="http://schemas.microsoft.com/office/drawing/2014/main" val="10002"/>
+                  </a:ext>
+                </a:extLst>
               </a:tr>
               <a:tr h="566928">
                 <a:tc>
@@ -3845,7 +3607,7 @@
                     <a:bodyPr/>
                     <a:lstStyle/>
                     <a:p>
-                      <a:pPr algn="l" indent="0" marL="0">
+                      <a:pPr marL="0" indent="0" algn="l">
                         <a:buNone/>
                       </a:pPr>
                       <a:r>
@@ -3866,7 +3628,7 @@
                       </a:endParaRPr>
                     </a:p>
                   </a:txBody>
-                  <a:tcPr marL="91440" marR="91440" marT="45720" marB="45720" anchor="ctr">
+                  <a:tcPr anchor="ctr">
                     <a:lnL w="12700" cap="flat" cmpd="sng" algn="ctr">
                       <a:solidFill>
                         <a:srgbClr val="D7D3F0"/>
@@ -3913,7 +3675,7 @@
                     <a:bodyPr/>
                     <a:lstStyle/>
                     <a:p>
-                      <a:pPr algn="ctr" indent="0" marL="0">
+                      <a:pPr marL="0" indent="0" algn="ctr">
                         <a:buNone/>
                       </a:pPr>
                       <a:r>
@@ -3934,7 +3696,7 @@
                       </a:endParaRPr>
                     </a:p>
                   </a:txBody>
-                  <a:tcPr marL="91440" marR="91440" marT="45720" marB="45720" anchor="ctr">
+                  <a:tcPr anchor="ctr">
                     <a:lnL w="12700" cap="flat" cmpd="sng" algn="ctr">
                       <a:solidFill>
                         <a:srgbClr val="D7D3F0"/>
@@ -3981,7 +3743,7 @@
                     <a:bodyPr/>
                     <a:lstStyle/>
                     <a:p>
-                      <a:pPr algn="ctr" indent="0" marL="0">
+                      <a:pPr marL="0" indent="0" algn="ctr">
                         <a:buNone/>
                       </a:pPr>
                       <a:r>
@@ -4002,7 +3764,7 @@
                       </a:endParaRPr>
                     </a:p>
                   </a:txBody>
-                  <a:tcPr marL="91440" marR="91440" marT="45720" marB="45720" anchor="ctr">
+                  <a:tcPr anchor="ctr">
                     <a:lnL w="12700" cap="flat" cmpd="sng" algn="ctr">
                       <a:solidFill>
                         <a:srgbClr val="D7D3F0"/>
@@ -4044,6 +3806,11 @@
                     </a:solidFill>
                   </a:tcPr>
                 </a:tc>
+                <a:extLst>
+                  <a:ext uri="{0D108BD9-81ED-4DB2-BD59-A6C34878D82A}">
+                    <a16:rowId xmlns:a16="http://schemas.microsoft.com/office/drawing/2014/main" val="10003"/>
+                  </a:ext>
+                </a:extLst>
               </a:tr>
             </a:tbl>
           </a:graphicData>
@@ -4097,7 +3864,7 @@
           <a:bodyPr wrap="square" rtlCol="0" anchor="ctr"/>
           <a:lstStyle/>
           <a:p>
-            <a:pPr indent="0" marL="0">
+            <a:pPr marL="0" indent="0">
               <a:buNone/>
             </a:pPr>
             <a:r>
@@ -4248,7 +4015,7 @@
           <a:bodyPr wrap="square" rtlCol="0" anchor="ctr"/>
           <a:lstStyle/>
           <a:p>
-            <a:pPr indent="0" marL="0">
+            <a:pPr marL="0" indent="0">
               <a:buNone/>
             </a:pPr>
             <a:r>
@@ -4268,7 +4035,7 @@
       </p:sp>
       <p:sp>
         <p:nvSpPr>
-          <p:cNvPr id="12" name="Shape 9"/>
+          <p:cNvPr id="6" name="Shape 9"/>
           <p:cNvSpPr/>
           <p:nvPr/>
         </p:nvSpPr>
@@ -4307,7 +4074,7 @@
           <a:bodyPr wrap="square" rtlCol="0" anchor="ctr"/>
           <a:lstStyle/>
           <a:p>
-            <a:pPr algn="ctr" indent="0" marL="0">
+            <a:pPr marL="0" indent="0" algn="ctr">
               <a:buNone/>
             </a:pPr>
             <a:r>
@@ -4346,7 +4113,7 @@
           <a:bodyPr wrap="square" rtlCol="0" anchor="ctr"/>
           <a:lstStyle/>
           <a:p>
-            <a:pPr indent="0" marL="0">
+            <a:pPr marL="0" indent="0">
               <a:buNone/>
             </a:pPr>
             <a:r>
@@ -4380,6 +4147,7 @@
         <a:solidFill>
           <a:srgbClr val="FFFFFF"/>
         </a:solidFill>
+        <a:effectLst/>
       </p:bgPr>
     </p:bg>
     <p:spTree>
@@ -4477,7 +4245,7 @@
           <a:bodyPr wrap="square" rtlCol="0" anchor="ctr"/>
           <a:lstStyle/>
           <a:p>
-            <a:pPr indent="0" marL="0">
+            <a:pPr marL="0" indent="0">
               <a:buNone/>
             </a:pPr>
             <a:r>
@@ -4543,7 +4311,7 @@
           <a:bodyPr wrap="square" rtlCol="0" anchor="ctr"/>
           <a:lstStyle/>
           <a:p>
-            <a:pPr indent="0" marL="0">
+            <a:pPr marL="0" indent="0">
               <a:buNone/>
             </a:pPr>
             <a:r>
@@ -4694,7 +4462,7 @@
           <a:bodyPr wrap="square" rtlCol="0" anchor="ctr"/>
           <a:lstStyle/>
           <a:p>
-            <a:pPr indent="0" marL="0">
+            <a:pPr marL="0" indent="0">
               <a:buNone/>
             </a:pPr>
             <a:r>
@@ -4838,7 +4606,7 @@
           <a:bodyPr wrap="square" rtlCol="0" anchor="ctr"/>
           <a:lstStyle/>
           <a:p>
-            <a:pPr algn="ctr" indent="0" marL="0">
+            <a:pPr marL="0" indent="0" algn="ctr">
               <a:buNone/>
             </a:pPr>
             <a:r>
@@ -4877,7 +4645,7 @@
           <a:bodyPr wrap="square" rtlCol="0" anchor="ctr"/>
           <a:lstStyle/>
           <a:p>
-            <a:pPr indent="0" marL="0">
+            <a:pPr marL="0" indent="0">
               <a:buNone/>
             </a:pPr>
             <a:r>
@@ -4911,6 +4679,7 @@
         <a:solidFill>
           <a:srgbClr val="1E1B3A"/>
         </a:solidFill>
+        <a:effectLst/>
       </p:bgPr>
     </p:bg>
     <p:spTree>
@@ -5030,7 +4799,7 @@
           <a:bodyPr wrap="square" rtlCol="0" anchor="ctr"/>
           <a:lstStyle/>
           <a:p>
-            <a:pPr indent="0" marL="0">
+            <a:pPr marL="0" indent="0">
               <a:buNone/>
             </a:pPr>
             <a:r>
@@ -5195,7 +4964,7 @@
           <a:bodyPr wrap="square" rtlCol="0" anchor="ctr"/>
           <a:lstStyle/>
           <a:p>
-            <a:pPr indent="0" marL="0">
+            <a:pPr marL="0" indent="0">
               <a:buNone/>
             </a:pPr>
             <a:r>
@@ -5209,9 +4978,6 @@
               </a:rPr>
               <a:t>Future work: </a:t>
             </a:r>
-            <a:pPr indent="0" marL="0">
-              <a:buNone/>
-            </a:pPr>
             <a:r>
               <a:rPr lang="en-US" sz="2000" dirty="0">
                 <a:solidFill>
@@ -5251,15 +5017,15 @@
       </p:sp>
       <p:pic>
         <p:nvPicPr>
-          <p:cNvPr id="11" name="Image 0" descr="C:/Users/h/Desktop/Mini-project Fec/Mini-Project/hardware/imgs/FELCOM assembled.jpeg">    </p:cNvPr>
+          <p:cNvPr id="11" name="Image 0" descr="C:/Users/h/Desktop/Mini-project Fec/Mini-Project/hardware/imgs/FELCOM assembled.jpeg"/>
           <p:cNvPicPr>
             <a:picLocks noChangeAspect="1"/>
           </p:cNvPicPr>
           <p:nvPr/>
         </p:nvPicPr>
         <p:blipFill>
-          <a:blip r:embed="rId1"/>
-          <a:srcRect l="0" r="0" t="0" b="0"/>
+          <a:blip r:embed="rId3"/>
+          <a:srcRect/>
           <a:stretch/>
         </p:blipFill>
         <p:spPr>
@@ -5288,6 +5054,7 @@
         <a:solidFill>
           <a:srgbClr val="FFFFFF"/>
         </a:solidFill>
+        <a:effectLst/>
       </p:bgPr>
     </p:bg>
     <p:spTree>
@@ -5385,7 +5152,7 @@
           <a:bodyPr wrap="square" rtlCol="0" anchor="ctr"/>
           <a:lstStyle/>
           <a:p>
-            <a:pPr indent="0" marL="0">
+            <a:pPr marL="0" indent="0">
               <a:buNone/>
             </a:pPr>
             <a:r>
@@ -5424,7 +5191,7 @@
           <a:bodyPr wrap="square" rtlCol="0" anchor="t"/>
           <a:lstStyle/>
           <a:p>
-            <a:pPr indent="0" marL="0">
+            <a:pPr marL="0" indent="0">
               <a:buNone/>
             </a:pPr>
             <a:r>
@@ -5438,13 +5205,35 @@
               </a:rPr>
               <a:t>[1]  </a:t>
             </a:r>
-            <a:pPr indent="0" marL="0">
-              <a:spcAft>
-                <a:spcPts val="1200"/>
-              </a:spcAft>
+            <a:r>
+              <a:rPr lang="en-US" sz="1700" dirty="0">
+                <a:solidFill>
+                  <a:srgbClr val="2A2A33"/>
+                </a:solidFill>
+                <a:latin typeface="Segoe UI" pitchFamily="34" charset="0"/>
+                <a:ea typeface="Segoe UI" pitchFamily="34" charset="-122"/>
+                <a:cs typeface="Segoe UI" pitchFamily="34" charset="-120"/>
+              </a:rPr>
+              <a:t>Nordic Semiconductor, nRF24L01+ Transceiver Product Specification.</a:t>
+            </a:r>
+            <a:endParaRPr lang="en-US" sz="1700" dirty="0"/>
+          </a:p>
+          <a:p>
+            <a:pPr marL="0" indent="0">
               <a:buNone/>
             </a:pPr>
             <a:r>
+              <a:rPr lang="en-US" sz="1700" b="1" dirty="0">
+                <a:solidFill>
+                  <a:srgbClr val="4F46E5"/>
+                </a:solidFill>
+                <a:latin typeface="Segoe UI" pitchFamily="34" charset="0"/>
+                <a:ea typeface="Segoe UI" pitchFamily="34" charset="-122"/>
+                <a:cs typeface="Segoe UI" pitchFamily="34" charset="-120"/>
+              </a:rPr>
+              <a:t>[2]  </a:t>
+            </a:r>
+            <a:r>
               <a:rPr lang="en-US" sz="1700" dirty="0">
                 <a:solidFill>
                   <a:srgbClr val="2A2A33"/>
@@ -5453,12 +5242,12 @@
                 <a:ea typeface="Segoe UI" pitchFamily="34" charset="-122"/>
                 <a:cs typeface="Segoe UI" pitchFamily="34" charset="-120"/>
               </a:rPr>
-              <a:t>Nordic Semiconductor, nRF24L01+ Transceiver Product Specification.</a:t>
+              <a:t>Espressif Systems, ESP32 Technical Reference Manual and Datasheet.</a:t>
             </a:r>
             <a:endParaRPr lang="en-US" sz="1700" dirty="0"/>
           </a:p>
           <a:p>
-            <a:pPr indent="0" marL="0">
+            <a:pPr marL="0" indent="0">
               <a:buNone/>
             </a:pPr>
             <a:r>
@@ -5470,15 +5259,37 @@
                 <a:ea typeface="Segoe UI" pitchFamily="34" charset="-122"/>
                 <a:cs typeface="Segoe UI" pitchFamily="34" charset="-120"/>
               </a:rPr>
-              <a:t>[2]  </a:t>
-            </a:r>
-            <a:pPr indent="0" marL="0">
-              <a:spcAft>
-                <a:spcPts val="1200"/>
-              </a:spcAft>
+              <a:t>[3]  </a:t>
+            </a:r>
+            <a:r>
+              <a:rPr lang="en-US" sz="1700" dirty="0">
+                <a:solidFill>
+                  <a:srgbClr val="2A2A33"/>
+                </a:solidFill>
+                <a:latin typeface="Segoe UI" pitchFamily="34" charset="0"/>
+                <a:ea typeface="Segoe UI" pitchFamily="34" charset="-122"/>
+                <a:cs typeface="Segoe UI" pitchFamily="34" charset="-120"/>
+              </a:rPr>
+              <a:t>InvenSense (TDK), INMP441 I2S Microphone Datasheet.</a:t>
+            </a:r>
+            <a:endParaRPr lang="en-US" sz="1700" dirty="0"/>
+          </a:p>
+          <a:p>
+            <a:pPr marL="0" indent="0">
               <a:buNone/>
             </a:pPr>
             <a:r>
+              <a:rPr lang="en-US" sz="1700" b="1" dirty="0">
+                <a:solidFill>
+                  <a:srgbClr val="4F46E5"/>
+                </a:solidFill>
+                <a:latin typeface="Segoe UI" pitchFamily="34" charset="0"/>
+                <a:ea typeface="Segoe UI" pitchFamily="34" charset="-122"/>
+                <a:cs typeface="Segoe UI" pitchFamily="34" charset="-120"/>
+              </a:rPr>
+              <a:t>[4]  </a:t>
+            </a:r>
+            <a:r>
               <a:rPr lang="en-US" sz="1700" dirty="0">
                 <a:solidFill>
                   <a:srgbClr val="2A2A33"/>
@@ -5487,12 +5298,12 @@
                 <a:ea typeface="Segoe UI" pitchFamily="34" charset="-122"/>
                 <a:cs typeface="Segoe UI" pitchFamily="34" charset="-120"/>
               </a:rPr>
-              <a:t>Espressif Systems, ESP32 Technical Reference Manual and Datasheet.</a:t>
+              <a:t>Texas Instruments, LM386 Audio Power Amplifier Datasheet.</a:t>
             </a:r>
             <a:endParaRPr lang="en-US" sz="1700" dirty="0"/>
           </a:p>
           <a:p>
-            <a:pPr indent="0" marL="0">
+            <a:pPr marL="0" indent="0">
               <a:buNone/>
             </a:pPr>
             <a:r>
@@ -5504,15 +5315,37 @@
                 <a:ea typeface="Segoe UI" pitchFamily="34" charset="-122"/>
                 <a:cs typeface="Segoe UI" pitchFamily="34" charset="-120"/>
               </a:rPr>
-              <a:t>[3]  </a:t>
-            </a:r>
-            <a:pPr indent="0" marL="0">
-              <a:spcAft>
-                <a:spcPts val="1200"/>
-              </a:spcAft>
+              <a:t>[5]  </a:t>
+            </a:r>
+            <a:r>
+              <a:rPr lang="en-US" sz="1700" dirty="0">
+                <a:solidFill>
+                  <a:srgbClr val="2A2A33"/>
+                </a:solidFill>
+                <a:latin typeface="Segoe UI" pitchFamily="34" charset="0"/>
+                <a:ea typeface="Segoe UI" pitchFamily="34" charset="-122"/>
+                <a:cs typeface="Segoe UI" pitchFamily="34" charset="-120"/>
+              </a:rPr>
+              <a:t>TMRh20, RF24: Optimized driver for nRF24L01(+) (open source).</a:t>
+            </a:r>
+            <a:endParaRPr lang="en-US" sz="1700" dirty="0"/>
+          </a:p>
+          <a:p>
+            <a:pPr marL="0" indent="0">
               <a:buNone/>
             </a:pPr>
             <a:r>
+              <a:rPr lang="en-US" sz="1700" b="1" dirty="0">
+                <a:solidFill>
+                  <a:srgbClr val="4F46E5"/>
+                </a:solidFill>
+                <a:latin typeface="Segoe UI" pitchFamily="34" charset="0"/>
+                <a:ea typeface="Segoe UI" pitchFamily="34" charset="-122"/>
+                <a:cs typeface="Segoe UI" pitchFamily="34" charset="-120"/>
+              </a:rPr>
+              <a:t>[6]  </a:t>
+            </a:r>
+            <a:r>
               <a:rPr lang="en-US" sz="1700" dirty="0">
                 <a:solidFill>
                   <a:srgbClr val="2A2A33"/>
@@ -5521,12 +5354,12 @@
                 <a:ea typeface="Segoe UI" pitchFamily="34" charset="-122"/>
                 <a:cs typeface="Segoe UI" pitchFamily="34" charset="-120"/>
               </a:rPr>
-              <a:t>InvenSense (TDK), INMP441 I2S Microphone Datasheet.</a:t>
+              <a:t>Lamarr &amp; Antheil, Secret Communication System, U.S. Patent 2,292,387, 1942.</a:t>
             </a:r>
             <a:endParaRPr lang="en-US" sz="1700" dirty="0"/>
           </a:p>
           <a:p>
-            <a:pPr indent="0" marL="0">
+            <a:pPr marL="0" indent="0">
               <a:buNone/>
             </a:pPr>
             <a:r>
@@ -5538,32 +5371,26 @@
                 <a:ea typeface="Segoe UI" pitchFamily="34" charset="-122"/>
                 <a:cs typeface="Segoe UI" pitchFamily="34" charset="-120"/>
               </a:rPr>
-              <a:t>[4]  </a:t>
-            </a:r>
-            <a:pPr indent="0" marL="0">
-              <a:spcAft>
-                <a:spcPts val="1200"/>
-              </a:spcAft>
+              <a:t>[7]  </a:t>
+            </a:r>
+            <a:r>
+              <a:rPr lang="en-US" sz="1700" dirty="0">
+                <a:solidFill>
+                  <a:srgbClr val="2A2A33"/>
+                </a:solidFill>
+                <a:latin typeface="Segoe UI" pitchFamily="34" charset="0"/>
+                <a:ea typeface="Segoe UI" pitchFamily="34" charset="-122"/>
+                <a:cs typeface="Segoe UI" pitchFamily="34" charset="-120"/>
+              </a:rPr>
+              <a:t>ITU-T Recommendation V.41, CRC-16-CCITT.</a:t>
+            </a:r>
+            <a:endParaRPr lang="en-US" sz="1700" dirty="0"/>
+          </a:p>
+          <a:p>
+            <a:pPr marL="0" indent="0">
               <a:buNone/>
             </a:pPr>
             <a:r>
-              <a:rPr lang="en-US" sz="1700" dirty="0">
-                <a:solidFill>
-                  <a:srgbClr val="2A2A33"/>
-                </a:solidFill>
-                <a:latin typeface="Segoe UI" pitchFamily="34" charset="0"/>
-                <a:ea typeface="Segoe UI" pitchFamily="34" charset="-122"/>
-                <a:cs typeface="Segoe UI" pitchFamily="34" charset="-120"/>
-              </a:rPr>
-              <a:t>Texas Instruments, LM386 Audio Power Amplifier Datasheet.</a:t>
-            </a:r>
-            <a:endParaRPr lang="en-US" sz="1700" dirty="0"/>
-          </a:p>
-          <a:p>
-            <a:pPr indent="0" marL="0">
-              <a:buNone/>
-            </a:pPr>
-            <a:r>
               <a:rPr lang="en-US" sz="1700" b="1" dirty="0">
                 <a:solidFill>
                   <a:srgbClr val="4F46E5"/>
@@ -5572,116 +5399,8 @@
                 <a:ea typeface="Segoe UI" pitchFamily="34" charset="-122"/>
                 <a:cs typeface="Segoe UI" pitchFamily="34" charset="-120"/>
               </a:rPr>
-              <a:t>[5]  </a:t>
-            </a:r>
-            <a:pPr indent="0" marL="0">
-              <a:spcAft>
-                <a:spcPts val="1200"/>
-              </a:spcAft>
-              <a:buNone/>
-            </a:pPr>
-            <a:r>
-              <a:rPr lang="en-US" sz="1700" dirty="0">
-                <a:solidFill>
-                  <a:srgbClr val="2A2A33"/>
-                </a:solidFill>
-                <a:latin typeface="Segoe UI" pitchFamily="34" charset="0"/>
-                <a:ea typeface="Segoe UI" pitchFamily="34" charset="-122"/>
-                <a:cs typeface="Segoe UI" pitchFamily="34" charset="-120"/>
-              </a:rPr>
-              <a:t>TMRh20, RF24: Optimized driver for nRF24L01(+) (open source).</a:t>
-            </a:r>
-            <a:endParaRPr lang="en-US" sz="1700" dirty="0"/>
-          </a:p>
-          <a:p>
-            <a:pPr indent="0" marL="0">
-              <a:buNone/>
-            </a:pPr>
-            <a:r>
-              <a:rPr lang="en-US" sz="1700" b="1" dirty="0">
-                <a:solidFill>
-                  <a:srgbClr val="4F46E5"/>
-                </a:solidFill>
-                <a:latin typeface="Segoe UI" pitchFamily="34" charset="0"/>
-                <a:ea typeface="Segoe UI" pitchFamily="34" charset="-122"/>
-                <a:cs typeface="Segoe UI" pitchFamily="34" charset="-120"/>
-              </a:rPr>
-              <a:t>[6]  </a:t>
-            </a:r>
-            <a:pPr indent="0" marL="0">
-              <a:spcAft>
-                <a:spcPts val="1200"/>
-              </a:spcAft>
-              <a:buNone/>
-            </a:pPr>
-            <a:r>
-              <a:rPr lang="en-US" sz="1700" dirty="0">
-                <a:solidFill>
-                  <a:srgbClr val="2A2A33"/>
-                </a:solidFill>
-                <a:latin typeface="Segoe UI" pitchFamily="34" charset="0"/>
-                <a:ea typeface="Segoe UI" pitchFamily="34" charset="-122"/>
-                <a:cs typeface="Segoe UI" pitchFamily="34" charset="-120"/>
-              </a:rPr>
-              <a:t>Lamarr &amp; Antheil, Secret Communication System, U.S. Patent 2,292,387, 1942.</a:t>
-            </a:r>
-            <a:endParaRPr lang="en-US" sz="1700" dirty="0"/>
-          </a:p>
-          <a:p>
-            <a:pPr indent="0" marL="0">
-              <a:buNone/>
-            </a:pPr>
-            <a:r>
-              <a:rPr lang="en-US" sz="1700" b="1" dirty="0">
-                <a:solidFill>
-                  <a:srgbClr val="4F46E5"/>
-                </a:solidFill>
-                <a:latin typeface="Segoe UI" pitchFamily="34" charset="0"/>
-                <a:ea typeface="Segoe UI" pitchFamily="34" charset="-122"/>
-                <a:cs typeface="Segoe UI" pitchFamily="34" charset="-120"/>
-              </a:rPr>
-              <a:t>[7]  </a:t>
-            </a:r>
-            <a:pPr indent="0" marL="0">
-              <a:spcAft>
-                <a:spcPts val="1200"/>
-              </a:spcAft>
-              <a:buNone/>
-            </a:pPr>
-            <a:r>
-              <a:rPr lang="en-US" sz="1700" dirty="0">
-                <a:solidFill>
-                  <a:srgbClr val="2A2A33"/>
-                </a:solidFill>
-                <a:latin typeface="Segoe UI" pitchFamily="34" charset="0"/>
-                <a:ea typeface="Segoe UI" pitchFamily="34" charset="-122"/>
-                <a:cs typeface="Segoe UI" pitchFamily="34" charset="-120"/>
-              </a:rPr>
-              <a:t>ITU-T Recommendation V.41, CRC-16-CCITT.</a:t>
-            </a:r>
-            <a:endParaRPr lang="en-US" sz="1700" dirty="0"/>
-          </a:p>
-          <a:p>
-            <a:pPr indent="0" marL="0">
-              <a:buNone/>
-            </a:pPr>
-            <a:r>
-              <a:rPr lang="en-US" sz="1700" b="1" dirty="0">
-                <a:solidFill>
-                  <a:srgbClr val="4F46E5"/>
-                </a:solidFill>
-                <a:latin typeface="Segoe UI" pitchFamily="34" charset="0"/>
-                <a:ea typeface="Segoe UI" pitchFamily="34" charset="-122"/>
-                <a:cs typeface="Segoe UI" pitchFamily="34" charset="-120"/>
-              </a:rPr>
               <a:t>[8]  </a:t>
             </a:r>
-            <a:pPr indent="0" marL="0">
-              <a:spcAft>
-                <a:spcPts val="1200"/>
-              </a:spcAft>
-              <a:buNone/>
-            </a:pPr>
             <a:r>
               <a:rPr lang="en-US" sz="1700" dirty="0">
                 <a:solidFill>
@@ -5738,7 +5457,7 @@
           <a:bodyPr wrap="square" rtlCol="0" anchor="ctr"/>
           <a:lstStyle/>
           <a:p>
-            <a:pPr algn="ctr" indent="0" marL="0">
+            <a:pPr marL="0" indent="0" algn="ctr">
               <a:buNone/>
             </a:pPr>
             <a:r>
@@ -5777,7 +5496,7 @@
           <a:bodyPr wrap="square" rtlCol="0" anchor="ctr"/>
           <a:lstStyle/>
           <a:p>
-            <a:pPr indent="0" marL="0">
+            <a:pPr marL="0" indent="0">
               <a:buNone/>
             </a:pPr>
             <a:r>
@@ -5811,6 +5530,7 @@
         <a:solidFill>
           <a:srgbClr val="1E1B3A"/>
         </a:solidFill>
+        <a:effectLst/>
       </p:bgPr>
     </p:bg>
     <p:spTree>
@@ -5952,7 +5672,7 @@
           <a:bodyPr wrap="square" rtlCol="0" anchor="ctr"/>
           <a:lstStyle/>
           <a:p>
-            <a:pPr indent="0" marL="0">
+            <a:pPr marL="0" indent="0">
               <a:buNone/>
             </a:pPr>
             <a:r>
@@ -5998,7 +5718,7 @@
         </p:nvSpPr>
         <p:spPr>
           <a:xfrm>
-            <a:off x="822960" y="2651760"/>
+            <a:off x="822960" y="2560320"/>
             <a:ext cx="10424160" cy="2011680"/>
           </a:xfrm>
           <a:prstGeom prst="rect">
@@ -6011,46 +5731,137 @@
           <a:bodyPr wrap="square" rtlCol="0" anchor="t"/>
           <a:lstStyle/>
           <a:p>
-            <a:pPr marL="254000" indent="-254000">
+            <a:pPr>
               <a:spcAft>
                 <a:spcPts val="1200"/>
               </a:spcAft>
               <a:buSzPct val="100000"/>
-              <a:buChar char="•"/>
-            </a:pPr>
-            <a:r>
-              <a:rPr lang="en-US" sz="2300" dirty="0">
-                <a:solidFill>
-                  <a:srgbClr val="FFFFFF"/>
-                </a:solidFill>
-                <a:latin typeface="Segoe UI" pitchFamily="34" charset="0"/>
-                <a:ea typeface="Segoe UI" pitchFamily="34" charset="-122"/>
-                <a:cs typeface="Segoe UI" pitchFamily="34" charset="-120"/>
-              </a:rPr>
-              <a:t>We thank our supervisor, Dr. Hadi Jerdek, for his guidance throughout the project.</a:t>
-            </a:r>
-            <a:endParaRPr lang="en-US" sz="2300" dirty="0"/>
-          </a:p>
-          <a:p>
-            <a:pPr marL="254000" indent="-254000">
+            </a:pPr>
+            <a:r>
+              <a:rPr lang="en-US" sz="2400" dirty="0">
+                <a:solidFill>
+                  <a:schemeClr val="bg1"/>
+                </a:solidFill>
+              </a:rPr>
+              <a:t>We would like to </a:t>
+            </a:r>
+            <a:r>
+              <a:rPr lang="en-US" sz="2400" dirty="0" smtClean="0">
+                <a:solidFill>
+                  <a:schemeClr val="bg1"/>
+                </a:solidFill>
+              </a:rPr>
+              <a:t>thank Dr</a:t>
+            </a:r>
+            <a:r>
+              <a:rPr lang="en-US" sz="2400" dirty="0">
+                <a:solidFill>
+                  <a:schemeClr val="bg1"/>
+                </a:solidFill>
+              </a:rPr>
+              <a:t>. </a:t>
+            </a:r>
+            <a:r>
+              <a:rPr lang="en-US" sz="2400" dirty="0" err="1">
+                <a:solidFill>
+                  <a:schemeClr val="bg1"/>
+                </a:solidFill>
+              </a:rPr>
+              <a:t>Hadi</a:t>
+            </a:r>
+            <a:r>
+              <a:rPr lang="en-US" sz="2400" dirty="0">
+                <a:solidFill>
+                  <a:schemeClr val="bg1"/>
+                </a:solidFill>
+              </a:rPr>
+              <a:t> </a:t>
+            </a:r>
+            <a:r>
+              <a:rPr lang="en-US" sz="2400" dirty="0" err="1">
+                <a:solidFill>
+                  <a:schemeClr val="bg1"/>
+                </a:solidFill>
+              </a:rPr>
+              <a:t>Jerdek</a:t>
+            </a:r>
+            <a:r>
+              <a:rPr lang="en-US" sz="2400" dirty="0">
+                <a:solidFill>
+                  <a:schemeClr val="bg1"/>
+                </a:solidFill>
+              </a:rPr>
+              <a:t>, for his supervision of this project and for the valuable knowledge he shared with us through the telecommunications courses he taught</a:t>
+            </a:r>
+            <a:r>
+              <a:rPr lang="en-US" sz="2400" dirty="0" smtClean="0">
+                <a:solidFill>
+                  <a:schemeClr val="bg1"/>
+                </a:solidFill>
+              </a:rPr>
+              <a:t>.</a:t>
+            </a:r>
+          </a:p>
+          <a:p>
+            <a:pPr>
               <a:spcAft>
                 <a:spcPts val="1200"/>
               </a:spcAft>
               <a:buSzPct val="100000"/>
-              <a:buChar char="•"/>
-            </a:pPr>
-            <a:r>
-              <a:rPr lang="en-US" sz="2300" dirty="0">
-                <a:solidFill>
-                  <a:srgbClr val="FFFFFF"/>
-                </a:solidFill>
-                <a:latin typeface="Segoe UI" pitchFamily="34" charset="0"/>
-                <a:ea typeface="Segoe UI" pitchFamily="34" charset="-122"/>
-                <a:cs typeface="Segoe UI" pitchFamily="34" charset="-120"/>
-              </a:rPr>
-              <a:t>We thank the Lebanese University, Faculty of Engineering, for its support and resources.</a:t>
-            </a:r>
-            <a:endParaRPr lang="en-US" sz="2300" dirty="0"/>
+            </a:pPr>
+            <a:r>
+              <a:rPr lang="en-US" sz="2400" dirty="0">
+                <a:solidFill>
+                  <a:schemeClr val="bg1"/>
+                </a:solidFill>
+              </a:rPr>
+              <a:t>We </a:t>
+            </a:r>
+            <a:r>
+              <a:rPr lang="en-US" sz="2400" dirty="0" smtClean="0">
+                <a:solidFill>
+                  <a:schemeClr val="bg1"/>
+                </a:solidFill>
+              </a:rPr>
+              <a:t>also thank </a:t>
+            </a:r>
+            <a:r>
+              <a:rPr lang="en-US" sz="2400" dirty="0">
+                <a:solidFill>
+                  <a:schemeClr val="bg1"/>
+                </a:solidFill>
+              </a:rPr>
+              <a:t>the </a:t>
+            </a:r>
+            <a:r>
+              <a:rPr lang="en-US" sz="2400" dirty="0" smtClean="0">
+                <a:solidFill>
+                  <a:schemeClr val="bg1"/>
+                </a:solidFill>
+              </a:rPr>
+              <a:t>Lebanese University </a:t>
+            </a:r>
+            <a:r>
+              <a:rPr lang="en-US" sz="2400" dirty="0">
+                <a:solidFill>
+                  <a:schemeClr val="bg1"/>
+                </a:solidFill>
+              </a:rPr>
+              <a:t>for allowing us to use its open air to test our </a:t>
+            </a:r>
+            <a:r>
+              <a:rPr lang="en-US" sz="2400" dirty="0" smtClean="0">
+                <a:solidFill>
+                  <a:schemeClr val="bg1"/>
+                </a:solidFill>
+              </a:rPr>
+              <a:t>devices.</a:t>
+            </a:r>
+            <a:endParaRPr lang="en-US" sz="2300" dirty="0">
+              <a:solidFill>
+                <a:schemeClr val="bg1"/>
+              </a:solidFill>
+            </a:endParaRPr>
           </a:p>
         </p:txBody>
       </p:sp>
@@ -6075,7 +5886,7 @@
           <a:bodyPr wrap="square" rtlCol="0" anchor="ctr"/>
           <a:lstStyle/>
           <a:p>
-            <a:pPr indent="0" marL="0">
+            <a:pPr marL="0" indent="0">
               <a:buNone/>
             </a:pPr>
             <a:r>
@@ -6109,6 +5920,7 @@
         <a:solidFill>
           <a:srgbClr val="FFFFFF"/>
         </a:solidFill>
+        <a:effectLst/>
       </p:bgPr>
     </p:bg>
     <p:spTree>
@@ -6206,7 +6018,7 @@
           <a:bodyPr wrap="square" rtlCol="0" anchor="ctr"/>
           <a:lstStyle/>
           <a:p>
-            <a:pPr indent="0" marL="0">
+            <a:pPr marL="0" indent="0">
               <a:buNone/>
             </a:pPr>
             <a:r>
@@ -6245,7 +6057,7 @@
           <a:bodyPr wrap="square" rtlCol="0" anchor="t"/>
           <a:lstStyle/>
           <a:p>
-            <a:pPr indent="0" marL="0">
+            <a:pPr marL="0" indent="0">
               <a:buNone/>
             </a:pPr>
             <a:r>
@@ -6259,13 +6071,35 @@
               </a:rPr>
               <a:t>1  </a:t>
             </a:r>
-            <a:pPr indent="0" marL="0">
-              <a:spcAft>
-                <a:spcPts val="1800"/>
-              </a:spcAft>
+            <a:r>
+              <a:rPr lang="en-US" sz="2300" dirty="0">
+                <a:solidFill>
+                  <a:srgbClr val="2A2A33"/>
+                </a:solidFill>
+                <a:latin typeface="Segoe UI" pitchFamily="34" charset="0"/>
+                <a:ea typeface="Segoe UI" pitchFamily="34" charset="-122"/>
+                <a:cs typeface="Segoe UI" pitchFamily="34" charset="-120"/>
+              </a:rPr>
+              <a:t>Motivation &amp; goals</a:t>
+            </a:r>
+            <a:endParaRPr lang="en-US" sz="2300" dirty="0"/>
+          </a:p>
+          <a:p>
+            <a:pPr marL="0" indent="0">
               <a:buNone/>
             </a:pPr>
             <a:r>
+              <a:rPr lang="en-US" sz="2300" b="1" dirty="0">
+                <a:solidFill>
+                  <a:srgbClr val="F59E0B"/>
+                </a:solidFill>
+                <a:latin typeface="Segoe UI" pitchFamily="34" charset="0"/>
+                <a:ea typeface="Segoe UI" pitchFamily="34" charset="-122"/>
+                <a:cs typeface="Segoe UI" pitchFamily="34" charset="-120"/>
+              </a:rPr>
+              <a:t>2  </a:t>
+            </a:r>
+            <a:r>
               <a:rPr lang="en-US" sz="2300" dirty="0">
                 <a:solidFill>
                   <a:srgbClr val="2A2A33"/>
@@ -6274,85 +6108,45 @@
                 <a:ea typeface="Segoe UI" pitchFamily="34" charset="-122"/>
                 <a:cs typeface="Segoe UI" pitchFamily="34" charset="-120"/>
               </a:rPr>
-              <a:t>Motivation &amp; goals</a:t>
+              <a:t>System overview</a:t>
             </a:r>
             <a:endParaRPr lang="en-US" sz="2300" dirty="0"/>
           </a:p>
           <a:p>
-            <a:pPr indent="0" marL="0">
+            <a:pPr marL="0" indent="0">
               <a:buNone/>
             </a:pPr>
             <a:r>
               <a:rPr lang="en-US" sz="2300" b="1" dirty="0">
                 <a:solidFill>
-                  <a:srgbClr val="F59E0B"/>
-                </a:solidFill>
-                <a:latin typeface="Segoe UI" pitchFamily="34" charset="0"/>
-                <a:ea typeface="Segoe UI" pitchFamily="34" charset="-122"/>
-                <a:cs typeface="Segoe UI" pitchFamily="34" charset="-120"/>
-              </a:rPr>
-              <a:t>2  </a:t>
-            </a:r>
-            <a:pPr indent="0" marL="0">
-              <a:spcAft>
-                <a:spcPts val="1800"/>
-              </a:spcAft>
+                  <a:srgbClr val="7C3AED"/>
+                </a:solidFill>
+                <a:latin typeface="Segoe UI" pitchFamily="34" charset="0"/>
+                <a:ea typeface="Segoe UI" pitchFamily="34" charset="-122"/>
+                <a:cs typeface="Segoe UI" pitchFamily="34" charset="-120"/>
+              </a:rPr>
+              <a:t>3  </a:t>
+            </a:r>
+            <a:r>
+              <a:rPr lang="en-US" sz="2300" dirty="0">
+                <a:solidFill>
+                  <a:srgbClr val="2A2A33"/>
+                </a:solidFill>
+                <a:latin typeface="Segoe UI" pitchFamily="34" charset="0"/>
+                <a:ea typeface="Segoe UI" pitchFamily="34" charset="-122"/>
+                <a:cs typeface="Segoe UI" pitchFamily="34" charset="-120"/>
+              </a:rPr>
+              <a:t>Frequency hopping &amp; sync</a:t>
+            </a:r>
+            <a:endParaRPr lang="en-US" sz="2300" dirty="0"/>
+          </a:p>
+          <a:p>
+            <a:pPr marL="0" indent="0">
               <a:buNone/>
             </a:pPr>
             <a:r>
-              <a:rPr lang="en-US" sz="2300" dirty="0">
-                <a:solidFill>
-                  <a:srgbClr val="2A2A33"/>
-                </a:solidFill>
-                <a:latin typeface="Segoe UI" pitchFamily="34" charset="0"/>
-                <a:ea typeface="Segoe UI" pitchFamily="34" charset="-122"/>
-                <a:cs typeface="Segoe UI" pitchFamily="34" charset="-120"/>
-              </a:rPr>
-              <a:t>System overview</a:t>
-            </a:r>
-            <a:endParaRPr lang="en-US" sz="2300" dirty="0"/>
-          </a:p>
-          <a:p>
-            <a:pPr indent="0" marL="0">
-              <a:buNone/>
-            </a:pPr>
-            <a:r>
               <a:rPr lang="en-US" sz="2300" b="1" dirty="0">
                 <a:solidFill>
-                  <a:srgbClr val="7C3AED"/>
-                </a:solidFill>
-                <a:latin typeface="Segoe UI" pitchFamily="34" charset="0"/>
-                <a:ea typeface="Segoe UI" pitchFamily="34" charset="-122"/>
-                <a:cs typeface="Segoe UI" pitchFamily="34" charset="-120"/>
-              </a:rPr>
-              <a:t>3  </a:t>
-            </a:r>
-            <a:pPr indent="0" marL="0">
-              <a:spcAft>
-                <a:spcPts val="1800"/>
-              </a:spcAft>
-              <a:buNone/>
-            </a:pPr>
-            <a:r>
-              <a:rPr lang="en-US" sz="2300" dirty="0">
-                <a:solidFill>
-                  <a:srgbClr val="2A2A33"/>
-                </a:solidFill>
-                <a:latin typeface="Segoe UI" pitchFamily="34" charset="0"/>
-                <a:ea typeface="Segoe UI" pitchFamily="34" charset="-122"/>
-                <a:cs typeface="Segoe UI" pitchFamily="34" charset="-120"/>
-              </a:rPr>
-              <a:t>Frequency hopping &amp; sync</a:t>
-            </a:r>
-            <a:endParaRPr lang="en-US" sz="2300" dirty="0"/>
-          </a:p>
-          <a:p>
-            <a:pPr indent="0" marL="0">
-              <a:buNone/>
-            </a:pPr>
-            <a:r>
-              <a:rPr lang="en-US" sz="2300" b="1" dirty="0">
-                <a:solidFill>
                   <a:srgbClr val="06B6D4"/>
                 </a:solidFill>
                 <a:latin typeface="Segoe UI" pitchFamily="34" charset="0"/>
@@ -6361,12 +6155,6 @@
               </a:rPr>
               <a:t>4  </a:t>
             </a:r>
-            <a:pPr indent="0" marL="0">
-              <a:spcAft>
-                <a:spcPts val="1800"/>
-              </a:spcAft>
-              <a:buNone/>
-            </a:pPr>
             <a:r>
               <a:rPr lang="en-US" sz="2300" dirty="0">
                 <a:solidFill>
@@ -6403,7 +6191,7 @@
           <a:bodyPr wrap="square" rtlCol="0" anchor="t"/>
           <a:lstStyle/>
           <a:p>
-            <a:pPr indent="0" marL="0">
+            <a:pPr marL="0" indent="0">
               <a:buNone/>
             </a:pPr>
             <a:r>
@@ -6417,13 +6205,35 @@
               </a:rPr>
               <a:t>5  </a:t>
             </a:r>
-            <a:pPr indent="0" marL="0">
-              <a:spcAft>
-                <a:spcPts val="1800"/>
-              </a:spcAft>
+            <a:r>
+              <a:rPr lang="en-US" sz="2300" dirty="0">
+                <a:solidFill>
+                  <a:srgbClr val="2A2A33"/>
+                </a:solidFill>
+                <a:latin typeface="Segoe UI" pitchFamily="34" charset="0"/>
+                <a:ea typeface="Segoe UI" pitchFamily="34" charset="-122"/>
+                <a:cs typeface="Segoe UI" pitchFamily="34" charset="-120"/>
+              </a:rPr>
+              <a:t>Forward error correction</a:t>
+            </a:r>
+            <a:endParaRPr lang="en-US" sz="2300" dirty="0"/>
+          </a:p>
+          <a:p>
+            <a:pPr marL="0" indent="0">
               <a:buNone/>
             </a:pPr>
             <a:r>
+              <a:rPr lang="en-US" sz="2300" b="1" dirty="0">
+                <a:solidFill>
+                  <a:srgbClr val="F59E0B"/>
+                </a:solidFill>
+                <a:latin typeface="Segoe UI" pitchFamily="34" charset="0"/>
+                <a:ea typeface="Segoe UI" pitchFamily="34" charset="-122"/>
+                <a:cs typeface="Segoe UI" pitchFamily="34" charset="-120"/>
+              </a:rPr>
+              <a:t>6  </a:t>
+            </a:r>
+            <a:r>
               <a:rPr lang="en-US" sz="2300" dirty="0">
                 <a:solidFill>
                   <a:srgbClr val="2A2A33"/>
@@ -6432,85 +6242,45 @@
                 <a:ea typeface="Segoe UI" pitchFamily="34" charset="-122"/>
                 <a:cs typeface="Segoe UI" pitchFamily="34" charset="-120"/>
               </a:rPr>
-              <a:t>Forward error correction</a:t>
+              <a:t>Real-time audio</a:t>
             </a:r>
             <a:endParaRPr lang="en-US" sz="2300" dirty="0"/>
           </a:p>
           <a:p>
-            <a:pPr indent="0" marL="0">
+            <a:pPr marL="0" indent="0">
               <a:buNone/>
             </a:pPr>
             <a:r>
               <a:rPr lang="en-US" sz="2300" b="1" dirty="0">
                 <a:solidFill>
-                  <a:srgbClr val="F59E0B"/>
-                </a:solidFill>
-                <a:latin typeface="Segoe UI" pitchFamily="34" charset="0"/>
-                <a:ea typeface="Segoe UI" pitchFamily="34" charset="-122"/>
-                <a:cs typeface="Segoe UI" pitchFamily="34" charset="-120"/>
-              </a:rPr>
-              <a:t>6  </a:t>
-            </a:r>
-            <a:pPr indent="0" marL="0">
-              <a:spcAft>
-                <a:spcPts val="1800"/>
-              </a:spcAft>
+                  <a:srgbClr val="7C3AED"/>
+                </a:solidFill>
+                <a:latin typeface="Segoe UI" pitchFamily="34" charset="0"/>
+                <a:ea typeface="Segoe UI" pitchFamily="34" charset="-122"/>
+                <a:cs typeface="Segoe UI" pitchFamily="34" charset="-120"/>
+              </a:rPr>
+              <a:t>7  </a:t>
+            </a:r>
+            <a:r>
+              <a:rPr lang="en-US" sz="2300" dirty="0">
+                <a:solidFill>
+                  <a:srgbClr val="2A2A33"/>
+                </a:solidFill>
+                <a:latin typeface="Segoe UI" pitchFamily="34" charset="0"/>
+                <a:ea typeface="Segoe UI" pitchFamily="34" charset="-122"/>
+                <a:cs typeface="Segoe UI" pitchFamily="34" charset="-120"/>
+              </a:rPr>
+              <a:t>Security &amp; applications</a:t>
+            </a:r>
+            <a:endParaRPr lang="en-US" sz="2300" dirty="0"/>
+          </a:p>
+          <a:p>
+            <a:pPr marL="0" indent="0">
               <a:buNone/>
             </a:pPr>
             <a:r>
-              <a:rPr lang="en-US" sz="2300" dirty="0">
-                <a:solidFill>
-                  <a:srgbClr val="2A2A33"/>
-                </a:solidFill>
-                <a:latin typeface="Segoe UI" pitchFamily="34" charset="0"/>
-                <a:ea typeface="Segoe UI" pitchFamily="34" charset="-122"/>
-                <a:cs typeface="Segoe UI" pitchFamily="34" charset="-120"/>
-              </a:rPr>
-              <a:t>Real-time audio</a:t>
-            </a:r>
-            <a:endParaRPr lang="en-US" sz="2300" dirty="0"/>
-          </a:p>
-          <a:p>
-            <a:pPr indent="0" marL="0">
-              <a:buNone/>
-            </a:pPr>
-            <a:r>
               <a:rPr lang="en-US" sz="2300" b="1" dirty="0">
                 <a:solidFill>
-                  <a:srgbClr val="7C3AED"/>
-                </a:solidFill>
-                <a:latin typeface="Segoe UI" pitchFamily="34" charset="0"/>
-                <a:ea typeface="Segoe UI" pitchFamily="34" charset="-122"/>
-                <a:cs typeface="Segoe UI" pitchFamily="34" charset="-120"/>
-              </a:rPr>
-              <a:t>7  </a:t>
-            </a:r>
-            <a:pPr indent="0" marL="0">
-              <a:spcAft>
-                <a:spcPts val="1800"/>
-              </a:spcAft>
-              <a:buNone/>
-            </a:pPr>
-            <a:r>
-              <a:rPr lang="en-US" sz="2300" dirty="0">
-                <a:solidFill>
-                  <a:srgbClr val="2A2A33"/>
-                </a:solidFill>
-                <a:latin typeface="Segoe UI" pitchFamily="34" charset="0"/>
-                <a:ea typeface="Segoe UI" pitchFamily="34" charset="-122"/>
-                <a:cs typeface="Segoe UI" pitchFamily="34" charset="-120"/>
-              </a:rPr>
-              <a:t>Security &amp; applications</a:t>
-            </a:r>
-            <a:endParaRPr lang="en-US" sz="2300" dirty="0"/>
-          </a:p>
-          <a:p>
-            <a:pPr indent="0" marL="0">
-              <a:buNone/>
-            </a:pPr>
-            <a:r>
-              <a:rPr lang="en-US" sz="2300" b="1" dirty="0">
-                <a:solidFill>
                   <a:srgbClr val="06B6D4"/>
                 </a:solidFill>
                 <a:latin typeface="Segoe UI" pitchFamily="34" charset="0"/>
@@ -6519,12 +6289,6 @@
               </a:rPr>
               <a:t>8  </a:t>
             </a:r>
-            <a:pPr indent="0" marL="0">
-              <a:spcAft>
-                <a:spcPts val="1800"/>
-              </a:spcAft>
-              <a:buNone/>
-            </a:pPr>
             <a:r>
               <a:rPr lang="en-US" sz="2300" dirty="0">
                 <a:solidFill>
@@ -6581,7 +6345,7 @@
           <a:bodyPr wrap="square" rtlCol="0" anchor="ctr"/>
           <a:lstStyle/>
           <a:p>
-            <a:pPr algn="ctr" indent="0" marL="0">
+            <a:pPr marL="0" indent="0" algn="ctr">
               <a:buNone/>
             </a:pPr>
             <a:r>
@@ -6620,7 +6384,7 @@
           <a:bodyPr wrap="square" rtlCol="0" anchor="ctr"/>
           <a:lstStyle/>
           <a:p>
-            <a:pPr indent="0" marL="0">
+            <a:pPr marL="0" indent="0">
               <a:buNone/>
             </a:pPr>
             <a:r>
@@ -6654,6 +6418,7 @@
         <a:solidFill>
           <a:srgbClr val="FFFFFF"/>
         </a:solidFill>
+        <a:effectLst/>
       </p:bgPr>
     </p:bg>
     <p:spTree>
@@ -6751,7 +6516,7 @@
           <a:bodyPr wrap="square" rtlCol="0" anchor="ctr"/>
           <a:lstStyle/>
           <a:p>
-            <a:pPr indent="0" marL="0">
+            <a:pPr marL="0" indent="0">
               <a:buNone/>
             </a:pPr>
             <a:r>
@@ -6916,7 +6681,7 @@
           <a:bodyPr wrap="square" rtlCol="0" anchor="ctr"/>
           <a:lstStyle/>
           <a:p>
-            <a:pPr algn="ctr" indent="0" marL="0">
+            <a:pPr marL="0" indent="0" algn="ctr">
               <a:buNone/>
             </a:pPr>
             <a:r>
@@ -6955,7 +6720,7 @@
           <a:bodyPr wrap="square" rtlCol="0" anchor="ctr"/>
           <a:lstStyle/>
           <a:p>
-            <a:pPr indent="0" marL="0">
+            <a:pPr marL="0" indent="0">
               <a:buNone/>
             </a:pPr>
             <a:r>
@@ -6989,6 +6754,7 @@
         <a:solidFill>
           <a:srgbClr val="FFFFFF"/>
         </a:solidFill>
+        <a:effectLst/>
       </p:bgPr>
     </p:bg>
     <p:spTree>
@@ -7086,7 +6852,7 @@
           <a:bodyPr wrap="square" rtlCol="0" anchor="ctr"/>
           <a:lstStyle/>
           <a:p>
-            <a:pPr indent="0" marL="0">
+            <a:pPr marL="0" indent="0">
               <a:buNone/>
             </a:pPr>
             <a:r>
@@ -7218,8 +6984,8 @@
         </p:nvSpPr>
         <p:spPr>
           <a:xfrm>
-            <a:off x="1463040" y="3611880"/>
-            <a:ext cx="9235440" cy="2606040"/>
+            <a:off x="2243016" y="4126140"/>
+            <a:ext cx="7674707" cy="1641614"/>
           </a:xfrm>
           <a:prstGeom prst="roundRect">
             <a:avLst>
@@ -7239,21 +7005,21 @@
       </p:sp>
       <p:pic>
         <p:nvPicPr>
-          <p:cNvPr id="8" name="Image 0" descr="C:/Users/h/AppData/Local/Temp/claude/c--Users-h-Desktop-Mini-project-Fec-Mini-Project/4af49bb4-fc29-49ed-b315-f05a2bedcaee/scratchpad/pptxbuild/assets/context.png">    </p:cNvPr>
+          <p:cNvPr id="8" name="Image 0" descr="C:/Users/h/AppData/Local/Temp/claude/c--Users-h-Desktop-Mini-project-Fec-Mini-Project/4af49bb4-fc29-49ed-b315-f05a2bedcaee/scratchpad/pptxbuild/assets/context.png"/>
           <p:cNvPicPr>
             <a:picLocks noChangeAspect="1"/>
           </p:cNvPicPr>
           <p:nvPr/>
         </p:nvPicPr>
         <p:blipFill>
-          <a:blip r:embed="rId1"/>
-          <a:srcRect l="0" r="0" t="0" b="0"/>
+          <a:blip r:embed="rId3"/>
+          <a:srcRect/>
           <a:stretch/>
         </p:blipFill>
         <p:spPr>
           <a:xfrm>
-            <a:off x="1609344" y="3758184"/>
-            <a:ext cx="8942832" cy="2313432"/>
+            <a:off x="2449267" y="4244873"/>
+            <a:ext cx="7293160" cy="1388517"/>
           </a:xfrm>
           <a:prstGeom prst="rect">
             <a:avLst/>
@@ -7301,7 +7067,7 @@
           <a:bodyPr wrap="square" rtlCol="0" anchor="ctr"/>
           <a:lstStyle/>
           <a:p>
-            <a:pPr algn="ctr" indent="0" marL="0">
+            <a:pPr marL="0" indent="0" algn="ctr">
               <a:buNone/>
             </a:pPr>
             <a:r>
@@ -7340,7 +7106,7 @@
           <a:bodyPr wrap="square" rtlCol="0" anchor="ctr"/>
           <a:lstStyle/>
           <a:p>
-            <a:pPr indent="0" marL="0">
+            <a:pPr marL="0" indent="0">
               <a:buNone/>
             </a:pPr>
             <a:r>
@@ -7374,6 +7140,7 @@
         <a:solidFill>
           <a:srgbClr val="FFFFFF"/>
         </a:solidFill>
+        <a:effectLst/>
       </p:bgPr>
     </p:bg>
     <p:spTree>
@@ -7471,7 +7238,7 @@
           <a:bodyPr wrap="square" rtlCol="0" anchor="ctr"/>
           <a:lstStyle/>
           <a:p>
-            <a:pPr indent="0" marL="0">
+            <a:pPr marL="0" indent="0">
               <a:buNone/>
             </a:pPr>
             <a:r>
@@ -7624,15 +7391,15 @@
       </p:sp>
       <p:pic>
         <p:nvPicPr>
-          <p:cNvPr id="8" name="Image 0" descr="C:/Users/h/AppData/Local/Temp/claude/c--Users-h-Desktop-Mini-project-Fec-Mini-Project/4af49bb4-fc29-49ed-b315-f05a2bedcaee/scratchpad/pptxbuild/assets/architecture.png">    </p:cNvPr>
+          <p:cNvPr id="8" name="Image 0" descr="C:/Users/h/AppData/Local/Temp/claude/c--Users-h-Desktop-Mini-project-Fec-Mini-Project/4af49bb4-fc29-49ed-b315-f05a2bedcaee/scratchpad/pptxbuild/assets/architecture.png"/>
           <p:cNvPicPr>
             <a:picLocks noChangeAspect="1"/>
           </p:cNvPicPr>
           <p:nvPr/>
         </p:nvPicPr>
         <p:blipFill>
-          <a:blip r:embed="rId1"/>
-          <a:srcRect l="0" r="0" t="0" b="0"/>
+          <a:blip r:embed="rId3"/>
+          <a:srcRect/>
           <a:stretch/>
         </p:blipFill>
         <p:spPr>
@@ -7686,7 +7453,7 @@
           <a:bodyPr wrap="square" rtlCol="0" anchor="ctr"/>
           <a:lstStyle/>
           <a:p>
-            <a:pPr algn="ctr" indent="0" marL="0">
+            <a:pPr marL="0" indent="0" algn="ctr">
               <a:buNone/>
             </a:pPr>
             <a:r>
@@ -7725,7 +7492,7 @@
           <a:bodyPr wrap="square" rtlCol="0" anchor="ctr"/>
           <a:lstStyle/>
           <a:p>
-            <a:pPr indent="0" marL="0">
+            <a:pPr marL="0" indent="0">
               <a:buNone/>
             </a:pPr>
             <a:r>
@@ -7759,6 +7526,7 @@
         <a:solidFill>
           <a:srgbClr val="FFFFFF"/>
         </a:solidFill>
+        <a:effectLst/>
       </p:bgPr>
     </p:bg>
     <p:spTree>
@@ -7856,7 +7624,7 @@
           <a:bodyPr wrap="square" rtlCol="0" anchor="ctr"/>
           <a:lstStyle/>
           <a:p>
-            <a:pPr indent="0" marL="0">
+            <a:pPr marL="0" indent="0">
               <a:buNone/>
             </a:pPr>
             <a:r>
@@ -8049,7 +7817,7 @@
           <a:bodyPr wrap="square" rtlCol="0" anchor="t"/>
           <a:lstStyle/>
           <a:p>
-            <a:pPr indent="0" marL="0">
+            <a:pPr marL="0" indent="0">
               <a:lnSpc>
                 <a:spcPct val="125000"/>
               </a:lnSpc>
@@ -8071,7 +7839,7 @@
             <a:endParaRPr lang="en-US" sz="1400" dirty="0"/>
           </a:p>
           <a:p>
-            <a:pPr indent="0" marL="0">
+            <a:pPr marL="0" indent="0">
               <a:lnSpc>
                 <a:spcPct val="125000"/>
               </a:lnSpc>
@@ -8092,7 +7860,7 @@
             <a:endParaRPr lang="en-US" sz="1400" dirty="0"/>
           </a:p>
           <a:p>
-            <a:pPr indent="0" marL="0">
+            <a:pPr marL="0" indent="0">
               <a:lnSpc>
                 <a:spcPct val="125000"/>
               </a:lnSpc>
@@ -8154,7 +7922,7 @@
           <a:bodyPr wrap="square" rtlCol="0" anchor="ctr"/>
           <a:lstStyle/>
           <a:p>
-            <a:pPr algn="ctr" indent="0" marL="0">
+            <a:pPr marL="0" indent="0" algn="ctr">
               <a:buNone/>
             </a:pPr>
             <a:r>
@@ -8193,7 +7961,7 @@
           <a:bodyPr wrap="square" rtlCol="0" anchor="ctr"/>
           <a:lstStyle/>
           <a:p>
-            <a:pPr indent="0" marL="0">
+            <a:pPr marL="0" indent="0">
               <a:buNone/>
             </a:pPr>
             <a:r>
@@ -8227,6 +7995,7 @@
         <a:solidFill>
           <a:srgbClr val="FFFFFF"/>
         </a:solidFill>
+        <a:effectLst/>
       </p:bgPr>
     </p:bg>
     <p:spTree>
@@ -8324,7 +8093,7 @@
           <a:bodyPr wrap="square" rtlCol="0" anchor="ctr"/>
           <a:lstStyle/>
           <a:p>
-            <a:pPr indent="0" marL="0">
+            <a:pPr marL="0" indent="0">
               <a:buNone/>
             </a:pPr>
             <a:r>
@@ -8473,7 +8242,7 @@
           <a:bodyPr wrap="square" rtlCol="0" anchor="ctr"/>
           <a:lstStyle/>
           <a:p>
-            <a:pPr algn="ctr" indent="0" marL="0">
+            <a:pPr marL="0" indent="0" algn="ctr">
               <a:buNone/>
             </a:pPr>
             <a:r>
@@ -8490,7 +8259,7 @@
             <a:endParaRPr lang="en-US" sz="1500" dirty="0"/>
           </a:p>
           <a:p>
-            <a:pPr algn="ctr" indent="0" marL="0">
+            <a:pPr marL="0" indent="0" algn="ctr">
               <a:buNone/>
             </a:pPr>
             <a:r>
@@ -8554,7 +8323,7 @@
           <a:bodyPr wrap="square" rtlCol="0" anchor="ctr"/>
           <a:lstStyle/>
           <a:p>
-            <a:pPr algn="ctr" indent="0" marL="0">
+            <a:pPr marL="0" indent="0" algn="ctr">
               <a:buNone/>
             </a:pPr>
             <a:r>
@@ -8571,7 +8340,7 @@
             <a:endParaRPr lang="en-US" sz="1500" dirty="0"/>
           </a:p>
           <a:p>
-            <a:pPr algn="ctr" indent="0" marL="0">
+            <a:pPr marL="0" indent="0" algn="ctr">
               <a:buNone/>
             </a:pPr>
             <a:r>
@@ -8635,7 +8404,7 @@
           <a:bodyPr wrap="square" rtlCol="0" anchor="ctr"/>
           <a:lstStyle/>
           <a:p>
-            <a:pPr algn="ctr" indent="0" marL="0">
+            <a:pPr marL="0" indent="0" algn="ctr">
               <a:buNone/>
             </a:pPr>
             <a:r>
@@ -8652,7 +8421,7 @@
             <a:endParaRPr lang="en-US" sz="1500" dirty="0"/>
           </a:p>
           <a:p>
-            <a:pPr algn="ctr" indent="0" marL="0">
+            <a:pPr marL="0" indent="0" algn="ctr">
               <a:buNone/>
             </a:pPr>
             <a:r>
@@ -8716,7 +8485,7 @@
           <a:bodyPr wrap="square" rtlCol="0" anchor="ctr"/>
           <a:lstStyle/>
           <a:p>
-            <a:pPr algn="ctr" indent="0" marL="0">
+            <a:pPr marL="0" indent="0" algn="ctr">
               <a:buNone/>
             </a:pPr>
             <a:r>
@@ -8733,7 +8502,7 @@
             <a:endParaRPr lang="en-US" sz="1500" dirty="0"/>
           </a:p>
           <a:p>
-            <a:pPr algn="ctr" indent="0" marL="0">
+            <a:pPr marL="0" indent="0" algn="ctr">
               <a:buNone/>
             </a:pPr>
             <a:r>
@@ -8797,7 +8566,7 @@
           <a:bodyPr wrap="square" rtlCol="0" anchor="ctr"/>
           <a:lstStyle/>
           <a:p>
-            <a:pPr algn="ctr" indent="0" marL="0">
+            <a:pPr marL="0" indent="0" algn="ctr">
               <a:buNone/>
             </a:pPr>
             <a:r>
@@ -8814,7 +8583,7 @@
             <a:endParaRPr lang="en-US" sz="1300" dirty="0"/>
           </a:p>
           <a:p>
-            <a:pPr algn="ctr" indent="0" marL="0">
+            <a:pPr marL="0" indent="0" algn="ctr">
               <a:buNone/>
             </a:pPr>
             <a:r>
@@ -8878,7 +8647,7 @@
           <a:bodyPr wrap="square" rtlCol="0" anchor="ctr"/>
           <a:lstStyle/>
           <a:p>
-            <a:pPr algn="ctr" indent="0" marL="0">
+            <a:pPr marL="0" indent="0" algn="ctr">
               <a:buNone/>
             </a:pPr>
             <a:r>
@@ -8895,7 +8664,7 @@
             <a:endParaRPr lang="en-US" sz="1300" dirty="0"/>
           </a:p>
           <a:p>
-            <a:pPr algn="ctr" indent="0" marL="0">
+            <a:pPr marL="0" indent="0" algn="ctr">
               <a:buNone/>
             </a:pPr>
             <a:r>
@@ -8934,7 +8703,7 @@
           <a:bodyPr wrap="square" rtlCol="0" anchor="ctr"/>
           <a:lstStyle/>
           <a:p>
-            <a:pPr indent="0" marL="0">
+            <a:pPr marL="0" indent="0">
               <a:buNone/>
             </a:pPr>
             <a:r>
@@ -8993,7 +8762,7 @@
           <a:bodyPr wrap="square" rtlCol="0" anchor="ctr"/>
           <a:lstStyle/>
           <a:p>
-            <a:pPr algn="ctr" indent="0" marL="0">
+            <a:pPr marL="0" indent="0" algn="ctr">
               <a:buNone/>
             </a:pPr>
             <a:r>
@@ -9032,7 +8801,7 @@
           <a:bodyPr wrap="square" rtlCol="0" anchor="ctr"/>
           <a:lstStyle/>
           <a:p>
-            <a:pPr indent="0" marL="0">
+            <a:pPr marL="0" indent="0">
               <a:buNone/>
             </a:pPr>
             <a:r>
@@ -9066,6 +8835,7 @@
         <a:solidFill>
           <a:srgbClr val="FFFFFF"/>
         </a:solidFill>
+        <a:effectLst/>
       </p:bgPr>
     </p:bg>
     <p:spTree>
@@ -9163,7 +8933,7 @@
           <a:bodyPr wrap="square" rtlCol="0" anchor="ctr"/>
           <a:lstStyle/>
           <a:p>
-            <a:pPr indent="0" marL="0">
+            <a:pPr marL="0" indent="0">
               <a:buNone/>
             </a:pPr>
             <a:r>
@@ -9295,8 +9065,8 @@
         </p:nvSpPr>
         <p:spPr>
           <a:xfrm>
-            <a:off x="1737360" y="3611880"/>
-            <a:ext cx="8686800" cy="2606040"/>
+            <a:off x="1774092" y="3469953"/>
+            <a:ext cx="8650067" cy="2967423"/>
           </a:xfrm>
           <a:prstGeom prst="roundRect">
             <a:avLst>
@@ -9316,21 +9086,21 @@
       </p:sp>
       <p:pic>
         <p:nvPicPr>
-          <p:cNvPr id="8" name="Image 0" descr="C:/Users/h/AppData/Local/Temp/claude/c--Users-h-Desktop-Mini-project-Fec-Mini-Project/4af49bb4-fc29-49ed-b315-f05a2bedcaee/scratchpad/pptxbuild/assets/xor-fec.png">    </p:cNvPr>
+          <p:cNvPr id="8" name="Image 0" descr="C:/Users/h/AppData/Local/Temp/claude/c--Users-h-Desktop-Mini-project-Fec-Mini-Project/4af49bb4-fc29-49ed-b315-f05a2bedcaee/scratchpad/pptxbuild/assets/xor-fec.png"/>
           <p:cNvPicPr>
             <a:picLocks noChangeAspect="1"/>
           </p:cNvPicPr>
           <p:nvPr/>
         </p:nvPicPr>
         <p:blipFill>
-          <a:blip r:embed="rId1"/>
-          <a:srcRect l="0" r="0" t="0" b="0"/>
+          <a:blip r:embed="rId3"/>
+          <a:srcRect/>
           <a:stretch/>
         </p:blipFill>
         <p:spPr>
           <a:xfrm>
-            <a:off x="1883664" y="3758184"/>
-            <a:ext cx="8394192" cy="2313432"/>
+            <a:off x="2942312" y="3611880"/>
+            <a:ext cx="6276895" cy="2683569"/>
           </a:xfrm>
           <a:prstGeom prst="rect">
             <a:avLst/>
@@ -9378,7 +9148,7 @@
           <a:bodyPr wrap="square" rtlCol="0" anchor="ctr"/>
           <a:lstStyle/>
           <a:p>
-            <a:pPr algn="ctr" indent="0" marL="0">
+            <a:pPr marL="0" indent="0" algn="ctr">
               <a:buNone/>
             </a:pPr>
             <a:r>
@@ -9417,7 +9187,7 @@
           <a:bodyPr wrap="square" rtlCol="0" anchor="ctr"/>
           <a:lstStyle/>
           <a:p>
-            <a:pPr indent="0" marL="0">
+            <a:pPr marL="0" indent="0">
               <a:buNone/>
             </a:pPr>
             <a:r>
@@ -9451,6 +9221,7 @@
         <a:solidFill>
           <a:srgbClr val="FFFFFF"/>
         </a:solidFill>
+        <a:effectLst/>
       </p:bgPr>
     </p:bg>
     <p:spTree>
@@ -9548,7 +9319,7 @@
           <a:bodyPr wrap="square" rtlCol="0" anchor="ctr"/>
           <a:lstStyle/>
           <a:p>
-            <a:pPr indent="0" marL="0">
+            <a:pPr marL="0" indent="0">
               <a:buNone/>
             </a:pPr>
             <a:r>
@@ -9720,7 +9491,7 @@
           <a:bodyPr wrap="square" rtlCol="0" anchor="ctr"/>
           <a:lstStyle/>
           <a:p>
-            <a:pPr algn="ctr" indent="0" marL="0">
+            <a:pPr marL="0" indent="0" algn="ctr">
               <a:buNone/>
             </a:pPr>
             <a:r>
@@ -9740,15 +9511,15 @@
       </p:sp>
       <p:pic>
         <p:nvPicPr>
-          <p:cNvPr id="9" name="Image 0" descr="C:/Users/h/AppData/Local/Temp/claude/c--Users-h-Desktop-Mini-project-Fec-Mini-Project/4af49bb4-fc29-49ed-b315-f05a2bedcaee/scratchpad/pptxbuild/assets/audio-pipe-transmit.png">    </p:cNvPr>
+          <p:cNvPr id="9" name="Image 0" descr="C:/Users/h/AppData/Local/Temp/claude/c--Users-h-Desktop-Mini-project-Fec-Mini-Project/4af49bb4-fc29-49ed-b315-f05a2bedcaee/scratchpad/pptxbuild/assets/audio-pipe-transmit.png"/>
           <p:cNvPicPr>
             <a:picLocks noChangeAspect="1"/>
           </p:cNvPicPr>
           <p:nvPr/>
         </p:nvPicPr>
         <p:blipFill>
-          <a:blip r:embed="rId1"/>
-          <a:srcRect l="0" r="0" t="0" b="0"/>
+          <a:blip r:embed="rId3"/>
+          <a:srcRect/>
           <a:stretch/>
         </p:blipFill>
         <p:spPr>
@@ -9809,7 +9580,7 @@
           <a:bodyPr wrap="square" rtlCol="0" anchor="ctr"/>
           <a:lstStyle/>
           <a:p>
-            <a:pPr algn="ctr" indent="0" marL="0">
+            <a:pPr marL="0" indent="0" algn="ctr">
               <a:buNone/>
             </a:pPr>
             <a:r>
@@ -9829,15 +9600,15 @@
       </p:sp>
       <p:pic>
         <p:nvPicPr>
-          <p:cNvPr id="12" name="Image 1" descr="C:/Users/h/AppData/Local/Temp/claude/c--Users-h-Desktop-Mini-project-Fec-Mini-Project/4af49bb4-fc29-49ed-b315-f05a2bedcaee/scratchpad/pptxbuild/assets/audio-pipe-receive.png">    </p:cNvPr>
+          <p:cNvPr id="12" name="Image 1" descr="C:/Users/h/AppData/Local/Temp/claude/c--Users-h-Desktop-Mini-project-Fec-Mini-Project/4af49bb4-fc29-49ed-b315-f05a2bedcaee/scratchpad/pptxbuild/assets/audio-pipe-receive.png"/>
           <p:cNvPicPr>
             <a:picLocks noChangeAspect="1"/>
           </p:cNvPicPr>
           <p:nvPr/>
         </p:nvPicPr>
         <p:blipFill>
-          <a:blip r:embed="rId2"/>
-          <a:srcRect l="0" r="0" t="0" b="0"/>
+          <a:blip r:embed="rId4"/>
+          <a:srcRect/>
           <a:stretch/>
         </p:blipFill>
         <p:spPr>
@@ -9891,7 +9662,7 @@
           <a:bodyPr wrap="square" rtlCol="0" anchor="ctr"/>
           <a:lstStyle/>
           <a:p>
-            <a:pPr algn="ctr" indent="0" marL="0">
+            <a:pPr marL="0" indent="0" algn="ctr">
               <a:buNone/>
             </a:pPr>
             <a:r>
@@ -9930,7 +9701,7 @@
           <a:bodyPr wrap="square" rtlCol="0" anchor="ctr"/>
           <a:lstStyle/>
           <a:p>
-            <a:pPr indent="0" marL="0">
+            <a:pPr marL="0" indent="0">
               <a:buNone/>
             </a:pPr>
             <a:r>
@@ -10249,4 +10020,265 @@
     </a:ext>
   </a:extLst>
 </a:theme>
+</file>
+
+<file path=ppt/theme/theme2.xml><?xml version="1.0" encoding="utf-8"?>
+<a:theme xmlns:a="http://schemas.openxmlformats.org/drawingml/2006/main" name="Office Theme">
+  <a:themeElements>
+    <a:clrScheme name="Office">
+      <a:dk1>
+        <a:sysClr val="windowText" lastClr="000000"/>
+      </a:dk1>
+      <a:lt1>
+        <a:sysClr val="window" lastClr="FFFFFF"/>
+      </a:lt1>
+      <a:dk2>
+        <a:srgbClr val="44546A"/>
+      </a:dk2>
+      <a:lt2>
+        <a:srgbClr val="E7E6E6"/>
+      </a:lt2>
+      <a:accent1>
+        <a:srgbClr val="5B9BD5"/>
+      </a:accent1>
+      <a:accent2>
+        <a:srgbClr val="ED7D31"/>
+      </a:accent2>
+      <a:accent3>
+        <a:srgbClr val="A5A5A5"/>
+      </a:accent3>
+      <a:accent4>
+        <a:srgbClr val="FFC000"/>
+      </a:accent4>
+      <a:accent5>
+        <a:srgbClr val="4472C4"/>
+      </a:accent5>
+      <a:accent6>
+        <a:srgbClr val="70AD47"/>
+      </a:accent6>
+      <a:hlink>
+        <a:srgbClr val="0563C1"/>
+      </a:hlink>
+      <a:folHlink>
+        <a:srgbClr val="954F72"/>
+      </a:folHlink>
+    </a:clrScheme>
+    <a:fontScheme name="Office">
+      <a:majorFont>
+        <a:latin typeface="Calibri Light" panose="020F0302020204030204"/>
+        <a:ea typeface=""/>
+        <a:cs typeface=""/>
+        <a:font script="Jpan" typeface="游ゴシック Light"/>
+        <a:font script="Hang" typeface="맑은 고딕"/>
+        <a:font script="Hans" typeface="等线 Light"/>
+        <a:font script="Hant" typeface="新細明體"/>
+        <a:font script="Arab" typeface="Times New Roman"/>
+        <a:font script="Hebr" typeface="Times New Roman"/>
+        <a:font script="Thai" typeface="Angsana New"/>
+        <a:font script="Ethi" typeface="Nyala"/>
+        <a:font script="Beng" typeface="Vrinda"/>
+        <a:font script="Gujr" typeface="Shruti"/>
+        <a:font script="Khmr" typeface="MoolBoran"/>
+        <a:font script="Knda" typeface="Tunga"/>
+        <a:font script="Guru" typeface="Raavi"/>
+        <a:font script="Cans" typeface="Euphemia"/>
+        <a:font script="Cher" typeface="Plantagenet Cherokee"/>
+        <a:font script="Yiii" typeface="Microsoft Yi Baiti"/>
+        <a:font script="Tibt" typeface="Microsoft Himalaya"/>
+        <a:font script="Thaa" typeface="MV Boli"/>
+        <a:font script="Deva" typeface="Mangal"/>
+        <a:font script="Telu" typeface="Gautami"/>
+        <a:font script="Taml" typeface="Latha"/>
+        <a:font script="Syrc" typeface="Estrangelo Edessa"/>
+        <a:font script="Orya" typeface="Kalinga"/>
+        <a:font script="Mlym" typeface="Kartika"/>
+        <a:font script="Laoo" typeface="DokChampa"/>
+        <a:font script="Sinh" typeface="Iskoola Pota"/>
+        <a:font script="Mong" typeface="Mongolian Baiti"/>
+        <a:font script="Viet" typeface="Times New Roman"/>
+        <a:font script="Uigh" typeface="Microsoft Uighur"/>
+        <a:font script="Geor" typeface="Sylfaen"/>
+      </a:majorFont>
+      <a:minorFont>
+        <a:latin typeface="Calibri" panose="020F0502020204030204"/>
+        <a:ea typeface=""/>
+        <a:cs typeface=""/>
+        <a:font script="Jpan" typeface="游ゴシック"/>
+        <a:font script="Hang" typeface="맑은 고딕"/>
+        <a:font script="Hans" typeface="等线"/>
+        <a:font script="Hant" typeface="新細明體"/>
+        <a:font script="Arab" typeface="Arial"/>
+        <a:font script="Hebr" typeface="Arial"/>
+        <a:font script="Thai" typeface="Cordia New"/>
+        <a:font script="Ethi" typeface="Nyala"/>
+        <a:font script="Beng" typeface="Vrinda"/>
+        <a:font script="Gujr" typeface="Shruti"/>
+        <a:font script="Khmr" typeface="DaunPenh"/>
+        <a:font script="Knda" typeface="Tunga"/>
+        <a:font script="Guru" typeface="Raavi"/>
+        <a:font script="Cans" typeface="Euphemia"/>
+        <a:font script="Cher" typeface="Plantagenet Cherokee"/>
+        <a:font script="Yiii" typeface="Microsoft Yi Baiti"/>
+        <a:font script="Tibt" typeface="Microsoft Himalaya"/>
+        <a:font script="Thaa" typeface="MV Boli"/>
+        <a:font script="Deva" typeface="Mangal"/>
+        <a:font script="Telu" typeface="Gautami"/>
+        <a:font script="Taml" typeface="Latha"/>
+        <a:font script="Syrc" typeface="Estrangelo Edessa"/>
+        <a:font script="Orya" typeface="Kalinga"/>
+        <a:font script="Mlym" typeface="Kartika"/>
+        <a:font script="Laoo" typeface="DokChampa"/>
+        <a:font script="Sinh" typeface="Iskoola Pota"/>
+        <a:font script="Mong" typeface="Mongolian Baiti"/>
+        <a:font script="Viet" typeface="Arial"/>
+        <a:font script="Uigh" typeface="Microsoft Uighur"/>
+        <a:font script="Geor" typeface="Sylfaen"/>
+      </a:minorFont>
+    </a:fontScheme>
+    <a:fmtScheme name="Office">
+      <a:fillStyleLst>
+        <a:solidFill>
+          <a:schemeClr val="phClr"/>
+        </a:solidFill>
+        <a:gradFill rotWithShape="1">
+          <a:gsLst>
+            <a:gs pos="0">
+              <a:schemeClr val="phClr">
+                <a:lumMod val="110000"/>
+                <a:satMod val="105000"/>
+                <a:tint val="67000"/>
+              </a:schemeClr>
+            </a:gs>
+            <a:gs pos="50000">
+              <a:schemeClr val="phClr">
+                <a:lumMod val="105000"/>
+                <a:satMod val="103000"/>
+                <a:tint val="73000"/>
+              </a:schemeClr>
+            </a:gs>
+            <a:gs pos="100000">
+              <a:schemeClr val="phClr">
+                <a:lumMod val="105000"/>
+                <a:satMod val="109000"/>
+                <a:tint val="81000"/>
+              </a:schemeClr>
+            </a:gs>
+          </a:gsLst>
+          <a:lin ang="5400000" scaled="0"/>
+        </a:gradFill>
+        <a:gradFill rotWithShape="1">
+          <a:gsLst>
+            <a:gs pos="0">
+              <a:schemeClr val="phClr">
+                <a:satMod val="103000"/>
+                <a:lumMod val="102000"/>
+                <a:tint val="94000"/>
+              </a:schemeClr>
+            </a:gs>
+            <a:gs pos="50000">
+              <a:schemeClr val="phClr">
+                <a:satMod val="110000"/>
+                <a:lumMod val="100000"/>
+                <a:shade val="100000"/>
+              </a:schemeClr>
+            </a:gs>
+            <a:gs pos="100000">
+              <a:schemeClr val="phClr">
+                <a:lumMod val="99000"/>
+                <a:satMod val="120000"/>
+                <a:shade val="78000"/>
+              </a:schemeClr>
+            </a:gs>
+          </a:gsLst>
+          <a:lin ang="5400000" scaled="0"/>
+        </a:gradFill>
+      </a:fillStyleLst>
+      <a:lnStyleLst>
+        <a:ln w="6350" cap="flat" cmpd="sng" algn="ctr">
+          <a:solidFill>
+            <a:schemeClr val="phClr"/>
+          </a:solidFill>
+          <a:prstDash val="solid"/>
+          <a:miter lim="800000"/>
+        </a:ln>
+        <a:ln w="12700" cap="flat" cmpd="sng" algn="ctr">
+          <a:solidFill>
+            <a:schemeClr val="phClr"/>
+          </a:solidFill>
+          <a:prstDash val="solid"/>
+          <a:miter lim="800000"/>
+        </a:ln>
+        <a:ln w="19050" cap="flat" cmpd="sng" algn="ctr">
+          <a:solidFill>
+            <a:schemeClr val="phClr"/>
+          </a:solidFill>
+          <a:prstDash val="solid"/>
+          <a:miter lim="800000"/>
+        </a:ln>
+      </a:lnStyleLst>
+      <a:effectStyleLst>
+        <a:effectStyle>
+          <a:effectLst/>
+        </a:effectStyle>
+        <a:effectStyle>
+          <a:effectLst/>
+        </a:effectStyle>
+        <a:effectStyle>
+          <a:effectLst>
+            <a:outerShdw blurRad="57150" dist="19050" dir="5400000" algn="ctr" rotWithShape="0">
+              <a:srgbClr val="000000">
+                <a:alpha val="63000"/>
+              </a:srgbClr>
+            </a:outerShdw>
+          </a:effectLst>
+        </a:effectStyle>
+      </a:effectStyleLst>
+      <a:bgFillStyleLst>
+        <a:solidFill>
+          <a:schemeClr val="phClr"/>
+        </a:solidFill>
+        <a:solidFill>
+          <a:schemeClr val="phClr">
+            <a:tint val="95000"/>
+            <a:satMod val="170000"/>
+          </a:schemeClr>
+        </a:solidFill>
+        <a:gradFill rotWithShape="1">
+          <a:gsLst>
+            <a:gs pos="0">
+              <a:schemeClr val="phClr">
+                <a:tint val="93000"/>
+                <a:satMod val="150000"/>
+                <a:shade val="98000"/>
+                <a:lumMod val="102000"/>
+              </a:schemeClr>
+            </a:gs>
+            <a:gs pos="50000">
+              <a:schemeClr val="phClr">
+                <a:tint val="98000"/>
+                <a:satMod val="130000"/>
+                <a:shade val="90000"/>
+                <a:lumMod val="103000"/>
+              </a:schemeClr>
+            </a:gs>
+            <a:gs pos="100000">
+              <a:schemeClr val="phClr">
+                <a:shade val="63000"/>
+                <a:satMod val="120000"/>
+              </a:schemeClr>
+            </a:gs>
+          </a:gsLst>
+          <a:lin ang="5400000" scaled="0"/>
+        </a:gradFill>
+      </a:bgFillStyleLst>
+    </a:fmtScheme>
+  </a:themeElements>
+  <a:objectDefaults/>
+  <a:extraClrSchemeLst/>
+  <a:extLst>
+    <a:ext uri="{05A4C25C-085E-4340-85A3-A5531E510DB2}">
+      <thm15:themeFamily xmlns:thm15="http://schemas.microsoft.com/office/thememl/2012/main" name="Office Theme" id="{62F939B6-93AF-4DB8-9C6B-D6C7DFDC589F}" vid="{4A3C46E8-61CC-4603-A589-7422A47A8E4A}"/>
+    </a:ext>
+  </a:extLst>
+</a:theme>
 </file>